--- a/_implementation-notes/evening-series/FotH Evening Session 3 Slides DRAFT v1.pptx
+++ b/_implementation-notes/evening-series/FotH Evening Session 3 Slides DRAFT v1.pptx
@@ -10,6 +10,7 @@
   <p:sldIdLst>
     <p:sldId id="256" r:id="rId2"/>
     <p:sldId id="264" r:id="rId35"/>
+    <p:sldId id="527" r:id="rId23"/>
     <p:sldId id="265" r:id="rId36"/>
     <p:sldId id="343" r:id="rId37"/>
     <p:sldId id="344" r:id="rId38"/>
@@ -19,7 +20,8 @@
     <p:sldId id="348" r:id="rId42"/>
     <p:sldId id="349" r:id="rId43"/>
     <p:sldId id="350" r:id="rId44"/>
-    <p:sldId id="526" r:id="rId45"/>
+    <p:sldId id="528" r:id="rId24"/>
+    <p:sldId id="529" r:id="rId25"/>
     <p:sldId id="351" r:id="rId46"/>
     <p:sldId id="352" r:id="rId47"/>
   </p:sldIdLst>
@@ -751,6 +753,214 @@
 </p:notes>
 </file>
 
+<file path=ppt/notesSlides/notesSlide15.xml><?xml version="1.0" encoding="utf-8"?>
+<p:notes xmlns:a="http://schemas.openxmlformats.org/drawingml/2006/main" xmlns:p="http://schemas.openxmlformats.org/presentationml/2006/main" xmlns:r="http://schemas.openxmlformats.org/officeDocument/2006/relationships">
+  <p:cSld>
+    <p:spTree>
+      <p:nvGrpSpPr>
+        <p:cNvPr id="1" name=""/>
+        <p:cNvGrpSpPr/>
+        <p:nvPr/>
+      </p:nvGrpSpPr>
+      <p:grpSpPr>
+        <a:xfrm>
+          <a:off x="0" y="0"/>
+          <a:ext cx="0" cy="0"/>
+          <a:chOff x="0" y="0"/>
+          <a:chExt cx="0" cy="0"/>
+        </a:xfrm>
+      </p:grpSpPr>
+      <p:sp>
+        <p:nvSpPr>
+          <p:cNvPr id="2" name="Notes Placeholder 1"/>
+          <p:cNvSpPr>
+            <a:spLocks noGrp="1"/>
+          </p:cNvSpPr>
+          <p:nvPr>
+            <p:ph type="body" idx="1"/>
+          </p:nvPr>
+        </p:nvSpPr>
+        <p:spPr/>
+        <p:txBody>
+          <a:bodyPr/>
+          <a:lstStyle/>
+          <a:p>
+            <a:r>
+              <a:t>S3 · WELCOME · LEAD: CONTAINER HOLDER · GROUNDING — every session opens on this map</a:t>
+            </a:r>
+          </a:p>
+          <a:p>
+            <a:r>
+              <a:t>BEATS:</a:t>
+            </a:r>
+          </a:p>
+          <a:p>
+            <a:r>
+              <a:t>1. Locate tonight on the map, plainly: Session 3 crosses from the first box toward the second — Self opening toward Others. Each connection makes the next one real (Matt. 22:37–40).</a:t>
+            </a:r>
+          </a:p>
+          <a:p>
+            <a:r>
+              <a:t>2. The four boxes are one journey — each connection makes the next one real — rooted in the two great commandments: love God, love neighbor (Matt 22:37–40).</a:t>
+            </a:r>
+          </a:p>
+          <a:p>
+            <a:r>
+              <a:t>3. This is also the 'where we are on the map' minute the welcome owes any newcomer.</a:t>
+            </a:r>
+          </a:p>
+          <a:p>
+            <a:r>
+              <a:t>CUES: Two minutes at most; then tonight's road.</a:t>
+            </a:r>
+          </a:p>
+        </p:txBody>
+      </p:sp>
+    </p:spTree>
+  </p:cSld>
+  <p:clrMapOvr>
+    <a:masterClrMapping/>
+  </p:clrMapOvr>
+</p:notes>
+</file>
+
+<file path=ppt/notesSlides/notesSlide16.xml><?xml version="1.0" encoding="utf-8"?>
+<p:notes xmlns:a="http://schemas.openxmlformats.org/drawingml/2006/main" xmlns:p="http://schemas.openxmlformats.org/presentationml/2006/main" xmlns:r="http://schemas.openxmlformats.org/officeDocument/2006/relationships">
+  <p:cSld>
+    <p:spTree>
+      <p:nvGrpSpPr>
+        <p:cNvPr id="1" name=""/>
+        <p:cNvGrpSpPr/>
+        <p:nvPr/>
+      </p:nvGrpSpPr>
+      <p:grpSpPr>
+        <a:xfrm>
+          <a:off x="0" y="0"/>
+          <a:ext cx="0" cy="0"/>
+          <a:chOff x="0" y="0"/>
+          <a:chExt cx="0" cy="0"/>
+        </a:xfrm>
+      </p:grpSpPr>
+      <p:sp>
+        <p:nvSpPr>
+          <p:cNvPr id="2" name="Notes Placeholder 1"/>
+          <p:cNvSpPr>
+            <a:spLocks noGrp="1"/>
+          </p:cNvSpPr>
+          <p:nvPr>
+            <p:ph type="body" idx="1"/>
+          </p:nvPr>
+        </p:nvSpPr>
+        <p:spPr/>
+        <p:txBody>
+          <a:bodyPr/>
+          <a:lstStyle/>
+          <a:p>
+            <a:r>
+              <a:t>S3 · COMMISSIONING · LEAD: CONTENT PRESENTER</a:t>
+            </a:r>
+          </a:p>
+          <a:p>
+            <a:r>
+              <a:t>BEATS:</a:t>
+            </a:r>
+          </a:p>
+          <a:p>
+            <a:r>
+              <a:t>1. The sheet on the screen is the sheet in their hands — walk it, don't read it.</a:t>
+            </a:r>
+          </a:p>
+          <a:p>
+            <a:r>
+              <a:t>2. The standing rhythm first: the morning question, the evening journal line — one box per day on the week-grids.</a:t>
+            </a:r>
+          </a:p>
+          <a:p>
+            <a:r>
+              <a:t>3. A missed box is never a failure — it is an invitation to return.</a:t>
+            </a:r>
+          </a:p>
+          <a:p>
+            <a:r>
+              <a:t>CUES: The four parts are the next slide.</a:t>
+            </a:r>
+          </a:p>
+        </p:txBody>
+      </p:sp>
+    </p:spTree>
+  </p:cSld>
+  <p:clrMapOvr>
+    <a:masterClrMapping/>
+  </p:clrMapOvr>
+</p:notes>
+</file>
+
+<file path=ppt/notesSlides/notesSlide17.xml><?xml version="1.0" encoding="utf-8"?>
+<p:notes xmlns:a="http://schemas.openxmlformats.org/drawingml/2006/main" xmlns:p="http://schemas.openxmlformats.org/presentationml/2006/main" xmlns:r="http://schemas.openxmlformats.org/officeDocument/2006/relationships">
+  <p:cSld>
+    <p:spTree>
+      <p:nvGrpSpPr>
+        <p:cNvPr id="1" name=""/>
+        <p:cNvGrpSpPr/>
+        <p:nvPr/>
+      </p:nvGrpSpPr>
+      <p:grpSpPr>
+        <a:xfrm>
+          <a:off x="0" y="0"/>
+          <a:ext cx="0" cy="0"/>
+          <a:chOff x="0" y="0"/>
+          <a:chExt cx="0" cy="0"/>
+        </a:xfrm>
+      </p:grpSpPr>
+      <p:sp>
+        <p:nvSpPr>
+          <p:cNvPr id="2" name="Notes Placeholder 1"/>
+          <p:cNvSpPr>
+            <a:spLocks noGrp="1"/>
+          </p:cNvSpPr>
+          <p:nvPr>
+            <p:ph type="body" idx="1"/>
+          </p:nvPr>
+        </p:nvSpPr>
+        <p:spPr/>
+        <p:txBody>
+          <a:bodyPr/>
+          <a:lstStyle/>
+          <a:p>
+            <a:r>
+              <a:t>S3 · COMMISSIONING · LEAD: CONTENT PRESENTER</a:t>
+            </a:r>
+          </a:p>
+          <a:p>
+            <a:r>
+              <a:t>BEATS:</a:t>
+            </a:r>
+          </a:p>
+          <a:p>
+            <a:r>
+              <a:t>1. The four parts, in order: the homework practice, week one; the end-of-week-one check-in; the homework practice, week two; one sentence of preparation.</a:t>
+            </a:r>
+          </a:p>
+          <a:p>
+            <a:r>
+              <a:t>2. Check-in partners are named aloud before leaving this slide — the sheet has the line to write the name.</a:t>
+            </a:r>
+          </a:p>
+          <a:p>
+            <a:r>
+              <a:t>GUARD: The sheet-walk, not a re-teach.</a:t>
+            </a:r>
+          </a:p>
+        </p:txBody>
+      </p:sp>
+    </p:spTree>
+  </p:cSld>
+  <p:clrMapOvr>
+    <a:masterClrMapping/>
+  </p:clrMapOvr>
+</p:notes>
+</file>
+
 <file path=ppt/notesSlides/notesSlide33.xml><?xml version="1.0" encoding="utf-8"?>
 <p:notes xmlns:a="http://schemas.openxmlformats.org/drawingml/2006/main" xmlns:r="http://schemas.openxmlformats.org/officeDocument/2006/relationships" xmlns:p="http://schemas.openxmlformats.org/presentationml/2006/main">
   <p:cSld>
@@ -914,44 +1124,42 @@
           <a:lstStyle/>
           <a:p>
             <a:r>
-              <a:rPr lang="en-US" sz="1200"/>
               <a:t>S3 · 7:00–7:08 · LEAD: CONTAINER HOLDER</a:t>
             </a:r>
           </a:p>
           <a:p>
             <a:r>
-              <a:rPr lang="en-US" sz="1200"/>
               <a:t>BEATS:</a:t>
             </a:r>
           </a:p>
           <a:p>
             <a:r>
-              <a:rPr lang="en-US" sz="1200"/>
               <a:t>1. 'Find a seat. We'll start in ninety seconds.' The settling is part of the work.</a:t>
             </a:r>
           </a:p>
           <a:p>
             <a:r>
-              <a:rPr lang="en-US" sz="1200"/>
               <a:t>2. Speak the Aaronic blessing over the room first.</a:t>
             </a:r>
           </a:p>
           <a:p>
             <a:r>
-              <a:rPr lang="en-US" sz="1200"/>
               <a:t>3. Frame: today the parents tell; teens, your night is next week — your work today is listening and blessing, and that is not the small half.</a:t>
             </a:r>
           </a:p>
           <a:p>
             <a:r>
-              <a:rPr lang="en-US" sz="1200"/>
               <a:t>4. Container reminders: Safe, Present, Clear, Intentional; nothing is required; we listen and bless, we do not fix.</a:t>
             </a:r>
           </a:p>
           <a:p>
             <a:r>
-              <a:rPr lang="en-US" sz="1200"/>
               <a:t>CUES: Spot anyone who arrived heavy — eye contact, smile, no singling out. They will know you saw them.</a:t>
+            </a:r>
+          </a:p>
+          <a:p>
+            <a:r>
+              <a:t>PAIR LEAD: name the leading pair in the welcome — two leaders hold tonight, and the room will see the evening handed back and forth between them; that is the design. The pair practices the session together beforehand.</a:t>
             </a:r>
           </a:p>
         </p:txBody>
@@ -1491,77 +1699,6 @@
             <a:r>
               <a:rPr lang="en-US" sz="1200"/>
               <a:t>3. Two rules: the teen discloses only what they are ready to (their telling night is next week); the parent does not turn it into a lecture.</a:t>
-            </a:r>
-          </a:p>
-        </p:txBody>
-      </p:sp>
-    </p:spTree>
-  </p:cSld>
-  <p:clrMapOvr>
-    <a:masterClrMapping/>
-  </p:clrMapOvr>
-</p:notes>
-</file>
-
-<file path=ppt/notesSlides/notesSlide43.xml><?xml version="1.0" encoding="utf-8"?>
-<p:notes xmlns:a="http://schemas.openxmlformats.org/drawingml/2006/main" xmlns:r="http://schemas.openxmlformats.org/officeDocument/2006/relationships" xmlns:p="http://schemas.openxmlformats.org/presentationml/2006/main">
-  <p:cSld>
-    <p:spTree>
-      <p:nvGrpSpPr>
-        <p:cNvPr id="1" name=""/>
-        <p:cNvGrpSpPr/>
-        <p:nvPr/>
-      </p:nvGrpSpPr>
-      <p:grpSpPr>
-        <a:xfrm>
-          <a:off x="0" y="0"/>
-          <a:ext cx="0" cy="0"/>
-          <a:chOff x="0" y="0"/>
-          <a:chExt cx="0" cy="0"/>
-        </a:xfrm>
-      </p:grpSpPr>
-      <p:sp>
-        <p:nvSpPr>
-          <p:cNvPr id="2" name="Notes Placeholder 1"/>
-          <p:cNvSpPr>
-            <a:spLocks noGrp="1"/>
-          </p:cNvSpPr>
-          <p:nvPr>
-            <p:ph type="body" idx="1"/>
-          </p:nvPr>
-        </p:nvSpPr>
-        <p:spPr/>
-        <p:txBody>
-          <a:bodyPr/>
-          <a:lstStyle/>
-          <a:p>
-            <a:r>
-              <a:rPr lang="en-US" sz="1200"/>
-              <a:t>S3 · 8:20–8:24 · LEAD: CONTENT PRESENTER</a:t>
-            </a:r>
-          </a:p>
-          <a:p>
-            <a:r>
-              <a:rPr lang="en-US" sz="1200"/>
-              <a:t>BEATS:</a:t>
-            </a:r>
-          </a:p>
-          <a:p>
-            <a:r>
-              <a:rPr lang="en-US" sz="1200"/>
-              <a:t>1. Check-off card (H3.6): morning question and evening note daily; Joint Footprints once.</a:t>
-            </a:r>
-          </a:p>
-          <a:p>
-            <a:r>
-              <a:rPr lang="en-US" sz="1200"/>
-              <a:t>2. Confirm every teen leaves with their storytelling card (H3.2) — the writing for next week starts today.</a:t>
-            </a:r>
-          </a:p>
-          <a:p>
-            <a:r>
-              <a:rPr lang="en-US" sz="1200"/>
-              <a:t>CUES: Rides inside the practice block.</a:t>
             </a:r>
           </a:p>
         </p:txBody>
@@ -4927,7 +5064,1918 @@
 </p:sld>
 </file>
 
-<file path=ppt/slides/slide34.xml><?xml version="1.0" encoding="utf-8"?>
+<file path=ppt/slides/slide10.xml><?xml version="1.0" encoding="utf-8"?>
+<p:sld xmlns:a="http://schemas.openxmlformats.org/drawingml/2006/main" xmlns:r="http://schemas.openxmlformats.org/officeDocument/2006/relationships" xmlns:p="http://schemas.openxmlformats.org/presentationml/2006/main">
+  <p:cSld>
+    <p:spTree>
+      <p:nvGrpSpPr>
+        <p:cNvPr id="1" name=""/>
+        <p:cNvGrpSpPr/>
+        <p:nvPr/>
+      </p:nvGrpSpPr>
+      <p:grpSpPr>
+        <a:xfrm>
+          <a:off x="0" y="0"/>
+          <a:ext cx="0" cy="0"/>
+          <a:chOff x="0" y="0"/>
+          <a:chExt cx="0" cy="0"/>
+        </a:xfrm>
+      </p:grpSpPr>
+      <p:sp>
+        <p:nvSpPr>
+          <p:cNvPr id="2" name="Rectangle 1"/>
+          <p:cNvSpPr/>
+          <p:nvPr/>
+        </p:nvSpPr>
+        <p:spPr>
+          <a:xfrm>
+            <a:off x="0" y="0"/>
+            <a:ext cx="12191695" cy="6858000"/>
+          </a:xfrm>
+          <a:prstGeom prst="rect">
+            <a:avLst/>
+          </a:prstGeom>
+          <a:solidFill>
+            <a:srgbClr val="FFFFFF"/>
+          </a:solidFill>
+          <a:ln>
+            <a:noFill/>
+          </a:ln>
+        </p:spPr>
+        <p:txBody>
+          <a:bodyPr/>
+          <a:lstStyle/>
+          <a:p>
+            <a:endParaRPr/>
+          </a:p>
+        </p:txBody>
+      </p:sp>
+      <p:sp>
+        <p:nvSpPr>
+          <p:cNvPr id="3" name="TextBox 2"/>
+          <p:cNvSpPr txBox="1"/>
+          <p:nvPr/>
+        </p:nvSpPr>
+        <p:spPr>
+          <a:xfrm>
+            <a:off x="822960" y="502920"/>
+            <a:ext cx="10515600" cy="822960"/>
+          </a:xfrm>
+          <a:prstGeom prst="rect">
+            <a:avLst/>
+          </a:prstGeom>
+          <a:noFill/>
+        </p:spPr>
+        <p:txBody>
+          <a:bodyPr wrap="square">
+            <a:spAutoFit/>
+          </a:bodyPr>
+          <a:lstStyle/>
+          <a:p>
+            <a:pPr algn="l">
+              <a:spcAft>
+                <a:spcPts val="600"/>
+              </a:spcAft>
+            </a:pPr>
+            <a:r>
+              <a:rPr sz="2800" b="1" i="0">
+                <a:solidFill>
+                  <a:srgbClr val="2C5F2D"/>
+                </a:solidFill>
+                <a:latin typeface="Cambria"/>
+              </a:rPr>
+              <a:t>Merge and Shared Closing</a:t>
+            </a:r>
+          </a:p>
+        </p:txBody>
+      </p:sp>
+      <p:sp>
+        <p:nvSpPr>
+          <p:cNvPr id="4" name="TextBox 4"/>
+          <p:cNvSpPr txBox="1"/>
+          <p:nvPr/>
+        </p:nvSpPr>
+        <p:spPr>
+          <a:xfrm>
+            <a:off x="822960" y="1554480"/>
+            <a:ext cx="10515600" cy="4892040"/>
+          </a:xfrm>
+          <a:prstGeom prst="rect">
+            <a:avLst/>
+          </a:prstGeom>
+          <a:noFill/>
+        </p:spPr>
+        <p:txBody>
+          <a:bodyPr wrap="square" lIns="91440" tIns="91440" rIns="91440" bIns="91440"/>
+          <a:lstStyle/>
+          <a:p>
+            <a:pPr marL="274320" indent="-274320">
+              <a:spcAft>
+                <a:spcPts val="900"/>
+              </a:spcAft>
+            </a:pPr>
+            <a:r>
+              <a:rPr sz="2200" b="1" i="0" dirty="0">
+                <a:solidFill>
+                  <a:srgbClr val="97BC62"/>
+                </a:solidFill>
+                <a:latin typeface="Calibri"/>
+              </a:rPr>
+              <a:t>•  </a:t>
+            </a:r>
+            <a:r>
+              <a:rPr sz="2800" b="0" i="0" dirty="0">
+                <a:solidFill>
+                  <a:srgbClr val="222B22"/>
+                </a:solidFill>
+                <a:latin typeface="Calibri"/>
+              </a:rPr>
+              <a:t>What happened in your circle stays in your circle</a:t>
+            </a:r>
+          </a:p>
+          <a:p>
+            <a:pPr marL="274320" indent="-274320">
+              <a:spcAft>
+                <a:spcPts val="900"/>
+              </a:spcAft>
+            </a:pPr>
+            <a:r>
+              <a:rPr sz="2800" b="1" i="0" dirty="0">
+                <a:solidFill>
+                  <a:srgbClr val="97BC62"/>
+                </a:solidFill>
+                <a:latin typeface="Calibri"/>
+              </a:rPr>
+              <a:t>•  </a:t>
+            </a:r>
+            <a:r>
+              <a:rPr sz="2800" b="0" i="0" dirty="0">
+                <a:solidFill>
+                  <a:srgbClr val="222B22"/>
+                </a:solidFill>
+                <a:latin typeface="Calibri"/>
+              </a:rPr>
+              <a:t>One word — just one — about what tonight was like for you. You can pass</a:t>
+            </a:r>
+          </a:p>
+          <a:p>
+            <a:pPr marL="685800" indent="-274320">
+              <a:spcAft>
+                <a:spcPts val="700"/>
+              </a:spcAft>
+            </a:pPr>
+            <a:r>
+              <a:rPr sz="2800" b="1" i="0" dirty="0">
+                <a:solidFill>
+                  <a:srgbClr val="97BC62"/>
+                </a:solidFill>
+                <a:latin typeface="Calibri"/>
+              </a:rPr>
+              <a:t>–  </a:t>
+            </a:r>
+            <a:r>
+              <a:rPr sz="2800" b="0" i="1" dirty="0">
+                <a:solidFill>
+                  <a:srgbClr val="222B22"/>
+                </a:solidFill>
+                <a:latin typeface="Calibri"/>
+              </a:rPr>
+              <a:t>“Heavy.” “Seen.” “Surprising.” “Tender.” “Hard.” Whatever the true word is</a:t>
+            </a:r>
+          </a:p>
+          <a:p>
+            <a:pPr marL="274320" indent="-274320">
+              <a:spcAft>
+                <a:spcPts val="900"/>
+              </a:spcAft>
+            </a:pPr>
+            <a:r>
+              <a:rPr sz="2800" b="1" i="0" dirty="0">
+                <a:solidFill>
+                  <a:srgbClr val="97BC62"/>
+                </a:solidFill>
+                <a:latin typeface="Calibri"/>
+              </a:rPr>
+              <a:t>•  </a:t>
+            </a:r>
+            <a:r>
+              <a:rPr sz="2800" b="0" i="0" dirty="0">
+                <a:solidFill>
+                  <a:srgbClr val="222B22"/>
+                </a:solidFill>
+                <a:latin typeface="Calibri"/>
+              </a:rPr>
+              <a:t>“Each of you brought something true into this room tonight, and each of you received something true. That’s rare. It’s also the kind of room God shows up in.”</a:t>
+            </a:r>
+          </a:p>
+        </p:txBody>
+      </p:sp>
+      <p:sp>
+        <p:nvSpPr>
+          <p:cNvPr id="90" name="SlideNum"/>
+          <p:cNvSpPr txBox="1"/>
+          <p:nvPr/>
+        </p:nvSpPr>
+        <p:spPr>
+          <a:xfrm>
+            <a:off x="11384280" y="6446520"/>
+            <a:ext cx="640080" cy="292608"/>
+          </a:xfrm>
+          <a:prstGeom prst="rect">
+            <a:avLst/>
+          </a:prstGeom>
+          <a:noFill/>
+        </p:spPr>
+        <p:txBody>
+          <a:bodyPr wrap="none" lIns="0" tIns="0" rIns="45720" bIns="0" anchor="ctr"/>
+          <a:lstStyle/>
+          <a:p>
+            <a:pPr algn="r"/>
+            <a:r>
+              <a:t>42</a:t>
+            </a:r>
+            <a:endParaRPr sz="1000" b="1">
+              <a:solidFill>
+                <a:srgbClr val="7A8A6E"/>
+              </a:solidFill>
+              <a:latin typeface="Calibri"/>
+            </a:endParaRPr>
+          </a:p>
+        </p:txBody>
+      </p:sp>
+    </p:spTree>
+  </p:cSld>
+  <p:clrMapOvr>
+    <a:masterClrMapping/>
+  </p:clrMapOvr>
+</p:sld>
+</file>
+
+<file path=ppt/slides/slide11.xml><?xml version="1.0" encoding="utf-8"?>
+<p:sld xmlns:a="http://schemas.openxmlformats.org/drawingml/2006/main" xmlns:r="http://schemas.openxmlformats.org/officeDocument/2006/relationships" xmlns:p="http://schemas.openxmlformats.org/presentationml/2006/main">
+  <p:cSld>
+    <p:spTree>
+      <p:nvGrpSpPr>
+        <p:cNvPr id="1" name=""/>
+        <p:cNvGrpSpPr/>
+        <p:nvPr/>
+      </p:nvGrpSpPr>
+      <p:grpSpPr>
+        <a:xfrm>
+          <a:off x="0" y="0"/>
+          <a:ext cx="0" cy="0"/>
+          <a:chOff x="0" y="0"/>
+          <a:chExt cx="0" cy="0"/>
+        </a:xfrm>
+      </p:grpSpPr>
+      <p:sp>
+        <p:nvSpPr>
+          <p:cNvPr id="2" name="Rectangle 1"/>
+          <p:cNvSpPr/>
+          <p:nvPr/>
+        </p:nvSpPr>
+        <p:spPr>
+          <a:xfrm>
+            <a:off x="0" y="0"/>
+            <a:ext cx="12191695" cy="6858000"/>
+          </a:xfrm>
+          <a:prstGeom prst="rect">
+            <a:avLst/>
+          </a:prstGeom>
+          <a:solidFill>
+            <a:srgbClr val="FFFFFF"/>
+          </a:solidFill>
+          <a:ln>
+            <a:noFill/>
+          </a:ln>
+        </p:spPr>
+        <p:txBody>
+          <a:bodyPr/>
+          <a:lstStyle/>
+          <a:p>
+            <a:endParaRPr/>
+          </a:p>
+        </p:txBody>
+      </p:sp>
+      <p:sp>
+        <p:nvSpPr>
+          <p:cNvPr id="3" name="TextBox 2"/>
+          <p:cNvSpPr txBox="1"/>
+          <p:nvPr/>
+        </p:nvSpPr>
+        <p:spPr>
+          <a:xfrm>
+            <a:off x="822960" y="502920"/>
+            <a:ext cx="10515600" cy="822960"/>
+          </a:xfrm>
+          <a:prstGeom prst="rect">
+            <a:avLst/>
+          </a:prstGeom>
+          <a:noFill/>
+        </p:spPr>
+        <p:txBody>
+          <a:bodyPr wrap="square">
+            <a:spAutoFit/>
+          </a:bodyPr>
+          <a:lstStyle/>
+          <a:p>
+            <a:pPr algn="l">
+              <a:spcAft>
+                <a:spcPts val="600"/>
+              </a:spcAft>
+            </a:pPr>
+            <a:r>
+              <a:rPr sz="2800" b="1" i="0">
+                <a:solidFill>
+                  <a:srgbClr val="2C5F2D"/>
+                </a:solidFill>
+                <a:latin typeface="Cambria"/>
+              </a:rPr>
+              <a:t>Homework — Two Weeks, Four Parts — Joint Footprints</a:t>
+            </a:r>
+          </a:p>
+        </p:txBody>
+      </p:sp>
+      <p:sp>
+        <p:nvSpPr>
+          <p:cNvPr id="4" name="TextBox 4"/>
+          <p:cNvSpPr txBox="1"/>
+          <p:nvPr/>
+        </p:nvSpPr>
+        <p:spPr>
+          <a:xfrm>
+            <a:off x="822960" y="1554480"/>
+            <a:ext cx="6675120" cy="4892040"/>
+          </a:xfrm>
+          <a:prstGeom prst="rect">
+            <a:avLst/>
+          </a:prstGeom>
+          <a:noFill/>
+        </p:spPr>
+        <p:txBody>
+          <a:bodyPr wrap="square" lIns="91440" tIns="91440" rIns="91440" bIns="91440"/>
+          <a:lstStyle/>
+          <a:p>
+            <a:pPr marL="274320" indent="-274320">
+              <a:spcAft>
+                <a:spcPts val="750"/>
+              </a:spcAft>
+            </a:pPr>
+            <a:r>
+              <a:rPr sz="2000" b="1" i="0">
+                <a:solidFill>
+                  <a:srgbClr val="97BC62"/>
+                </a:solidFill>
+                <a:latin typeface="Calibri"/>
+              </a:rPr>
+              <a:t>•  </a:t>
+            </a:r>
+            <a:r>
+              <a:rPr sz="2000" b="0" i="0">
+                <a:solidFill>
+                  <a:srgbClr val="222B22"/>
+                </a:solidFill>
+                <a:latin typeface="Calibri"/>
+              </a:rPr>
+              <a:t>Joint Footprints — each parent-and-teen pair sits together once this week. Twenty minutes total</a:t>
+            </a:r>
+          </a:p>
+          <a:p>
+            <a:pPr marL="274320" indent="-274320">
+              <a:spcAft>
+                <a:spcPts val="750"/>
+              </a:spcAft>
+            </a:pPr>
+            <a:r>
+              <a:rPr sz="2000" b="1" i="0">
+                <a:solidFill>
+                  <a:srgbClr val="97BC62"/>
+                </a:solidFill>
+                <a:latin typeface="Calibri"/>
+              </a:rPr>
+              <a:t>•  </a:t>
+            </a:r>
+            <a:r>
+              <a:rPr sz="2000" b="0" i="0">
+                <a:solidFill>
+                  <a:srgbClr val="222B22"/>
+                </a:solidFill>
+                <a:latin typeface="Calibri"/>
+              </a:rPr>
+              <a:t>Not in the car, not at dinner, not while the TV is on. Phones away</a:t>
+            </a:r>
+          </a:p>
+          <a:p>
+            <a:pPr marL="342900" indent="-342900">
+              <a:spcAft>
+                <a:spcPts val="750"/>
+              </a:spcAft>
+            </a:pPr>
+            <a:r>
+              <a:rPr sz="2000" b="1" i="0">
+                <a:solidFill>
+                  <a:srgbClr val="97BC62"/>
+                </a:solidFill>
+                <a:latin typeface="Calibri"/>
+              </a:rPr>
+              <a:t>1   </a:t>
+            </a:r>
+            <a:r>
+              <a:rPr sz="2000" b="0" i="0">
+                <a:solidFill>
+                  <a:srgbClr val="222B22"/>
+                </a:solidFill>
+                <a:latin typeface="Calibri"/>
+              </a:rPr>
+              <a:t>Five minutes telling the footprints question — where you grew up, who shaped you, what places and people made you who you are</a:t>
+            </a:r>
+          </a:p>
+          <a:p>
+            <a:pPr marL="342900" indent="-342900">
+              <a:spcAft>
+                <a:spcPts val="750"/>
+              </a:spcAft>
+            </a:pPr>
+            <a:r>
+              <a:rPr sz="2000" b="1" i="0">
+                <a:solidFill>
+                  <a:srgbClr val="97BC62"/>
+                </a:solidFill>
+                <a:latin typeface="Calibri"/>
+              </a:rPr>
+              <a:t>2   </a:t>
+            </a:r>
+            <a:r>
+              <a:rPr sz="2000" b="0" i="0">
+                <a:solidFill>
+                  <a:srgbClr val="222B22"/>
+                </a:solidFill>
+                <a:latin typeface="Calibri"/>
+              </a:rPr>
+              <a:t>The listener asks one or two follow-ups, then one sentence: “What I love about your footprints is...”</a:t>
+            </a:r>
+          </a:p>
+          <a:p>
+            <a:pPr marL="342900" indent="-342900">
+              <a:spcAft>
+                <a:spcPts val="750"/>
+              </a:spcAft>
+            </a:pPr>
+            <a:r>
+              <a:rPr sz="2000" b="1" i="0">
+                <a:solidFill>
+                  <a:srgbClr val="97BC62"/>
+                </a:solidFill>
+                <a:latin typeface="Calibri"/>
+              </a:rPr>
+              <a:t>3   </a:t>
+            </a:r>
+            <a:r>
+              <a:rPr sz="2000" b="0" i="0">
+                <a:solidFill>
+                  <a:srgbClr val="222B22"/>
+                </a:solidFill>
+                <a:latin typeface="Calibri"/>
+              </a:rPr>
+              <a:t>Then swap — the other person tells, the first listens and blesses</a:t>
+            </a:r>
+          </a:p>
+          <a:p>
+            <a:pPr marL="274320" indent="-274320">
+              <a:spcAft>
+                <a:spcPts val="750"/>
+              </a:spcAft>
+            </a:pPr>
+            <a:r>
+              <a:rPr sz="2000" b="1" i="0">
+                <a:solidFill>
+                  <a:srgbClr val="97BC62"/>
+                </a:solidFill>
+                <a:latin typeface="Calibri"/>
+              </a:rPr>
+              <a:t>•  </a:t>
+            </a:r>
+            <a:r>
+              <a:rPr sz="2000" b="0" i="0">
+                <a:solidFill>
+                  <a:srgbClr val="222B22"/>
+                </a:solidFill>
+                <a:latin typeface="Calibri"/>
+              </a:rPr>
+              <a:t>The morning question and evening journal note continue daily</a:t>
+            </a:r>
+          </a:p>
+        </p:txBody>
+      </p:sp>
+      <p:sp>
+        <p:nvSpPr>
+          <p:cNvPr id="90" name="SlideNum"/>
+          <p:cNvSpPr txBox="1"/>
+          <p:nvPr/>
+        </p:nvSpPr>
+        <p:spPr>
+          <a:xfrm>
+            <a:off x="11384280" y="6446520"/>
+            <a:ext cx="640080" cy="292608"/>
+          </a:xfrm>
+          <a:prstGeom prst="rect">
+            <a:avLst/>
+          </a:prstGeom>
+          <a:noFill/>
+        </p:spPr>
+        <p:txBody>
+          <a:bodyPr wrap="none" lIns="0" tIns="0" rIns="45720" bIns="0" anchor="ctr"/>
+          <a:lstStyle/>
+          <a:p>
+            <a:pPr algn="r"/>
+            <a:r>
+              <a:t>43</a:t>
+            </a:r>
+            <a:endParaRPr sz="1000" b="1">
+              <a:solidFill>
+                <a:srgbClr val="7A8A6E"/>
+              </a:solidFill>
+              <a:latin typeface="Calibri"/>
+            </a:endParaRPr>
+          </a:p>
+        </p:txBody>
+      </p:sp>
+      <p:pic>
+        <p:nvPicPr>
+          <p:cNvPr id="30" name="Picture 30" descr="two pairs of footprints in sand"/>
+          <p:cNvPicPr>
+            <a:picLocks noChangeAspect="1"/>
+          </p:cNvPicPr>
+          <p:nvPr/>
+        </p:nvPicPr>
+        <p:blipFill>
+          <a:blip r:embed="rId3"/>
+          <a:stretch>
+            <a:fillRect/>
+          </a:stretch>
+        </p:blipFill>
+        <p:spPr>
+          <a:xfrm>
+            <a:off x="8008829" y="1463040"/>
+            <a:ext cx="3357162" cy="4892040"/>
+          </a:xfrm>
+          <a:prstGeom prst="rect">
+            <a:avLst/>
+          </a:prstGeom>
+          <a:ln w="76200">
+            <a:solidFill>
+              <a:srgbClr val="FFFFFF"/>
+            </a:solidFill>
+          </a:ln>
+          <a:effectLst>
+            <a:outerShdw blurRad="63500" dist="25400" dir="5400000" rotWithShape="0">
+              <a:srgbClr val="000000">
+                <a:alpha val="35000"/>
+              </a:srgbClr>
+            </a:outerShdw>
+          </a:effectLst>
+        </p:spPr>
+      </p:pic>
+    </p:spTree>
+  </p:cSld>
+  <p:clrMapOvr>
+    <a:masterClrMapping/>
+  </p:clrMapOvr>
+</p:sld>
+</file>
+
+<file path=ppt/slides/slide13.xml><?xml version="1.0" encoding="utf-8"?>
+<p:sld xmlns:a="http://schemas.openxmlformats.org/drawingml/2006/main" xmlns:r="http://schemas.openxmlformats.org/officeDocument/2006/relationships" xmlns:p="http://schemas.openxmlformats.org/presentationml/2006/main">
+  <p:cSld>
+    <p:spTree>
+      <p:nvGrpSpPr>
+        <p:cNvPr id="1" name=""/>
+        <p:cNvGrpSpPr/>
+        <p:nvPr/>
+      </p:nvGrpSpPr>
+      <p:grpSpPr>
+        <a:xfrm>
+          <a:off x="0" y="0"/>
+          <a:ext cx="0" cy="0"/>
+          <a:chOff x="0" y="0"/>
+          <a:chExt cx="0" cy="0"/>
+        </a:xfrm>
+      </p:grpSpPr>
+      <p:sp>
+        <p:nvSpPr>
+          <p:cNvPr id="2" name="Rectangle 1"/>
+          <p:cNvSpPr/>
+          <p:nvPr/>
+        </p:nvSpPr>
+        <p:spPr>
+          <a:xfrm>
+            <a:off x="0" y="0"/>
+            <a:ext cx="12191695" cy="6858000"/>
+          </a:xfrm>
+          <a:prstGeom prst="rect">
+            <a:avLst/>
+          </a:prstGeom>
+          <a:solidFill>
+            <a:srgbClr val="FFFFFF"/>
+          </a:solidFill>
+          <a:ln>
+            <a:noFill/>
+          </a:ln>
+        </p:spPr>
+        <p:txBody>
+          <a:bodyPr/>
+          <a:lstStyle/>
+          <a:p>
+            <a:endParaRPr/>
+          </a:p>
+        </p:txBody>
+      </p:sp>
+      <p:sp>
+        <p:nvSpPr>
+          <p:cNvPr id="3" name="TextBox 2"/>
+          <p:cNvSpPr txBox="1"/>
+          <p:nvPr/>
+        </p:nvSpPr>
+        <p:spPr>
+          <a:xfrm>
+            <a:off x="822960" y="502920"/>
+            <a:ext cx="10515600" cy="822960"/>
+          </a:xfrm>
+          <a:prstGeom prst="rect">
+            <a:avLst/>
+          </a:prstGeom>
+          <a:noFill/>
+        </p:spPr>
+        <p:txBody>
+          <a:bodyPr wrap="square">
+            <a:spAutoFit/>
+          </a:bodyPr>
+          <a:lstStyle/>
+          <a:p>
+            <a:pPr algn="l">
+              <a:spcAft>
+                <a:spcPts val="600"/>
+              </a:spcAft>
+            </a:pPr>
+            <a:r>
+              <a:rPr sz="2800" b="1" i="0">
+                <a:solidFill>
+                  <a:srgbClr val="2C5F2D"/>
+                </a:solidFill>
+                <a:latin typeface="Cambria"/>
+              </a:rPr>
+              <a:t>The Leader Feedback Round</a:t>
+            </a:r>
+          </a:p>
+        </p:txBody>
+      </p:sp>
+      <p:sp>
+        <p:nvSpPr>
+          <p:cNvPr id="4" name="TextBox 4"/>
+          <p:cNvSpPr txBox="1"/>
+          <p:nvPr/>
+        </p:nvSpPr>
+        <p:spPr>
+          <a:xfrm>
+            <a:off x="822960" y="1554480"/>
+            <a:ext cx="6675120" cy="4892040"/>
+          </a:xfrm>
+          <a:prstGeom prst="rect">
+            <a:avLst/>
+          </a:prstGeom>
+          <a:noFill/>
+        </p:spPr>
+        <p:txBody>
+          <a:bodyPr wrap="square" lIns="91440" tIns="91440" rIns="91440" bIns="91440"/>
+          <a:lstStyle/>
+          <a:p>
+            <a:pPr marL="274320" indent="-274320">
+              <a:spcAft>
+                <a:spcPts val="900"/>
+              </a:spcAft>
+            </a:pPr>
+            <a:r>
+              <a:rPr sz="2800" b="1" i="0">
+                <a:solidFill>
+                  <a:srgbClr val="97BC62"/>
+                </a:solidFill>
+                <a:latin typeface="Calibri"/>
+              </a:rPr>
+              <a:t>•  </a:t>
+            </a:r>
+            <a:r>
+              <a:rPr sz="2800" b="0" i="0">
+                <a:solidFill>
+                  <a:srgbClr val="222B22"/>
+                </a:solidFill>
+                <a:latin typeface="Calibri"/>
+              </a:rPr>
+              <a:t>Two rounds, same as every session — the container holder first, then the content presenter: three things each</a:t>
+            </a:r>
+          </a:p>
+          <a:p>
+            <a:pPr marL="685800" indent="-274320">
+              <a:spcAft>
+                <a:spcPts val="700"/>
+              </a:spcAft>
+            </a:pPr>
+            <a:r>
+              <a:rPr sz="2000" b="1" i="0">
+                <a:solidFill>
+                  <a:srgbClr val="97BC62"/>
+                </a:solidFill>
+                <a:latin typeface="Calibri"/>
+              </a:rPr>
+              <a:t>–  </a:t>
+            </a:r>
+            <a:r>
+              <a:rPr sz="2000" b="0" i="1">
+                <a:solidFill>
+                  <a:srgbClr val="222B22"/>
+                </a:solidFill>
+                <a:latin typeface="Calibri"/>
+              </a:rPr>
+              <a:t>“What I think went well tonight: ______”</a:t>
+            </a:r>
+          </a:p>
+          <a:p>
+            <a:pPr marL="685800" indent="-274320">
+              <a:spcAft>
+                <a:spcPts val="700"/>
+              </a:spcAft>
+            </a:pPr>
+            <a:r>
+              <a:rPr sz="2000" b="1" i="0">
+                <a:solidFill>
+                  <a:srgbClr val="97BC62"/>
+                </a:solidFill>
+                <a:latin typeface="Calibri"/>
+              </a:rPr>
+              <a:t>–  </a:t>
+            </a:r>
+            <a:r>
+              <a:rPr sz="2000" b="0" i="1">
+                <a:solidFill>
+                  <a:srgbClr val="222B22"/>
+                </a:solidFill>
+                <a:latin typeface="Calibri"/>
+              </a:rPr>
+              <a:t>“What I’d do differently next time: ______”</a:t>
+            </a:r>
+          </a:p>
+          <a:p>
+            <a:pPr marL="685800" indent="-274320">
+              <a:spcAft>
+                <a:spcPts val="700"/>
+              </a:spcAft>
+            </a:pPr>
+            <a:r>
+              <a:rPr sz="2000" b="1" i="0">
+                <a:solidFill>
+                  <a:srgbClr val="97BC62"/>
+                </a:solidFill>
+                <a:latin typeface="Calibri"/>
+              </a:rPr>
+              <a:t>–  </a:t>
+            </a:r>
+            <a:r>
+              <a:rPr sz="2000" b="0" i="1">
+                <a:solidFill>
+                  <a:srgbClr val="222B22"/>
+                </a:solidFill>
+                <a:latin typeface="Calibri"/>
+              </a:rPr>
+              <a:t>“If I were to teach tonight’s process to someone, I would tell them: ______”</a:t>
+            </a:r>
+          </a:p>
+          <a:p>
+            <a:pPr marL="274320" indent="-274320">
+              <a:spcAft>
+                <a:spcPts val="900"/>
+              </a:spcAft>
+            </a:pPr>
+            <a:r>
+              <a:rPr sz="2800" b="1" i="0">
+                <a:solidFill>
+                  <a:srgbClr val="97BC62"/>
+                </a:solidFill>
+                <a:latin typeface="Calibri"/>
+              </a:rPr>
+              <a:t>•  </a:t>
+            </a:r>
+            <a:r>
+              <a:rPr sz="2800" b="0" i="0">
+                <a:solidFill>
+                  <a:srgbClr val="222B22"/>
+                </a:solidFill>
+                <a:latin typeface="Calibri"/>
+              </a:rPr>
+              <a:t>Then the room — the same two questions about tonight</a:t>
+            </a:r>
+          </a:p>
+          <a:p>
+            <a:pPr marL="274320" indent="-274320">
+              <a:spcAft>
+                <a:spcPts val="900"/>
+              </a:spcAft>
+            </a:pPr>
+            <a:r>
+              <a:rPr sz="2800" b="1" i="0">
+                <a:solidFill>
+                  <a:srgbClr val="97BC62"/>
+                </a:solidFill>
+                <a:latin typeface="Calibri"/>
+              </a:rPr>
+              <a:t>•  </a:t>
+            </a:r>
+            <a:r>
+              <a:rPr sz="2800" b="0" i="0">
+                <a:solidFill>
+                  <a:srgbClr val="222B22"/>
+                </a:solidFill>
+                <a:latin typeface="Calibri"/>
+              </a:rPr>
+              <a:t>The leaders receive without defending — “thank you” is the whole response</a:t>
+            </a:r>
+          </a:p>
+        </p:txBody>
+      </p:sp>
+      <p:sp>
+        <p:nvSpPr>
+          <p:cNvPr id="90" name="SlideNum"/>
+          <p:cNvSpPr txBox="1"/>
+          <p:nvPr/>
+        </p:nvSpPr>
+        <p:spPr>
+          <a:xfrm>
+            <a:off x="11384280" y="6446520"/>
+            <a:ext cx="640080" cy="292608"/>
+          </a:xfrm>
+          <a:prstGeom prst="rect">
+            <a:avLst/>
+          </a:prstGeom>
+          <a:noFill/>
+        </p:spPr>
+        <p:txBody>
+          <a:bodyPr wrap="none" lIns="0" tIns="0" rIns="45720" bIns="0" anchor="ctr"/>
+          <a:lstStyle/>
+          <a:p>
+            <a:pPr algn="r"/>
+            <a:r>
+              <a:t>45</a:t>
+            </a:r>
+            <a:endParaRPr sz="1000" b="1">
+              <a:solidFill>
+                <a:srgbClr val="7A8A6E"/>
+              </a:solidFill>
+              <a:latin typeface="Calibri"/>
+            </a:endParaRPr>
+          </a:p>
+        </p:txBody>
+      </p:sp>
+      <p:pic>
+        <p:nvPicPr>
+          <p:cNvPr id="33" name="Picture 33" descr="compass on the trail - the weekly bearing check"/>
+          <p:cNvPicPr>
+            <a:picLocks noChangeAspect="1"/>
+          </p:cNvPicPr>
+          <p:nvPr/>
+        </p:nvPicPr>
+        <p:blipFill>
+          <a:blip r:embed="rId3"/>
+          <a:stretch>
+            <a:fillRect/>
+          </a:stretch>
+        </p:blipFill>
+        <p:spPr>
+          <a:xfrm>
+            <a:off x="8106160" y="1463040"/>
+            <a:ext cx="3259831" cy="4892040"/>
+          </a:xfrm>
+          <a:prstGeom prst="rect">
+            <a:avLst/>
+          </a:prstGeom>
+          <a:ln w="76200">
+            <a:solidFill>
+              <a:srgbClr val="FFFFFF"/>
+            </a:solidFill>
+          </a:ln>
+          <a:effectLst>
+            <a:outerShdw blurRad="63500" dist="25400" dir="5400000" rotWithShape="0">
+              <a:srgbClr val="000000">
+                <a:alpha val="35000"/>
+              </a:srgbClr>
+            </a:outerShdw>
+          </a:effectLst>
+        </p:spPr>
+      </p:pic>
+    </p:spTree>
+  </p:cSld>
+  <p:clrMapOvr>
+    <a:masterClrMapping/>
+  </p:clrMapOvr>
+</p:sld>
+</file>
+
+<file path=ppt/slides/slide14.xml><?xml version="1.0" encoding="utf-8"?>
+<p:sld xmlns:a="http://schemas.openxmlformats.org/drawingml/2006/main" xmlns:r="http://schemas.openxmlformats.org/officeDocument/2006/relationships" xmlns:p="http://schemas.openxmlformats.org/presentationml/2006/main">
+  <p:cSld>
+    <p:spTree>
+      <p:nvGrpSpPr>
+        <p:cNvPr id="1" name=""/>
+        <p:cNvGrpSpPr/>
+        <p:nvPr/>
+      </p:nvGrpSpPr>
+      <p:grpSpPr>
+        <a:xfrm>
+          <a:off x="0" y="0"/>
+          <a:ext cx="0" cy="0"/>
+          <a:chOff x="0" y="0"/>
+          <a:chExt cx="0" cy="0"/>
+        </a:xfrm>
+      </p:grpSpPr>
+      <p:sp>
+        <p:nvSpPr>
+          <p:cNvPr id="2" name="Rectangle 1"/>
+          <p:cNvSpPr/>
+          <p:nvPr/>
+        </p:nvSpPr>
+        <p:spPr>
+          <a:xfrm>
+            <a:off x="0" y="0"/>
+            <a:ext cx="12191695" cy="6858000"/>
+          </a:xfrm>
+          <a:prstGeom prst="rect">
+            <a:avLst/>
+          </a:prstGeom>
+          <a:solidFill>
+            <a:srgbClr val="FFFFFF"/>
+          </a:solidFill>
+          <a:ln>
+            <a:noFill/>
+          </a:ln>
+        </p:spPr>
+        <p:txBody>
+          <a:bodyPr/>
+          <a:lstStyle/>
+          <a:p>
+            <a:endParaRPr/>
+          </a:p>
+        </p:txBody>
+      </p:sp>
+      <p:sp>
+        <p:nvSpPr>
+          <p:cNvPr id="3" name="TextBox 2"/>
+          <p:cNvSpPr txBox="1"/>
+          <p:nvPr/>
+        </p:nvSpPr>
+        <p:spPr>
+          <a:xfrm>
+            <a:off x="822960" y="502920"/>
+            <a:ext cx="10515600" cy="822960"/>
+          </a:xfrm>
+          <a:prstGeom prst="rect">
+            <a:avLst/>
+          </a:prstGeom>
+          <a:noFill/>
+        </p:spPr>
+        <p:txBody>
+          <a:bodyPr wrap="square">
+            <a:spAutoFit/>
+          </a:bodyPr>
+          <a:lstStyle/>
+          <a:p>
+            <a:pPr algn="l">
+              <a:spcAft>
+                <a:spcPts val="600"/>
+              </a:spcAft>
+            </a:pPr>
+            <a:r>
+              <a:rPr sz="2800" b="1" i="0">
+                <a:solidFill>
+                  <a:srgbClr val="2C5F2D"/>
+                </a:solidFill>
+                <a:latin typeface="Cambria"/>
+              </a:rPr>
+              <a:t>Closing the Container + Aaronic Blessing</a:t>
+            </a:r>
+          </a:p>
+        </p:txBody>
+      </p:sp>
+      <p:sp>
+        <p:nvSpPr>
+          <p:cNvPr id="4" name="TextBox 4"/>
+          <p:cNvSpPr txBox="1"/>
+          <p:nvPr/>
+        </p:nvSpPr>
+        <p:spPr>
+          <a:xfrm>
+            <a:off x="822960" y="1600200"/>
+            <a:ext cx="5669280" cy="4572000"/>
+          </a:xfrm>
+          <a:prstGeom prst="rect">
+            <a:avLst/>
+          </a:prstGeom>
+          <a:noFill/>
+        </p:spPr>
+        <p:txBody>
+          <a:bodyPr wrap="square" lIns="91440" tIns="91440" rIns="91440" bIns="91440"/>
+          <a:lstStyle/>
+          <a:p>
+            <a:pPr marL="274320" indent="-274320">
+              <a:spcAft>
+                <a:spcPts val="900"/>
+              </a:spcAft>
+            </a:pPr>
+            <a:r>
+              <a:rPr sz="2200" b="1" i="0">
+                <a:solidFill>
+                  <a:srgbClr val="97BC62"/>
+                </a:solidFill>
+                <a:latin typeface="Calibri"/>
+              </a:rPr>
+              <a:t>•  </a:t>
+            </a:r>
+            <a:r>
+              <a:rPr sz="2200" b="0" i="0">
+                <a:solidFill>
+                  <a:srgbClr val="222B22"/>
+                </a:solidFill>
+                <a:latin typeface="Calibri"/>
+              </a:rPr>
+              <a:t>We close the way we opened — the container, six steps:</a:t>
+            </a:r>
+          </a:p>
+          <a:p>
+            <a:pPr marL="685800" indent="-274320">
+              <a:spcAft>
+                <a:spcPts val="700"/>
+              </a:spcAft>
+            </a:pPr>
+            <a:r>
+              <a:rPr sz="2000" b="1" i="0">
+                <a:solidFill>
+                  <a:srgbClr val="97BC62"/>
+                </a:solidFill>
+                <a:latin typeface="Calibri"/>
+              </a:rPr>
+              <a:t>1   </a:t>
+            </a:r>
+            <a:r>
+              <a:rPr sz="2000" b="0" i="0">
+                <a:solidFill>
+                  <a:srgbClr val="222B22"/>
+                </a:solidFill>
+                <a:latin typeface="Calibri"/>
+              </a:rPr>
+              <a:t>Stand again — same circle, same posture as the open</a:t>
+            </a:r>
+          </a:p>
+          <a:p>
+            <a:pPr marL="685800" indent="-274320">
+              <a:spcAft>
+                <a:spcPts val="700"/>
+              </a:spcAft>
+            </a:pPr>
+            <a:r>
+              <a:rPr sz="2000" b="1" i="0">
+                <a:solidFill>
+                  <a:srgbClr val="97BC62"/>
+                </a:solidFill>
+                <a:latin typeface="Calibri"/>
+              </a:rPr>
+              <a:t>2   </a:t>
+            </a:r>
+            <a:r>
+              <a:rPr sz="2000" b="0" i="0">
+                <a:solidFill>
+                  <a:srgbClr val="222B22"/>
+                </a:solidFill>
+                <a:latin typeface="Calibri"/>
+              </a:rPr>
+              <a:t>One-word landing — compare it to your opening word</a:t>
+            </a:r>
+          </a:p>
+          <a:p>
+            <a:pPr marL="685800" indent="-274320">
+              <a:spcAft>
+                <a:spcPts val="700"/>
+              </a:spcAft>
+            </a:pPr>
+            <a:r>
+              <a:rPr sz="2000" b="1" i="0">
+                <a:solidFill>
+                  <a:srgbClr val="97BC62"/>
+                </a:solidFill>
+                <a:latin typeface="Calibri"/>
+              </a:rPr>
+              <a:t>3   </a:t>
+            </a:r>
+            <a:r>
+              <a:rPr sz="2000" b="0" i="0">
+                <a:solidFill>
+                  <a:srgbClr val="222B22"/>
+                </a:solidFill>
+                <a:latin typeface="Calibri"/>
+              </a:rPr>
+              <a:t>The one thing you are taking from tonight</a:t>
+            </a:r>
+          </a:p>
+          <a:p>
+            <a:pPr marL="685800" indent="-274320">
+              <a:spcAft>
+                <a:spcPts val="700"/>
+              </a:spcAft>
+            </a:pPr>
+            <a:r>
+              <a:rPr sz="2000" b="1" i="0">
+                <a:solidFill>
+                  <a:srgbClr val="97BC62"/>
+                </a:solidFill>
+                <a:latin typeface="Calibri"/>
+              </a:rPr>
+              <a:t>4   </a:t>
+            </a:r>
+            <a:r>
+              <a:rPr sz="2000" b="0" i="0">
+                <a:solidFill>
+                  <a:srgbClr val="222B22"/>
+                </a:solidFill>
+                <a:latin typeface="Calibri"/>
+              </a:rPr>
+              <a:t>The one practice — committed aloud, or modified to one you will actually keep</a:t>
+            </a:r>
+          </a:p>
+          <a:p>
+            <a:pPr marL="685800" indent="-274320">
+              <a:spcAft>
+                <a:spcPts val="700"/>
+              </a:spcAft>
+            </a:pPr>
+            <a:r>
+              <a:rPr sz="2000" b="1" i="0">
+                <a:solidFill>
+                  <a:srgbClr val="97BC62"/>
+                </a:solidFill>
+                <a:latin typeface="Calibri"/>
+              </a:rPr>
+              <a:t>5   </a:t>
+            </a:r>
+            <a:r>
+              <a:rPr sz="2000" b="0" i="0">
+                <a:solidFill>
+                  <a:srgbClr val="222B22"/>
+                </a:solidFill>
+                <a:latin typeface="Calibri"/>
+              </a:rPr>
+              <a:t>Blessings — specific, witnessed, short</a:t>
+            </a:r>
+          </a:p>
+          <a:p>
+            <a:pPr marL="685800" indent="-274320">
+              <a:spcAft>
+                <a:spcPts val="700"/>
+              </a:spcAft>
+            </a:pPr>
+            <a:r>
+              <a:rPr sz="2000" b="1" i="0">
+                <a:solidFill>
+                  <a:srgbClr val="97BC62"/>
+                </a:solidFill>
+                <a:latin typeface="Calibri"/>
+              </a:rPr>
+              <a:t>6   </a:t>
+            </a:r>
+            <a:r>
+              <a:rPr sz="2000" b="0" i="0">
+                <a:solidFill>
+                  <a:srgbClr val="222B22"/>
+                </a:solidFill>
+                <a:latin typeface="Calibri"/>
+              </a:rPr>
+              <a:t>Closing prayer — and the Aaronic blessing, spoken over each other, face to face</a:t>
+            </a:r>
+          </a:p>
+        </p:txBody>
+      </p:sp>
+      <p:sp>
+        <p:nvSpPr>
+          <p:cNvPr id="6" name="TextBox 6"/>
+          <p:cNvSpPr txBox="1"/>
+          <p:nvPr/>
+        </p:nvSpPr>
+        <p:spPr>
+          <a:xfrm>
+            <a:off x="6766560" y="1737360"/>
+            <a:ext cx="4663440" cy="2926080"/>
+          </a:xfrm>
+          <a:prstGeom prst="rect">
+            <a:avLst/>
+          </a:prstGeom>
+          <a:solidFill>
+            <a:srgbClr val="F1F6EC"/>
+          </a:solidFill>
+        </p:spPr>
+        <p:txBody>
+          <a:bodyPr wrap="square" lIns="91440" tIns="91440" rIns="91440" bIns="91440" anchor="ctr"/>
+          <a:lstStyle/>
+          <a:p>
+            <a:pPr>
+              <a:spcAft>
+                <a:spcPts val="900"/>
+              </a:spcAft>
+            </a:pPr>
+            <a:r>
+              <a:rPr sz="1200" b="1" i="0">
+                <a:solidFill>
+                  <a:srgbClr val="97BC62"/>
+                </a:solidFill>
+                <a:latin typeface="Calibri"/>
+              </a:rPr>
+              <a:t>THE AARONIC BLESSING — NUMBERS 6:24–26</a:t>
+            </a:r>
+          </a:p>
+          <a:p>
+            <a:pPr>
+              <a:spcAft>
+                <a:spcPts val="600"/>
+              </a:spcAft>
+            </a:pPr>
+            <a:r>
+              <a:rPr sz="2400" b="0" i="1">
+                <a:solidFill>
+                  <a:srgbClr val="222B22"/>
+                </a:solidFill>
+                <a:latin typeface="Cambria"/>
+              </a:rPr>
+              <a:t>“The Lord bless you and keep you;</a:t>
+            </a:r>
+          </a:p>
+          <a:p>
+            <a:pPr>
+              <a:spcAft>
+                <a:spcPts val="600"/>
+              </a:spcAft>
+            </a:pPr>
+            <a:r>
+              <a:rPr sz="2400" b="0" i="1">
+                <a:solidFill>
+                  <a:srgbClr val="222B22"/>
+                </a:solidFill>
+                <a:latin typeface="Cambria"/>
+              </a:rPr>
+              <a:t>the Lord make his face to shine upon you, and be gracious to you;</a:t>
+            </a:r>
+          </a:p>
+          <a:p>
+            <a:pPr>
+              <a:spcAft>
+                <a:spcPts val="600"/>
+              </a:spcAft>
+            </a:pPr>
+            <a:r>
+              <a:rPr sz="2400" b="0" i="1">
+                <a:solidFill>
+                  <a:srgbClr val="222B22"/>
+                </a:solidFill>
+                <a:latin typeface="Cambria"/>
+              </a:rPr>
+              <a:t>the Lord lift up his countenance upon you, and give you peace.”</a:t>
+            </a:r>
+          </a:p>
+        </p:txBody>
+      </p:sp>
+      <p:sp>
+        <p:nvSpPr>
+          <p:cNvPr id="90" name="SlideNum"/>
+          <p:cNvSpPr txBox="1"/>
+          <p:nvPr/>
+        </p:nvSpPr>
+        <p:spPr>
+          <a:xfrm>
+            <a:off x="11384280" y="6446520"/>
+            <a:ext cx="640080" cy="292608"/>
+          </a:xfrm>
+          <a:prstGeom prst="rect">
+            <a:avLst/>
+          </a:prstGeom>
+          <a:noFill/>
+        </p:spPr>
+        <p:txBody>
+          <a:bodyPr wrap="none" lIns="0" tIns="0" rIns="45720" bIns="0" anchor="ctr"/>
+          <a:lstStyle/>
+          <a:p>
+            <a:pPr algn="r"/>
+            <a:r>
+              <a:t>46</a:t>
+            </a:r>
+            <a:endParaRPr sz="1000" b="1">
+              <a:solidFill>
+                <a:srgbClr val="7A8A6E"/>
+              </a:solidFill>
+              <a:latin typeface="Calibri"/>
+            </a:endParaRPr>
+          </a:p>
+        </p:txBody>
+      </p:sp>
+    </p:spTree>
+  </p:cSld>
+  <p:clrMapOvr>
+    <a:masterClrMapping/>
+  </p:clrMapOvr>
+</p:sld>
+</file>
+
+<file path=ppt/slides/slide15.xml><?xml version="1.0" encoding="utf-8"?>
+<p:sld xmlns:a="http://schemas.openxmlformats.org/drawingml/2006/main" xmlns:p="http://schemas.openxmlformats.org/presentationml/2006/main" xmlns:r="http://schemas.openxmlformats.org/officeDocument/2006/relationships">
+  <p:cSld>
+    <p:spTree>
+      <p:nvGrpSpPr>
+        <p:cNvPr id="1" name=""/>
+        <p:cNvGrpSpPr/>
+        <p:nvPr/>
+      </p:nvGrpSpPr>
+      <p:grpSpPr/>
+      <p:sp>
+        <p:nvSpPr>
+          <p:cNvPr id="2" name="Rectangle 1"/>
+          <p:cNvSpPr/>
+          <p:nvPr/>
+        </p:nvSpPr>
+        <p:spPr>
+          <a:xfrm>
+            <a:off x="0" y="0"/>
+            <a:ext cx="12192000" cy="6858000"/>
+          </a:xfrm>
+          <a:prstGeom prst="rect">
+            <a:avLst/>
+          </a:prstGeom>
+          <a:solidFill>
+            <a:srgbClr val="FFFFFF"/>
+          </a:solidFill>
+          <a:ln>
+            <a:noFill/>
+          </a:ln>
+          <a:effectLst/>
+        </p:spPr>
+        <p:style>
+          <a:lnRef idx="1">
+            <a:schemeClr val="accent1"/>
+          </a:lnRef>
+          <a:fillRef idx="3">
+            <a:schemeClr val="accent1"/>
+          </a:fillRef>
+          <a:effectRef idx="2">
+            <a:schemeClr val="accent1"/>
+          </a:effectRef>
+          <a:fontRef idx="minor">
+            <a:schemeClr val="lt1"/>
+          </a:fontRef>
+        </p:style>
+        <p:txBody>
+          <a:bodyPr rtlCol="0" anchor="ctr"/>
+          <a:lstStyle/>
+          <a:p>
+            <a:pPr algn="ctr"/>
+          </a:p>
+        </p:txBody>
+      </p:sp>
+      <p:sp>
+        <p:nvSpPr>
+          <p:cNvPr id="3" name="TextBox 2"/>
+          <p:cNvSpPr txBox="1"/>
+          <p:nvPr/>
+        </p:nvSpPr>
+        <p:spPr>
+          <a:xfrm>
+            <a:off x="822960" y="502920"/>
+            <a:ext cx="10515600" cy="822960"/>
+          </a:xfrm>
+          <a:prstGeom prst="rect">
+            <a:avLst/>
+          </a:prstGeom>
+          <a:noFill/>
+        </p:spPr>
+        <p:txBody>
+          <a:bodyPr wrap="square">
+            <a:spAutoFit/>
+          </a:bodyPr>
+          <a:lstStyle/>
+          <a:p>
+            <a:r>
+              <a:rPr sz="2800" b="1">
+                <a:solidFill>
+                  <a:srgbClr val="2C5F2D"/>
+                </a:solidFill>
+                <a:latin typeface="Cambria"/>
+              </a:rPr>
+              <a:t>Where We Are — the Four Connects</a:t>
+            </a:r>
+          </a:p>
+        </p:txBody>
+      </p:sp>
+      <p:pic>
+        <p:nvPicPr>
+          <p:cNvPr id="4" name="Picture 3" descr="four-connects.png"/>
+          <p:cNvPicPr>
+            <a:picLocks noChangeAspect="1"/>
+          </p:cNvPicPr>
+          <p:nvPr/>
+        </p:nvPicPr>
+        <p:blipFill>
+          <a:blip r:embed="rId2"/>
+          <a:stretch>
+            <a:fillRect/>
+          </a:stretch>
+        </p:blipFill>
+        <p:spPr>
+          <a:xfrm>
+            <a:off x="932688" y="1645920"/>
+            <a:ext cx="10332720" cy="3708663"/>
+          </a:xfrm>
+          <a:prstGeom prst="rect">
+            <a:avLst/>
+          </a:prstGeom>
+        </p:spPr>
+      </p:pic>
+      <p:sp>
+        <p:nvSpPr>
+          <p:cNvPr id="5" name="TextBox 4"/>
+          <p:cNvSpPr txBox="1"/>
+          <p:nvPr/>
+        </p:nvSpPr>
+        <p:spPr>
+          <a:xfrm>
+            <a:off x="822960" y="5623560"/>
+            <a:ext cx="10515600" cy="914400"/>
+          </a:xfrm>
+          <a:prstGeom prst="rect">
+            <a:avLst/>
+          </a:prstGeom>
+          <a:noFill/>
+        </p:spPr>
+        <p:txBody>
+          <a:bodyPr wrap="square">
+            <a:spAutoFit/>
+          </a:bodyPr>
+          <a:lstStyle/>
+          <a:p>
+            <a:r>
+              <a:rPr sz="1800" b="0">
+                <a:solidFill>
+                  <a:srgbClr val="222B22"/>
+                </a:solidFill>
+                <a:latin typeface="Calibri"/>
+              </a:rPr>
+              <a:t>Session 3 crosses from the first box toward the second — </a:t>
+            </a:r>
+            <a:r>
+              <a:rPr sz="1800" b="1">
+                <a:solidFill>
+                  <a:srgbClr val="2C5F2D"/>
+                </a:solidFill>
+                <a:latin typeface="Calibri"/>
+              </a:rPr>
+              <a:t>Self opening toward Others</a:t>
+            </a:r>
+            <a:r>
+              <a:rPr sz="1800" b="0">
+                <a:solidFill>
+                  <a:srgbClr val="222B22"/>
+                </a:solidFill>
+                <a:latin typeface="Calibri"/>
+              </a:rPr>
+              <a:t>. Each connection makes the next one real (Matt. 22:37–40).</a:t>
+            </a:r>
+          </a:p>
+        </p:txBody>
+      </p:sp>
+      <p:sp>
+        <p:nvSpPr>
+          <p:cNvPr id="90" name="SlideNum"/>
+          <p:cNvSpPr txBox="1"/>
+          <p:nvPr/>
+        </p:nvSpPr>
+        <p:spPr>
+          <a:xfrm>
+            <a:off x="11384280" y="6446520"/>
+            <a:ext cx="640080" cy="292608"/>
+          </a:xfrm>
+          <a:prstGeom prst="rect">
+            <a:avLst/>
+          </a:prstGeom>
+          <a:noFill/>
+        </p:spPr>
+        <p:txBody>
+          <a:bodyPr wrap="none" lIns="0" tIns="0" rIns="45720" bIns="0" anchor="ctr"/>
+          <a:lstStyle/>
+          <a:p>
+            <a:pPr algn="r"/>
+            <a:r>
+              <a:t>34a</a:t>
+            </a:r>
+            <a:endParaRPr sz="1000" b="1">
+              <a:solidFill>
+                <a:srgbClr val="7A8A6E"/>
+              </a:solidFill>
+              <a:latin typeface="Calibri"/>
+            </a:endParaRPr>
+          </a:p>
+        </p:txBody>
+      </p:sp>
+    </p:spTree>
+  </p:cSld>
+  <p:clrMapOvr>
+    <a:masterClrMapping/>
+  </p:clrMapOvr>
+</p:sld>
+</file>
+
+<file path=ppt/slides/slide16.xml><?xml version="1.0" encoding="utf-8"?>
+<p:sld xmlns:a="http://schemas.openxmlformats.org/drawingml/2006/main" xmlns:p="http://schemas.openxmlformats.org/presentationml/2006/main" xmlns:r="http://schemas.openxmlformats.org/officeDocument/2006/relationships">
+  <p:cSld>
+    <p:spTree>
+      <p:nvGrpSpPr>
+        <p:cNvPr id="1" name=""/>
+        <p:cNvGrpSpPr/>
+        <p:nvPr/>
+      </p:nvGrpSpPr>
+      <p:grpSpPr/>
+      <p:sp>
+        <p:nvSpPr>
+          <p:cNvPr id="2" name="Rectangle 1"/>
+          <p:cNvSpPr/>
+          <p:nvPr/>
+        </p:nvSpPr>
+        <p:spPr>
+          <a:xfrm>
+            <a:off x="0" y="0"/>
+            <a:ext cx="12192000" cy="6858000"/>
+          </a:xfrm>
+          <a:prstGeom prst="rect">
+            <a:avLst/>
+          </a:prstGeom>
+          <a:solidFill>
+            <a:srgbClr val="FFFFFF"/>
+          </a:solidFill>
+          <a:ln>
+            <a:noFill/>
+          </a:ln>
+          <a:effectLst/>
+        </p:spPr>
+        <p:style>
+          <a:lnRef idx="1">
+            <a:schemeClr val="accent1"/>
+          </a:lnRef>
+          <a:fillRef idx="3">
+            <a:schemeClr val="accent1"/>
+          </a:fillRef>
+          <a:effectRef idx="2">
+            <a:schemeClr val="accent1"/>
+          </a:effectRef>
+          <a:fontRef idx="minor">
+            <a:schemeClr val="lt1"/>
+          </a:fontRef>
+        </p:style>
+        <p:txBody>
+          <a:bodyPr rtlCol="0" anchor="ctr"/>
+          <a:lstStyle/>
+          <a:p>
+            <a:pPr algn="ctr"/>
+          </a:p>
+        </p:txBody>
+      </p:sp>
+      <p:sp>
+        <p:nvSpPr>
+          <p:cNvPr id="3" name="TextBox 2"/>
+          <p:cNvSpPr txBox="1"/>
+          <p:nvPr/>
+        </p:nvSpPr>
+        <p:spPr>
+          <a:xfrm>
+            <a:off x="822960" y="502920"/>
+            <a:ext cx="10515600" cy="822960"/>
+          </a:xfrm>
+          <a:prstGeom prst="rect">
+            <a:avLst/>
+          </a:prstGeom>
+          <a:noFill/>
+        </p:spPr>
+        <p:txBody>
+          <a:bodyPr wrap="square">
+            <a:spAutoFit/>
+          </a:bodyPr>
+          <a:lstStyle/>
+          <a:p>
+            <a:r>
+              <a:rPr sz="2800" b="1">
+                <a:solidFill>
+                  <a:srgbClr val="2C5F2D"/>
+                </a:solidFill>
+                <a:latin typeface="Cambria"/>
+              </a:rPr>
+              <a:t>The Take-Home Sheet — the Daily Rhythm</a:t>
+            </a:r>
+          </a:p>
+        </p:txBody>
+      </p:sp>
+      <p:pic>
+        <p:nvPicPr>
+          <p:cNvPr id="4" name="Picture 3" descr="s3_part1.png"/>
+          <p:cNvPicPr>
+            <a:picLocks noChangeAspect="1"/>
+          </p:cNvPicPr>
+          <p:nvPr/>
+        </p:nvPicPr>
+        <p:blipFill>
+          <a:blip r:embed="rId2"/>
+          <a:stretch>
+            <a:fillRect/>
+          </a:stretch>
+        </p:blipFill>
+        <p:spPr>
+          <a:xfrm>
+            <a:off x="1798167" y="1463040"/>
+            <a:ext cx="8595360" cy="4039819"/>
+          </a:xfrm>
+          <a:prstGeom prst="rect">
+            <a:avLst/>
+          </a:prstGeom>
+          <a:ln w="12700">
+            <a:solidFill>
+              <a:srgbClr val="C8C8C8"/>
+            </a:solidFill>
+          </a:ln>
+        </p:spPr>
+      </p:pic>
+      <p:sp>
+        <p:nvSpPr>
+          <p:cNvPr id="5" name="TextBox 4"/>
+          <p:cNvSpPr txBox="1"/>
+          <p:nvPr/>
+        </p:nvSpPr>
+        <p:spPr>
+          <a:xfrm>
+            <a:off x="822960" y="6355080"/>
+            <a:ext cx="10515600" cy="411480"/>
+          </a:xfrm>
+          <a:prstGeom prst="rect">
+            <a:avLst/>
+          </a:prstGeom>
+          <a:noFill/>
+        </p:spPr>
+        <p:txBody>
+          <a:bodyPr wrap="square">
+            <a:spAutoFit/>
+          </a:bodyPr>
+          <a:lstStyle/>
+          <a:p>
+            <a:r>
+              <a:rPr sz="1400" i="1">
+                <a:solidFill>
+                  <a:srgbClr val="595959"/>
+                </a:solidFill>
+                <a:latin typeface="Calibri"/>
+              </a:rPr>
+              <a:t>Handed out now — this is the sheet in your hands.</a:t>
+            </a:r>
+          </a:p>
+        </p:txBody>
+      </p:sp>
+      <p:sp>
+        <p:nvSpPr>
+          <p:cNvPr id="90" name="SlideNum"/>
+          <p:cNvSpPr txBox="1"/>
+          <p:nvPr/>
+        </p:nvSpPr>
+        <p:spPr>
+          <a:xfrm>
+            <a:off x="11384280" y="6446520"/>
+            <a:ext cx="640080" cy="292608"/>
+          </a:xfrm>
+          <a:prstGeom prst="rect">
+            <a:avLst/>
+          </a:prstGeom>
+          <a:noFill/>
+        </p:spPr>
+        <p:txBody>
+          <a:bodyPr wrap="none" lIns="0" tIns="0" rIns="45720" bIns="0" anchor="ctr"/>
+          <a:lstStyle/>
+          <a:p>
+            <a:pPr algn="r"/>
+            <a:r>
+              <a:t>44</a:t>
+            </a:r>
+            <a:endParaRPr sz="1000" b="1">
+              <a:solidFill>
+                <a:srgbClr val="7A8A6E"/>
+              </a:solidFill>
+              <a:latin typeface="Calibri"/>
+            </a:endParaRPr>
+          </a:p>
+        </p:txBody>
+      </p:sp>
+    </p:spTree>
+  </p:cSld>
+  <p:clrMapOvr>
+    <a:masterClrMapping/>
+  </p:clrMapOvr>
+</p:sld>
+</file>
+
+<file path=ppt/slides/slide17.xml><?xml version="1.0" encoding="utf-8"?>
+<p:sld xmlns:a="http://schemas.openxmlformats.org/drawingml/2006/main" xmlns:p="http://schemas.openxmlformats.org/presentationml/2006/main" xmlns:r="http://schemas.openxmlformats.org/officeDocument/2006/relationships">
+  <p:cSld>
+    <p:spTree>
+      <p:nvGrpSpPr>
+        <p:cNvPr id="1" name=""/>
+        <p:cNvGrpSpPr/>
+        <p:nvPr/>
+      </p:nvGrpSpPr>
+      <p:grpSpPr/>
+      <p:sp>
+        <p:nvSpPr>
+          <p:cNvPr id="2" name="Rectangle 1"/>
+          <p:cNvSpPr/>
+          <p:nvPr/>
+        </p:nvSpPr>
+        <p:spPr>
+          <a:xfrm>
+            <a:off x="0" y="0"/>
+            <a:ext cx="12192000" cy="6858000"/>
+          </a:xfrm>
+          <a:prstGeom prst="rect">
+            <a:avLst/>
+          </a:prstGeom>
+          <a:solidFill>
+            <a:srgbClr val="FFFFFF"/>
+          </a:solidFill>
+          <a:ln>
+            <a:noFill/>
+          </a:ln>
+          <a:effectLst/>
+        </p:spPr>
+        <p:style>
+          <a:lnRef idx="1">
+            <a:schemeClr val="accent1"/>
+          </a:lnRef>
+          <a:fillRef idx="3">
+            <a:schemeClr val="accent1"/>
+          </a:fillRef>
+          <a:effectRef idx="2">
+            <a:schemeClr val="accent1"/>
+          </a:effectRef>
+          <a:fontRef idx="minor">
+            <a:schemeClr val="lt1"/>
+          </a:fontRef>
+        </p:style>
+        <p:txBody>
+          <a:bodyPr rtlCol="0" anchor="ctr"/>
+          <a:lstStyle/>
+          <a:p>
+            <a:pPr algn="ctr"/>
+          </a:p>
+        </p:txBody>
+      </p:sp>
+      <p:sp>
+        <p:nvSpPr>
+          <p:cNvPr id="3" name="TextBox 2"/>
+          <p:cNvSpPr txBox="1"/>
+          <p:nvPr/>
+        </p:nvSpPr>
+        <p:spPr>
+          <a:xfrm>
+            <a:off x="822960" y="502920"/>
+            <a:ext cx="10515600" cy="822960"/>
+          </a:xfrm>
+          <a:prstGeom prst="rect">
+            <a:avLst/>
+          </a:prstGeom>
+          <a:noFill/>
+        </p:spPr>
+        <p:txBody>
+          <a:bodyPr wrap="square">
+            <a:spAutoFit/>
+          </a:bodyPr>
+          <a:lstStyle/>
+          <a:p>
+            <a:r>
+              <a:rPr sz="2800" b="1">
+                <a:solidFill>
+                  <a:srgbClr val="2C5F2D"/>
+                </a:solidFill>
+                <a:latin typeface="Cambria"/>
+              </a:rPr>
+              <a:t>The Take-Home Sheet — the Four Parts</a:t>
+            </a:r>
+          </a:p>
+        </p:txBody>
+      </p:sp>
+      <p:pic>
+        <p:nvPicPr>
+          <p:cNvPr id="4" name="Picture 3" descr="s3_part2.png"/>
+          <p:cNvPicPr>
+            <a:picLocks noChangeAspect="1"/>
+          </p:cNvPicPr>
+          <p:nvPr/>
+        </p:nvPicPr>
+        <p:blipFill>
+          <a:blip r:embed="rId2"/>
+          <a:stretch>
+            <a:fillRect/>
+          </a:stretch>
+        </p:blipFill>
+        <p:spPr>
+          <a:xfrm>
+            <a:off x="2066004" y="1463040"/>
+            <a:ext cx="8059687" cy="4709160"/>
+          </a:xfrm>
+          <a:prstGeom prst="rect">
+            <a:avLst/>
+          </a:prstGeom>
+          <a:ln w="12700">
+            <a:solidFill>
+              <a:srgbClr val="C8C8C8"/>
+            </a:solidFill>
+          </a:ln>
+        </p:spPr>
+      </p:pic>
+      <p:sp>
+        <p:nvSpPr>
+          <p:cNvPr id="5" name="TextBox 4"/>
+          <p:cNvSpPr txBox="1"/>
+          <p:nvPr/>
+        </p:nvSpPr>
+        <p:spPr>
+          <a:xfrm>
+            <a:off x="822960" y="6355080"/>
+            <a:ext cx="10515600" cy="411480"/>
+          </a:xfrm>
+          <a:prstGeom prst="rect">
+            <a:avLst/>
+          </a:prstGeom>
+          <a:noFill/>
+        </p:spPr>
+        <p:txBody>
+          <a:bodyPr wrap="square">
+            <a:spAutoFit/>
+          </a:bodyPr>
+          <a:lstStyle/>
+          <a:p>
+            <a:r>
+              <a:rPr sz="1400" i="1">
+                <a:solidFill>
+                  <a:srgbClr val="595959"/>
+                </a:solidFill>
+                <a:latin typeface="Calibri"/>
+              </a:rPr>
+              <a:t>One practice at a time — and a partner expecting you at the end of week one.</a:t>
+            </a:r>
+          </a:p>
+        </p:txBody>
+      </p:sp>
+      <p:sp>
+        <p:nvSpPr>
+          <p:cNvPr id="90" name="SlideNum"/>
+          <p:cNvSpPr txBox="1"/>
+          <p:nvPr/>
+        </p:nvSpPr>
+        <p:spPr>
+          <a:xfrm>
+            <a:off x="11384280" y="6446520"/>
+            <a:ext cx="640080" cy="292608"/>
+          </a:xfrm>
+          <a:prstGeom prst="rect">
+            <a:avLst/>
+          </a:prstGeom>
+          <a:noFill/>
+        </p:spPr>
+        <p:txBody>
+          <a:bodyPr wrap="none" lIns="0" tIns="0" rIns="45720" bIns="0" anchor="ctr"/>
+          <a:lstStyle/>
+          <a:p>
+            <a:pPr algn="r"/>
+            <a:r>
+              <a:t>44a</a:t>
+            </a:r>
+            <a:endParaRPr sz="1000" b="1">
+              <a:solidFill>
+                <a:srgbClr val="7A8A6E"/>
+              </a:solidFill>
+              <a:latin typeface="Calibri"/>
+            </a:endParaRPr>
+          </a:p>
+        </p:txBody>
+      </p:sp>
+    </p:spTree>
+  </p:cSld>
+  <p:clrMapOvr>
+    <a:masterClrMapping/>
+  </p:clrMapOvr>
+</p:sld>
+</file>
+
+<file path=ppt/slides/slide2.xml><?xml version="1.0" encoding="utf-8"?>
 <p:sld xmlns:a="http://schemas.openxmlformats.org/drawingml/2006/main" xmlns:r="http://schemas.openxmlformats.org/officeDocument/2006/relationships" xmlns:p="http://schemas.openxmlformats.org/presentationml/2006/main">
   <p:cSld>
     <p:spTree>
@@ -5176,7 +7224,7 @@
 </p:sld>
 </file>
 
-<file path=ppt/slides/slide35.xml><?xml version="1.0" encoding="utf-8"?>
+<file path=ppt/slides/slide3.xml><?xml version="1.0" encoding="utf-8"?>
 <p:sld xmlns:a="http://schemas.openxmlformats.org/drawingml/2006/main" xmlns:r="http://schemas.openxmlformats.org/officeDocument/2006/relationships" xmlns:p="http://schemas.openxmlformats.org/presentationml/2006/main">
   <p:cSld>
     <p:spTree>
@@ -5627,7 +7675,7 @@
 </p:sld>
 </file>
 
-<file path=ppt/slides/slide36.xml><?xml version="1.0" encoding="utf-8"?>
+<file path=ppt/slides/slide4.xml><?xml version="1.0" encoding="utf-8"?>
 <p:sld xmlns:a="http://schemas.openxmlformats.org/drawingml/2006/main" xmlns:r="http://schemas.openxmlformats.org/officeDocument/2006/relationships" xmlns:p="http://schemas.openxmlformats.org/presentationml/2006/main">
   <p:cSld>
     <p:spTree>
@@ -5974,7 +8022,7 @@
 </p:sld>
 </file>
 
-<file path=ppt/slides/slide37.xml><?xml version="1.0" encoding="utf-8"?>
+<file path=ppt/slides/slide5.xml><?xml version="1.0" encoding="utf-8"?>
 <p:sld xmlns:a="http://schemas.openxmlformats.org/drawingml/2006/main" xmlns:r="http://schemas.openxmlformats.org/officeDocument/2006/relationships" xmlns:p="http://schemas.openxmlformats.org/presentationml/2006/main">
   <p:cSld>
     <p:spTree>
@@ -6257,7 +8305,7 @@
 </p:sld>
 </file>
 
-<file path=ppt/slides/slide38.xml><?xml version="1.0" encoding="utf-8"?>
+<file path=ppt/slides/slide6.xml><?xml version="1.0" encoding="utf-8"?>
 <p:sld xmlns:a="http://schemas.openxmlformats.org/drawingml/2006/main" xmlns:r="http://schemas.openxmlformats.org/officeDocument/2006/relationships" xmlns:p="http://schemas.openxmlformats.org/presentationml/2006/main">
   <p:cSld>
     <p:spTree>
@@ -6559,7 +8607,7 @@
 </p:sld>
 </file>
 
-<file path=ppt/slides/slide39.xml><?xml version="1.0" encoding="utf-8"?>
+<file path=ppt/slides/slide7.xml><?xml version="1.0" encoding="utf-8"?>
 <p:sld xmlns:a="http://schemas.openxmlformats.org/drawingml/2006/main" xmlns:r="http://schemas.openxmlformats.org/officeDocument/2006/relationships" xmlns:p="http://schemas.openxmlformats.org/presentationml/2006/main">
   <p:cSld>
     <p:spTree>
@@ -6849,7 +8897,7 @@
 </p:sld>
 </file>
 
-<file path=ppt/slides/slide40.xml><?xml version="1.0" encoding="utf-8"?>
+<file path=ppt/slides/slide8.xml><?xml version="1.0" encoding="utf-8"?>
 <p:sld xmlns:a="http://schemas.openxmlformats.org/drawingml/2006/main" xmlns:r="http://schemas.openxmlformats.org/officeDocument/2006/relationships" xmlns:p="http://schemas.openxmlformats.org/presentationml/2006/main">
   <p:cSld>
     <p:spTree>
@@ -7121,7 +9169,7 @@
 </p:sld>
 </file>
 
-<file path=ppt/slides/slide41.xml><?xml version="1.0" encoding="utf-8"?>
+<file path=ppt/slides/slide9.xml><?xml version="1.0" encoding="utf-8"?>
 <p:sld xmlns:a="http://schemas.openxmlformats.org/drawingml/2006/main" xmlns:r="http://schemas.openxmlformats.org/officeDocument/2006/relationships" xmlns:p="http://schemas.openxmlformats.org/presentationml/2006/main">
   <p:cSld>
     <p:spTree>
@@ -7446,1523 +9494,6 @@
           </a:effectLst>
         </p:spPr>
       </p:pic>
-    </p:spTree>
-  </p:cSld>
-  <p:clrMapOvr>
-    <a:masterClrMapping/>
-  </p:clrMapOvr>
-</p:sld>
-</file>
-
-<file path=ppt/slides/slide42.xml><?xml version="1.0" encoding="utf-8"?>
-<p:sld xmlns:a="http://schemas.openxmlformats.org/drawingml/2006/main" xmlns:r="http://schemas.openxmlformats.org/officeDocument/2006/relationships" xmlns:p="http://schemas.openxmlformats.org/presentationml/2006/main">
-  <p:cSld>
-    <p:spTree>
-      <p:nvGrpSpPr>
-        <p:cNvPr id="1" name=""/>
-        <p:cNvGrpSpPr/>
-        <p:nvPr/>
-      </p:nvGrpSpPr>
-      <p:grpSpPr>
-        <a:xfrm>
-          <a:off x="0" y="0"/>
-          <a:ext cx="0" cy="0"/>
-          <a:chOff x="0" y="0"/>
-          <a:chExt cx="0" cy="0"/>
-        </a:xfrm>
-      </p:grpSpPr>
-      <p:sp>
-        <p:nvSpPr>
-          <p:cNvPr id="2" name="Rectangle 1"/>
-          <p:cNvSpPr/>
-          <p:nvPr/>
-        </p:nvSpPr>
-        <p:spPr>
-          <a:xfrm>
-            <a:off x="0" y="0"/>
-            <a:ext cx="12191695" cy="6858000"/>
-          </a:xfrm>
-          <a:prstGeom prst="rect">
-            <a:avLst/>
-          </a:prstGeom>
-          <a:solidFill>
-            <a:srgbClr val="FFFFFF"/>
-          </a:solidFill>
-          <a:ln>
-            <a:noFill/>
-          </a:ln>
-        </p:spPr>
-        <p:txBody>
-          <a:bodyPr/>
-          <a:lstStyle/>
-          <a:p>
-            <a:endParaRPr/>
-          </a:p>
-        </p:txBody>
-      </p:sp>
-      <p:sp>
-        <p:nvSpPr>
-          <p:cNvPr id="3" name="TextBox 2"/>
-          <p:cNvSpPr txBox="1"/>
-          <p:nvPr/>
-        </p:nvSpPr>
-        <p:spPr>
-          <a:xfrm>
-            <a:off x="822960" y="502920"/>
-            <a:ext cx="10515600" cy="822960"/>
-          </a:xfrm>
-          <a:prstGeom prst="rect">
-            <a:avLst/>
-          </a:prstGeom>
-          <a:noFill/>
-        </p:spPr>
-        <p:txBody>
-          <a:bodyPr wrap="square">
-            <a:spAutoFit/>
-          </a:bodyPr>
-          <a:lstStyle/>
-          <a:p>
-            <a:pPr algn="l">
-              <a:spcAft>
-                <a:spcPts val="600"/>
-              </a:spcAft>
-            </a:pPr>
-            <a:r>
-              <a:rPr sz="2800" b="1" i="0">
-                <a:solidFill>
-                  <a:srgbClr val="2C5F2D"/>
-                </a:solidFill>
-                <a:latin typeface="Cambria"/>
-              </a:rPr>
-              <a:t>Merge and Shared Closing</a:t>
-            </a:r>
-          </a:p>
-        </p:txBody>
-      </p:sp>
-      <p:sp>
-        <p:nvSpPr>
-          <p:cNvPr id="4" name="TextBox 4"/>
-          <p:cNvSpPr txBox="1"/>
-          <p:nvPr/>
-        </p:nvSpPr>
-        <p:spPr>
-          <a:xfrm>
-            <a:off x="822960" y="1554480"/>
-            <a:ext cx="10515600" cy="4892040"/>
-          </a:xfrm>
-          <a:prstGeom prst="rect">
-            <a:avLst/>
-          </a:prstGeom>
-          <a:noFill/>
-        </p:spPr>
-        <p:txBody>
-          <a:bodyPr wrap="square" lIns="91440" tIns="91440" rIns="91440" bIns="91440"/>
-          <a:lstStyle/>
-          <a:p>
-            <a:pPr marL="274320" indent="-274320">
-              <a:spcAft>
-                <a:spcPts val="900"/>
-              </a:spcAft>
-            </a:pPr>
-            <a:r>
-              <a:rPr sz="2200" b="1" i="0" dirty="0">
-                <a:solidFill>
-                  <a:srgbClr val="97BC62"/>
-                </a:solidFill>
-                <a:latin typeface="Calibri"/>
-              </a:rPr>
-              <a:t>•  </a:t>
-            </a:r>
-            <a:r>
-              <a:rPr sz="2800" b="0" i="0" dirty="0">
-                <a:solidFill>
-                  <a:srgbClr val="222B22"/>
-                </a:solidFill>
-                <a:latin typeface="Calibri"/>
-              </a:rPr>
-              <a:t>What happened in your circle stays in your circle</a:t>
-            </a:r>
-          </a:p>
-          <a:p>
-            <a:pPr marL="274320" indent="-274320">
-              <a:spcAft>
-                <a:spcPts val="900"/>
-              </a:spcAft>
-            </a:pPr>
-            <a:r>
-              <a:rPr sz="2800" b="1" i="0" dirty="0">
-                <a:solidFill>
-                  <a:srgbClr val="97BC62"/>
-                </a:solidFill>
-                <a:latin typeface="Calibri"/>
-              </a:rPr>
-              <a:t>•  </a:t>
-            </a:r>
-            <a:r>
-              <a:rPr sz="2800" b="0" i="0" dirty="0">
-                <a:solidFill>
-                  <a:srgbClr val="222B22"/>
-                </a:solidFill>
-                <a:latin typeface="Calibri"/>
-              </a:rPr>
-              <a:t>One word — just one — about what tonight was like for you. You can pass</a:t>
-            </a:r>
-          </a:p>
-          <a:p>
-            <a:pPr marL="685800" indent="-274320">
-              <a:spcAft>
-                <a:spcPts val="700"/>
-              </a:spcAft>
-            </a:pPr>
-            <a:r>
-              <a:rPr sz="2800" b="1" i="0" dirty="0">
-                <a:solidFill>
-                  <a:srgbClr val="97BC62"/>
-                </a:solidFill>
-                <a:latin typeface="Calibri"/>
-              </a:rPr>
-              <a:t>–  </a:t>
-            </a:r>
-            <a:r>
-              <a:rPr sz="2800" b="0" i="1" dirty="0">
-                <a:solidFill>
-                  <a:srgbClr val="222B22"/>
-                </a:solidFill>
-                <a:latin typeface="Calibri"/>
-              </a:rPr>
-              <a:t>“Heavy.” “Seen.” “Surprising.” “Tender.” “Hard.” Whatever the true word is</a:t>
-            </a:r>
-          </a:p>
-          <a:p>
-            <a:pPr marL="274320" indent="-274320">
-              <a:spcAft>
-                <a:spcPts val="900"/>
-              </a:spcAft>
-            </a:pPr>
-            <a:r>
-              <a:rPr sz="2800" b="1" i="0" dirty="0">
-                <a:solidFill>
-                  <a:srgbClr val="97BC62"/>
-                </a:solidFill>
-                <a:latin typeface="Calibri"/>
-              </a:rPr>
-              <a:t>•  </a:t>
-            </a:r>
-            <a:r>
-              <a:rPr sz="2800" b="0" i="0" dirty="0">
-                <a:solidFill>
-                  <a:srgbClr val="222B22"/>
-                </a:solidFill>
-                <a:latin typeface="Calibri"/>
-              </a:rPr>
-              <a:t>“Each of you brought something true into this room tonight, and each of you received something true. That’s rare. It’s also the kind of room God shows up in.”</a:t>
-            </a:r>
-          </a:p>
-        </p:txBody>
-      </p:sp>
-      <p:sp>
-        <p:nvSpPr>
-          <p:cNvPr id="90" name="SlideNum"/>
-          <p:cNvSpPr txBox="1"/>
-          <p:nvPr/>
-        </p:nvSpPr>
-        <p:spPr>
-          <a:xfrm>
-            <a:off x="11384280" y="6446520"/>
-            <a:ext cx="640080" cy="292608"/>
-          </a:xfrm>
-          <a:prstGeom prst="rect">
-            <a:avLst/>
-          </a:prstGeom>
-          <a:noFill/>
-        </p:spPr>
-        <p:txBody>
-          <a:bodyPr wrap="none" lIns="0" tIns="0" rIns="45720" bIns="0" anchor="ctr"/>
-          <a:lstStyle/>
-          <a:p>
-            <a:pPr algn="r"/>
-            <a:r>
-              <a:t>42</a:t>
-            </a:r>
-            <a:endParaRPr sz="1000" b="1">
-              <a:solidFill>
-                <a:srgbClr val="7A8A6E"/>
-              </a:solidFill>
-              <a:latin typeface="Calibri"/>
-            </a:endParaRPr>
-          </a:p>
-        </p:txBody>
-      </p:sp>
-    </p:spTree>
-  </p:cSld>
-  <p:clrMapOvr>
-    <a:masterClrMapping/>
-  </p:clrMapOvr>
-</p:sld>
-</file>
-
-<file path=ppt/slides/slide43.xml><?xml version="1.0" encoding="utf-8"?>
-<p:sld xmlns:a="http://schemas.openxmlformats.org/drawingml/2006/main" xmlns:r="http://schemas.openxmlformats.org/officeDocument/2006/relationships" xmlns:p="http://schemas.openxmlformats.org/presentationml/2006/main">
-  <p:cSld>
-    <p:spTree>
-      <p:nvGrpSpPr>
-        <p:cNvPr id="1" name=""/>
-        <p:cNvGrpSpPr/>
-        <p:nvPr/>
-      </p:nvGrpSpPr>
-      <p:grpSpPr>
-        <a:xfrm>
-          <a:off x="0" y="0"/>
-          <a:ext cx="0" cy="0"/>
-          <a:chOff x="0" y="0"/>
-          <a:chExt cx="0" cy="0"/>
-        </a:xfrm>
-      </p:grpSpPr>
-      <p:sp>
-        <p:nvSpPr>
-          <p:cNvPr id="2" name="Rectangle 1"/>
-          <p:cNvSpPr/>
-          <p:nvPr/>
-        </p:nvSpPr>
-        <p:spPr>
-          <a:xfrm>
-            <a:off x="0" y="0"/>
-            <a:ext cx="12191695" cy="6858000"/>
-          </a:xfrm>
-          <a:prstGeom prst="rect">
-            <a:avLst/>
-          </a:prstGeom>
-          <a:solidFill>
-            <a:srgbClr val="FFFFFF"/>
-          </a:solidFill>
-          <a:ln>
-            <a:noFill/>
-          </a:ln>
-        </p:spPr>
-        <p:txBody>
-          <a:bodyPr/>
-          <a:lstStyle/>
-          <a:p>
-            <a:endParaRPr/>
-          </a:p>
-        </p:txBody>
-      </p:sp>
-      <p:sp>
-        <p:nvSpPr>
-          <p:cNvPr id="3" name="TextBox 2"/>
-          <p:cNvSpPr txBox="1"/>
-          <p:nvPr/>
-        </p:nvSpPr>
-        <p:spPr>
-          <a:xfrm>
-            <a:off x="822960" y="502920"/>
-            <a:ext cx="10515600" cy="822960"/>
-          </a:xfrm>
-          <a:prstGeom prst="rect">
-            <a:avLst/>
-          </a:prstGeom>
-          <a:noFill/>
-        </p:spPr>
-        <p:txBody>
-          <a:bodyPr wrap="square">
-            <a:spAutoFit/>
-          </a:bodyPr>
-          <a:lstStyle/>
-          <a:p>
-            <a:pPr algn="l">
-              <a:spcAft>
-                <a:spcPts val="600"/>
-              </a:spcAft>
-            </a:pPr>
-            <a:r>
-              <a:rPr sz="2800" b="1" i="0">
-                <a:solidFill>
-                  <a:srgbClr val="2C5F2D"/>
-                </a:solidFill>
-                <a:latin typeface="Cambria"/>
-              </a:rPr>
-              <a:t>Homework — Two Weeks, Four Parts — Joint Footprints</a:t>
-            </a:r>
-          </a:p>
-        </p:txBody>
-      </p:sp>
-      <p:sp>
-        <p:nvSpPr>
-          <p:cNvPr id="4" name="TextBox 4"/>
-          <p:cNvSpPr txBox="1"/>
-          <p:nvPr/>
-        </p:nvSpPr>
-        <p:spPr>
-          <a:xfrm>
-            <a:off x="822960" y="1554480"/>
-            <a:ext cx="6675120" cy="4892040"/>
-          </a:xfrm>
-          <a:prstGeom prst="rect">
-            <a:avLst/>
-          </a:prstGeom>
-          <a:noFill/>
-        </p:spPr>
-        <p:txBody>
-          <a:bodyPr wrap="square" lIns="91440" tIns="91440" rIns="91440" bIns="91440"/>
-          <a:lstStyle/>
-          <a:p>
-            <a:pPr marL="274320" indent="-274320">
-              <a:spcAft>
-                <a:spcPts val="750"/>
-              </a:spcAft>
-            </a:pPr>
-            <a:r>
-              <a:rPr sz="2000" b="1" i="0">
-                <a:solidFill>
-                  <a:srgbClr val="97BC62"/>
-                </a:solidFill>
-                <a:latin typeface="Calibri"/>
-              </a:rPr>
-              <a:t>•  </a:t>
-            </a:r>
-            <a:r>
-              <a:rPr sz="2000" b="0" i="0">
-                <a:solidFill>
-                  <a:srgbClr val="222B22"/>
-                </a:solidFill>
-                <a:latin typeface="Calibri"/>
-              </a:rPr>
-              <a:t>Joint Footprints — each parent-and-teen pair sits together once this week. Twenty minutes total</a:t>
-            </a:r>
-          </a:p>
-          <a:p>
-            <a:pPr marL="274320" indent="-274320">
-              <a:spcAft>
-                <a:spcPts val="750"/>
-              </a:spcAft>
-            </a:pPr>
-            <a:r>
-              <a:rPr sz="2000" b="1" i="0">
-                <a:solidFill>
-                  <a:srgbClr val="97BC62"/>
-                </a:solidFill>
-                <a:latin typeface="Calibri"/>
-              </a:rPr>
-              <a:t>•  </a:t>
-            </a:r>
-            <a:r>
-              <a:rPr sz="2000" b="0" i="0">
-                <a:solidFill>
-                  <a:srgbClr val="222B22"/>
-                </a:solidFill>
-                <a:latin typeface="Calibri"/>
-              </a:rPr>
-              <a:t>Not in the car, not at dinner, not while the TV is on. Phones away</a:t>
-            </a:r>
-          </a:p>
-          <a:p>
-            <a:pPr marL="342900" indent="-342900">
-              <a:spcAft>
-                <a:spcPts val="750"/>
-              </a:spcAft>
-            </a:pPr>
-            <a:r>
-              <a:rPr sz="2000" b="1" i="0">
-                <a:solidFill>
-                  <a:srgbClr val="97BC62"/>
-                </a:solidFill>
-                <a:latin typeface="Calibri"/>
-              </a:rPr>
-              <a:t>1   </a:t>
-            </a:r>
-            <a:r>
-              <a:rPr sz="2000" b="0" i="0">
-                <a:solidFill>
-                  <a:srgbClr val="222B22"/>
-                </a:solidFill>
-                <a:latin typeface="Calibri"/>
-              </a:rPr>
-              <a:t>Five minutes telling the footprints question — where you grew up, who shaped you, what places and people made you who you are</a:t>
-            </a:r>
-          </a:p>
-          <a:p>
-            <a:pPr marL="342900" indent="-342900">
-              <a:spcAft>
-                <a:spcPts val="750"/>
-              </a:spcAft>
-            </a:pPr>
-            <a:r>
-              <a:rPr sz="2000" b="1" i="0">
-                <a:solidFill>
-                  <a:srgbClr val="97BC62"/>
-                </a:solidFill>
-                <a:latin typeface="Calibri"/>
-              </a:rPr>
-              <a:t>2   </a:t>
-            </a:r>
-            <a:r>
-              <a:rPr sz="2000" b="0" i="0">
-                <a:solidFill>
-                  <a:srgbClr val="222B22"/>
-                </a:solidFill>
-                <a:latin typeface="Calibri"/>
-              </a:rPr>
-              <a:t>The listener asks one or two follow-ups, then one sentence: “What I love about your footprints is...”</a:t>
-            </a:r>
-          </a:p>
-          <a:p>
-            <a:pPr marL="342900" indent="-342900">
-              <a:spcAft>
-                <a:spcPts val="750"/>
-              </a:spcAft>
-            </a:pPr>
-            <a:r>
-              <a:rPr sz="2000" b="1" i="0">
-                <a:solidFill>
-                  <a:srgbClr val="97BC62"/>
-                </a:solidFill>
-                <a:latin typeface="Calibri"/>
-              </a:rPr>
-              <a:t>3   </a:t>
-            </a:r>
-            <a:r>
-              <a:rPr sz="2000" b="0" i="0">
-                <a:solidFill>
-                  <a:srgbClr val="222B22"/>
-                </a:solidFill>
-                <a:latin typeface="Calibri"/>
-              </a:rPr>
-              <a:t>Then swap — the other person tells, the first listens and blesses</a:t>
-            </a:r>
-          </a:p>
-          <a:p>
-            <a:pPr marL="274320" indent="-274320">
-              <a:spcAft>
-                <a:spcPts val="750"/>
-              </a:spcAft>
-            </a:pPr>
-            <a:r>
-              <a:rPr sz="2000" b="1" i="0">
-                <a:solidFill>
-                  <a:srgbClr val="97BC62"/>
-                </a:solidFill>
-                <a:latin typeface="Calibri"/>
-              </a:rPr>
-              <a:t>•  </a:t>
-            </a:r>
-            <a:r>
-              <a:rPr sz="2000" b="0" i="0">
-                <a:solidFill>
-                  <a:srgbClr val="222B22"/>
-                </a:solidFill>
-                <a:latin typeface="Calibri"/>
-              </a:rPr>
-              <a:t>The morning question and evening journal note continue daily</a:t>
-            </a:r>
-          </a:p>
-        </p:txBody>
-      </p:sp>
-      <p:sp>
-        <p:nvSpPr>
-          <p:cNvPr id="90" name="SlideNum"/>
-          <p:cNvSpPr txBox="1"/>
-          <p:nvPr/>
-        </p:nvSpPr>
-        <p:spPr>
-          <a:xfrm>
-            <a:off x="11384280" y="6446520"/>
-            <a:ext cx="640080" cy="292608"/>
-          </a:xfrm>
-          <a:prstGeom prst="rect">
-            <a:avLst/>
-          </a:prstGeom>
-          <a:noFill/>
-        </p:spPr>
-        <p:txBody>
-          <a:bodyPr wrap="none" lIns="0" tIns="0" rIns="45720" bIns="0" anchor="ctr"/>
-          <a:lstStyle/>
-          <a:p>
-            <a:pPr algn="r"/>
-            <a:r>
-              <a:t>43</a:t>
-            </a:r>
-            <a:endParaRPr sz="1000" b="1">
-              <a:solidFill>
-                <a:srgbClr val="7A8A6E"/>
-              </a:solidFill>
-              <a:latin typeface="Calibri"/>
-            </a:endParaRPr>
-          </a:p>
-        </p:txBody>
-      </p:sp>
-      <p:pic>
-        <p:nvPicPr>
-          <p:cNvPr id="30" name="Picture 30" descr="two pairs of footprints in sand"/>
-          <p:cNvPicPr>
-            <a:picLocks noChangeAspect="1"/>
-          </p:cNvPicPr>
-          <p:nvPr/>
-        </p:nvPicPr>
-        <p:blipFill>
-          <a:blip r:embed="rId3"/>
-          <a:stretch>
-            <a:fillRect/>
-          </a:stretch>
-        </p:blipFill>
-        <p:spPr>
-          <a:xfrm>
-            <a:off x="8008829" y="1463040"/>
-            <a:ext cx="3357162" cy="4892040"/>
-          </a:xfrm>
-          <a:prstGeom prst="rect">
-            <a:avLst/>
-          </a:prstGeom>
-          <a:ln w="76200">
-            <a:solidFill>
-              <a:srgbClr val="FFFFFF"/>
-            </a:solidFill>
-          </a:ln>
-          <a:effectLst>
-            <a:outerShdw blurRad="63500" dist="25400" dir="5400000" rotWithShape="0">
-              <a:srgbClr val="000000">
-                <a:alpha val="35000"/>
-              </a:srgbClr>
-            </a:outerShdw>
-          </a:effectLst>
-        </p:spPr>
-      </p:pic>
-    </p:spTree>
-  </p:cSld>
-  <p:clrMapOvr>
-    <a:masterClrMapping/>
-  </p:clrMapOvr>
-</p:sld>
-</file>
-
-<file path=ppt/slides/slide44.xml><?xml version="1.0" encoding="utf-8"?>
-<p:sld xmlns:a="http://schemas.openxmlformats.org/drawingml/2006/main" xmlns:r="http://schemas.openxmlformats.org/officeDocument/2006/relationships" xmlns:p="http://schemas.openxmlformats.org/presentationml/2006/main">
-  <p:cSld>
-    <p:spTree>
-      <p:nvGrpSpPr>
-        <p:cNvPr id="1" name=""/>
-        <p:cNvGrpSpPr/>
-        <p:nvPr/>
-      </p:nvGrpSpPr>
-      <p:grpSpPr>
-        <a:xfrm>
-          <a:off x="0" y="0"/>
-          <a:ext cx="0" cy="0"/>
-          <a:chOff x="0" y="0"/>
-          <a:chExt cx="0" cy="0"/>
-        </a:xfrm>
-      </p:grpSpPr>
-      <p:sp>
-        <p:nvSpPr>
-          <p:cNvPr id="2" name="Rectangle 1"/>
-          <p:cNvSpPr/>
-          <p:nvPr/>
-        </p:nvSpPr>
-        <p:spPr>
-          <a:xfrm>
-            <a:off x="0" y="0"/>
-            <a:ext cx="12191695" cy="6858000"/>
-          </a:xfrm>
-          <a:prstGeom prst="rect">
-            <a:avLst/>
-          </a:prstGeom>
-          <a:solidFill>
-            <a:srgbClr val="FFFFFF"/>
-          </a:solidFill>
-          <a:ln>
-            <a:noFill/>
-          </a:ln>
-        </p:spPr>
-        <p:txBody>
-          <a:bodyPr/>
-          <a:lstStyle/>
-          <a:p>
-            <a:endParaRPr/>
-          </a:p>
-        </p:txBody>
-      </p:sp>
-      <p:sp>
-        <p:nvSpPr>
-          <p:cNvPr id="3" name="TextBox 2"/>
-          <p:cNvSpPr txBox="1"/>
-          <p:nvPr/>
-        </p:nvSpPr>
-        <p:spPr>
-          <a:xfrm>
-            <a:off x="822960" y="502920"/>
-            <a:ext cx="10515600" cy="822960"/>
-          </a:xfrm>
-          <a:prstGeom prst="rect">
-            <a:avLst/>
-          </a:prstGeom>
-          <a:noFill/>
-        </p:spPr>
-        <p:txBody>
-          <a:bodyPr wrap="square">
-            <a:spAutoFit/>
-          </a:bodyPr>
-          <a:lstStyle/>
-          <a:p>
-            <a:pPr algn="l">
-              <a:spcAft>
-                <a:spcPts val="600"/>
-              </a:spcAft>
-            </a:pPr>
-            <a:r>
-              <a:rPr sz="2800" b="1" i="0">
-                <a:solidFill>
-                  <a:srgbClr val="2C5F2D"/>
-                </a:solidFill>
-                <a:latin typeface="Cambria"/>
-              </a:rPr>
-              <a:t>Your Take-Home Card — This Session’s Practice</a:t>
-            </a:r>
-          </a:p>
-        </p:txBody>
-      </p:sp>
-      <p:sp>
-        <p:nvSpPr>
-          <p:cNvPr id="90" name="SlideNum"/>
-          <p:cNvSpPr txBox="1"/>
-          <p:nvPr/>
-        </p:nvSpPr>
-        <p:spPr>
-          <a:xfrm>
-            <a:off x="11384280" y="6446520"/>
-            <a:ext cx="640080" cy="292608"/>
-          </a:xfrm>
-          <a:prstGeom prst="rect">
-            <a:avLst/>
-          </a:prstGeom>
-          <a:noFill/>
-        </p:spPr>
-        <p:txBody>
-          <a:bodyPr wrap="none" lIns="0" tIns="0" rIns="45720" bIns="0" anchor="ctr"/>
-          <a:lstStyle/>
-          <a:p>
-            <a:pPr algn="r"/>
-            <a:r>
-              <a:t>44</a:t>
-            </a:r>
-            <a:endParaRPr sz="1000" b="1">
-              <a:solidFill>
-                <a:srgbClr val="7A8A6E"/>
-              </a:solidFill>
-              <a:latin typeface="Calibri"/>
-            </a:endParaRPr>
-          </a:p>
-        </p:txBody>
-      </p:sp>
-      <p:pic>
-        <p:nvPicPr>
-          <p:cNvPr id="270" name="CardImage" descr="the Week 3 check-off card, as handed out"/>
-          <p:cNvPicPr>
-            <a:picLocks noChangeAspect="1"/>
-          </p:cNvPicPr>
-          <p:nvPr/>
-        </p:nvPicPr>
-        <p:blipFill>
-          <a:blip r:embed="rId3"/>
-          <a:stretch>
-            <a:fillRect/>
-          </a:stretch>
-        </p:blipFill>
-        <p:spPr>
-          <a:xfrm>
-            <a:off x="1158087" y="1554480"/>
-            <a:ext cx="9875520" cy="4210090"/>
-          </a:xfrm>
-          <a:prstGeom prst="rect">
-            <a:avLst/>
-          </a:prstGeom>
-          <a:ln w="76200">
-            <a:solidFill>
-              <a:srgbClr val="FFFFFF"/>
-            </a:solidFill>
-          </a:ln>
-          <a:effectLst>
-            <a:outerShdw blurRad="63500" dist="25400" dir="5400000" rotWithShape="0">
-              <a:srgbClr val="000000">
-                <a:alpha val="35000"/>
-              </a:srgbClr>
-            </a:outerShdw>
-          </a:effectLst>
-        </p:spPr>
-      </p:pic>
-      <p:sp>
-        <p:nvSpPr>
-          <p:cNvPr id="271" name="Caption"/>
-          <p:cNvSpPr txBox="1"/>
-          <p:nvPr/>
-        </p:nvSpPr>
-        <p:spPr>
-          <a:xfrm>
-            <a:off x="822960" y="5947450"/>
-            <a:ext cx="10515600" cy="457200"/>
-          </a:xfrm>
-          <a:prstGeom prst="rect">
-            <a:avLst/>
-          </a:prstGeom>
-          <a:noFill/>
-        </p:spPr>
-        <p:txBody>
-          <a:bodyPr wrap="square"/>
-          <a:lstStyle/>
-          <a:p>
-            <a:pPr algn="ctr"/>
-            <a:r>
-              <a:rPr sz="1800" b="0" i="1">
-                <a:solidFill>
-                  <a:srgbClr val="222B22"/>
-                </a:solidFill>
-                <a:latin typeface="Calibri"/>
-              </a:rPr>
-              <a:t>Handed out now — fridge, mirror, journal pocket.</a:t>
-            </a:r>
-          </a:p>
-        </p:txBody>
-      </p:sp>
-    </p:spTree>
-  </p:cSld>
-  <p:clrMapOvr>
-    <a:masterClrMapping/>
-  </p:clrMapOvr>
-</p:sld>
-</file>
-
-<file path=ppt/slides/slide45.xml><?xml version="1.0" encoding="utf-8"?>
-<p:sld xmlns:a="http://schemas.openxmlformats.org/drawingml/2006/main" xmlns:r="http://schemas.openxmlformats.org/officeDocument/2006/relationships" xmlns:p="http://schemas.openxmlformats.org/presentationml/2006/main">
-  <p:cSld>
-    <p:spTree>
-      <p:nvGrpSpPr>
-        <p:cNvPr id="1" name=""/>
-        <p:cNvGrpSpPr/>
-        <p:nvPr/>
-      </p:nvGrpSpPr>
-      <p:grpSpPr>
-        <a:xfrm>
-          <a:off x="0" y="0"/>
-          <a:ext cx="0" cy="0"/>
-          <a:chOff x="0" y="0"/>
-          <a:chExt cx="0" cy="0"/>
-        </a:xfrm>
-      </p:grpSpPr>
-      <p:sp>
-        <p:nvSpPr>
-          <p:cNvPr id="2" name="Rectangle 1"/>
-          <p:cNvSpPr/>
-          <p:nvPr/>
-        </p:nvSpPr>
-        <p:spPr>
-          <a:xfrm>
-            <a:off x="0" y="0"/>
-            <a:ext cx="12191695" cy="6858000"/>
-          </a:xfrm>
-          <a:prstGeom prst="rect">
-            <a:avLst/>
-          </a:prstGeom>
-          <a:solidFill>
-            <a:srgbClr val="FFFFFF"/>
-          </a:solidFill>
-          <a:ln>
-            <a:noFill/>
-          </a:ln>
-        </p:spPr>
-        <p:txBody>
-          <a:bodyPr/>
-          <a:lstStyle/>
-          <a:p>
-            <a:endParaRPr/>
-          </a:p>
-        </p:txBody>
-      </p:sp>
-      <p:sp>
-        <p:nvSpPr>
-          <p:cNvPr id="3" name="TextBox 2"/>
-          <p:cNvSpPr txBox="1"/>
-          <p:nvPr/>
-        </p:nvSpPr>
-        <p:spPr>
-          <a:xfrm>
-            <a:off x="822960" y="502920"/>
-            <a:ext cx="10515600" cy="822960"/>
-          </a:xfrm>
-          <a:prstGeom prst="rect">
-            <a:avLst/>
-          </a:prstGeom>
-          <a:noFill/>
-        </p:spPr>
-        <p:txBody>
-          <a:bodyPr wrap="square">
-            <a:spAutoFit/>
-          </a:bodyPr>
-          <a:lstStyle/>
-          <a:p>
-            <a:pPr algn="l">
-              <a:spcAft>
-                <a:spcPts val="600"/>
-              </a:spcAft>
-            </a:pPr>
-            <a:r>
-              <a:rPr sz="2800" b="1" i="0">
-                <a:solidFill>
-                  <a:srgbClr val="2C5F2D"/>
-                </a:solidFill>
-                <a:latin typeface="Cambria"/>
-              </a:rPr>
-              <a:t>The Leader Feedback Round</a:t>
-            </a:r>
-          </a:p>
-        </p:txBody>
-      </p:sp>
-      <p:sp>
-        <p:nvSpPr>
-          <p:cNvPr id="4" name="TextBox 4"/>
-          <p:cNvSpPr txBox="1"/>
-          <p:nvPr/>
-        </p:nvSpPr>
-        <p:spPr>
-          <a:xfrm>
-            <a:off x="822960" y="1554480"/>
-            <a:ext cx="6675120" cy="4892040"/>
-          </a:xfrm>
-          <a:prstGeom prst="rect">
-            <a:avLst/>
-          </a:prstGeom>
-          <a:noFill/>
-        </p:spPr>
-        <p:txBody>
-          <a:bodyPr wrap="square" lIns="91440" tIns="91440" rIns="91440" bIns="91440"/>
-          <a:lstStyle/>
-          <a:p>
-            <a:pPr marL="274320" indent="-274320">
-              <a:spcAft>
-                <a:spcPts val="900"/>
-              </a:spcAft>
-            </a:pPr>
-            <a:r>
-              <a:rPr sz="2800" b="1" i="0">
-                <a:solidFill>
-                  <a:srgbClr val="97BC62"/>
-                </a:solidFill>
-                <a:latin typeface="Calibri"/>
-              </a:rPr>
-              <a:t>•  </a:t>
-            </a:r>
-            <a:r>
-              <a:rPr sz="2800" b="0" i="0">
-                <a:solidFill>
-                  <a:srgbClr val="222B22"/>
-                </a:solidFill>
-                <a:latin typeface="Calibri"/>
-              </a:rPr>
-              <a:t>Two rounds, same as every session — the container holder first, then the content presenter: three things each</a:t>
-            </a:r>
-          </a:p>
-          <a:p>
-            <a:pPr marL="685800" indent="-274320">
-              <a:spcAft>
-                <a:spcPts val="700"/>
-              </a:spcAft>
-            </a:pPr>
-            <a:r>
-              <a:rPr sz="2000" b="1" i="0">
-                <a:solidFill>
-                  <a:srgbClr val="97BC62"/>
-                </a:solidFill>
-                <a:latin typeface="Calibri"/>
-              </a:rPr>
-              <a:t>–  </a:t>
-            </a:r>
-            <a:r>
-              <a:rPr sz="2000" b="0" i="1">
-                <a:solidFill>
-                  <a:srgbClr val="222B22"/>
-                </a:solidFill>
-                <a:latin typeface="Calibri"/>
-              </a:rPr>
-              <a:t>“What I think went well tonight: ______”</a:t>
-            </a:r>
-          </a:p>
-          <a:p>
-            <a:pPr marL="685800" indent="-274320">
-              <a:spcAft>
-                <a:spcPts val="700"/>
-              </a:spcAft>
-            </a:pPr>
-            <a:r>
-              <a:rPr sz="2000" b="1" i="0">
-                <a:solidFill>
-                  <a:srgbClr val="97BC62"/>
-                </a:solidFill>
-                <a:latin typeface="Calibri"/>
-              </a:rPr>
-              <a:t>–  </a:t>
-            </a:r>
-            <a:r>
-              <a:rPr sz="2000" b="0" i="1">
-                <a:solidFill>
-                  <a:srgbClr val="222B22"/>
-                </a:solidFill>
-                <a:latin typeface="Calibri"/>
-              </a:rPr>
-              <a:t>“What I’d do differently next time: ______”</a:t>
-            </a:r>
-          </a:p>
-          <a:p>
-            <a:pPr marL="685800" indent="-274320">
-              <a:spcAft>
-                <a:spcPts val="700"/>
-              </a:spcAft>
-            </a:pPr>
-            <a:r>
-              <a:rPr sz="2000" b="1" i="0">
-                <a:solidFill>
-                  <a:srgbClr val="97BC62"/>
-                </a:solidFill>
-                <a:latin typeface="Calibri"/>
-              </a:rPr>
-              <a:t>–  </a:t>
-            </a:r>
-            <a:r>
-              <a:rPr sz="2000" b="0" i="1">
-                <a:solidFill>
-                  <a:srgbClr val="222B22"/>
-                </a:solidFill>
-                <a:latin typeface="Calibri"/>
-              </a:rPr>
-              <a:t>“If I were to teach tonight’s process to someone, I would tell them: ______”</a:t>
-            </a:r>
-          </a:p>
-          <a:p>
-            <a:pPr marL="274320" indent="-274320">
-              <a:spcAft>
-                <a:spcPts val="900"/>
-              </a:spcAft>
-            </a:pPr>
-            <a:r>
-              <a:rPr sz="2800" b="1" i="0">
-                <a:solidFill>
-                  <a:srgbClr val="97BC62"/>
-                </a:solidFill>
-                <a:latin typeface="Calibri"/>
-              </a:rPr>
-              <a:t>•  </a:t>
-            </a:r>
-            <a:r>
-              <a:rPr sz="2800" b="0" i="0">
-                <a:solidFill>
-                  <a:srgbClr val="222B22"/>
-                </a:solidFill>
-                <a:latin typeface="Calibri"/>
-              </a:rPr>
-              <a:t>Then the room — the same two questions about tonight</a:t>
-            </a:r>
-          </a:p>
-          <a:p>
-            <a:pPr marL="274320" indent="-274320">
-              <a:spcAft>
-                <a:spcPts val="900"/>
-              </a:spcAft>
-            </a:pPr>
-            <a:r>
-              <a:rPr sz="2800" b="1" i="0">
-                <a:solidFill>
-                  <a:srgbClr val="97BC62"/>
-                </a:solidFill>
-                <a:latin typeface="Calibri"/>
-              </a:rPr>
-              <a:t>•  </a:t>
-            </a:r>
-            <a:r>
-              <a:rPr sz="2800" b="0" i="0">
-                <a:solidFill>
-                  <a:srgbClr val="222B22"/>
-                </a:solidFill>
-                <a:latin typeface="Calibri"/>
-              </a:rPr>
-              <a:t>The leaders receive without defending — “thank you” is the whole response</a:t>
-            </a:r>
-          </a:p>
-        </p:txBody>
-      </p:sp>
-      <p:sp>
-        <p:nvSpPr>
-          <p:cNvPr id="90" name="SlideNum"/>
-          <p:cNvSpPr txBox="1"/>
-          <p:nvPr/>
-        </p:nvSpPr>
-        <p:spPr>
-          <a:xfrm>
-            <a:off x="11384280" y="6446520"/>
-            <a:ext cx="640080" cy="292608"/>
-          </a:xfrm>
-          <a:prstGeom prst="rect">
-            <a:avLst/>
-          </a:prstGeom>
-          <a:noFill/>
-        </p:spPr>
-        <p:txBody>
-          <a:bodyPr wrap="none" lIns="0" tIns="0" rIns="45720" bIns="0" anchor="ctr"/>
-          <a:lstStyle/>
-          <a:p>
-            <a:pPr algn="r"/>
-            <a:r>
-              <a:t>45</a:t>
-            </a:r>
-            <a:endParaRPr sz="1000" b="1">
-              <a:solidFill>
-                <a:srgbClr val="7A8A6E"/>
-              </a:solidFill>
-              <a:latin typeface="Calibri"/>
-            </a:endParaRPr>
-          </a:p>
-        </p:txBody>
-      </p:sp>
-      <p:pic>
-        <p:nvPicPr>
-          <p:cNvPr id="33" name="Picture 33" descr="compass on the trail - the weekly bearing check"/>
-          <p:cNvPicPr>
-            <a:picLocks noChangeAspect="1"/>
-          </p:cNvPicPr>
-          <p:nvPr/>
-        </p:nvPicPr>
-        <p:blipFill>
-          <a:blip r:embed="rId3"/>
-          <a:stretch>
-            <a:fillRect/>
-          </a:stretch>
-        </p:blipFill>
-        <p:spPr>
-          <a:xfrm>
-            <a:off x="8106160" y="1463040"/>
-            <a:ext cx="3259831" cy="4892040"/>
-          </a:xfrm>
-          <a:prstGeom prst="rect">
-            <a:avLst/>
-          </a:prstGeom>
-          <a:ln w="76200">
-            <a:solidFill>
-              <a:srgbClr val="FFFFFF"/>
-            </a:solidFill>
-          </a:ln>
-          <a:effectLst>
-            <a:outerShdw blurRad="63500" dist="25400" dir="5400000" rotWithShape="0">
-              <a:srgbClr val="000000">
-                <a:alpha val="35000"/>
-              </a:srgbClr>
-            </a:outerShdw>
-          </a:effectLst>
-        </p:spPr>
-      </p:pic>
-    </p:spTree>
-  </p:cSld>
-  <p:clrMapOvr>
-    <a:masterClrMapping/>
-  </p:clrMapOvr>
-</p:sld>
-</file>
-
-<file path=ppt/slides/slide46.xml><?xml version="1.0" encoding="utf-8"?>
-<p:sld xmlns:a="http://schemas.openxmlformats.org/drawingml/2006/main" xmlns:r="http://schemas.openxmlformats.org/officeDocument/2006/relationships" xmlns:p="http://schemas.openxmlformats.org/presentationml/2006/main">
-  <p:cSld>
-    <p:spTree>
-      <p:nvGrpSpPr>
-        <p:cNvPr id="1" name=""/>
-        <p:cNvGrpSpPr/>
-        <p:nvPr/>
-      </p:nvGrpSpPr>
-      <p:grpSpPr>
-        <a:xfrm>
-          <a:off x="0" y="0"/>
-          <a:ext cx="0" cy="0"/>
-          <a:chOff x="0" y="0"/>
-          <a:chExt cx="0" cy="0"/>
-        </a:xfrm>
-      </p:grpSpPr>
-      <p:sp>
-        <p:nvSpPr>
-          <p:cNvPr id="2" name="Rectangle 1"/>
-          <p:cNvSpPr/>
-          <p:nvPr/>
-        </p:nvSpPr>
-        <p:spPr>
-          <a:xfrm>
-            <a:off x="0" y="0"/>
-            <a:ext cx="12191695" cy="6858000"/>
-          </a:xfrm>
-          <a:prstGeom prst="rect">
-            <a:avLst/>
-          </a:prstGeom>
-          <a:solidFill>
-            <a:srgbClr val="FFFFFF"/>
-          </a:solidFill>
-          <a:ln>
-            <a:noFill/>
-          </a:ln>
-        </p:spPr>
-        <p:txBody>
-          <a:bodyPr/>
-          <a:lstStyle/>
-          <a:p>
-            <a:endParaRPr/>
-          </a:p>
-        </p:txBody>
-      </p:sp>
-      <p:sp>
-        <p:nvSpPr>
-          <p:cNvPr id="3" name="TextBox 2"/>
-          <p:cNvSpPr txBox="1"/>
-          <p:nvPr/>
-        </p:nvSpPr>
-        <p:spPr>
-          <a:xfrm>
-            <a:off x="822960" y="502920"/>
-            <a:ext cx="10515600" cy="822960"/>
-          </a:xfrm>
-          <a:prstGeom prst="rect">
-            <a:avLst/>
-          </a:prstGeom>
-          <a:noFill/>
-        </p:spPr>
-        <p:txBody>
-          <a:bodyPr wrap="square">
-            <a:spAutoFit/>
-          </a:bodyPr>
-          <a:lstStyle/>
-          <a:p>
-            <a:pPr algn="l">
-              <a:spcAft>
-                <a:spcPts val="600"/>
-              </a:spcAft>
-            </a:pPr>
-            <a:r>
-              <a:rPr sz="2800" b="1" i="0">
-                <a:solidFill>
-                  <a:srgbClr val="2C5F2D"/>
-                </a:solidFill>
-                <a:latin typeface="Cambria"/>
-              </a:rPr>
-              <a:t>Closing the Container + Aaronic Blessing</a:t>
-            </a:r>
-          </a:p>
-        </p:txBody>
-      </p:sp>
-      <p:sp>
-        <p:nvSpPr>
-          <p:cNvPr id="4" name="TextBox 4"/>
-          <p:cNvSpPr txBox="1"/>
-          <p:nvPr/>
-        </p:nvSpPr>
-        <p:spPr>
-          <a:xfrm>
-            <a:off x="822960" y="1600200"/>
-            <a:ext cx="5669280" cy="4572000"/>
-          </a:xfrm>
-          <a:prstGeom prst="rect">
-            <a:avLst/>
-          </a:prstGeom>
-          <a:noFill/>
-        </p:spPr>
-        <p:txBody>
-          <a:bodyPr wrap="square" lIns="91440" tIns="91440" rIns="91440" bIns="91440"/>
-          <a:lstStyle/>
-          <a:p>
-            <a:pPr marL="274320" indent="-274320">
-              <a:spcAft>
-                <a:spcPts val="900"/>
-              </a:spcAft>
-            </a:pPr>
-            <a:r>
-              <a:rPr sz="2200" b="1" i="0">
-                <a:solidFill>
-                  <a:srgbClr val="97BC62"/>
-                </a:solidFill>
-                <a:latin typeface="Calibri"/>
-              </a:rPr>
-              <a:t>•  </a:t>
-            </a:r>
-            <a:r>
-              <a:rPr sz="2200" b="0" i="0">
-                <a:solidFill>
-                  <a:srgbClr val="222B22"/>
-                </a:solidFill>
-                <a:latin typeface="Calibri"/>
-              </a:rPr>
-              <a:t>We close the way we opened — the container, six steps:</a:t>
-            </a:r>
-          </a:p>
-          <a:p>
-            <a:pPr marL="685800" indent="-274320">
-              <a:spcAft>
-                <a:spcPts val="700"/>
-              </a:spcAft>
-            </a:pPr>
-            <a:r>
-              <a:rPr sz="2000" b="1" i="0">
-                <a:solidFill>
-                  <a:srgbClr val="97BC62"/>
-                </a:solidFill>
-                <a:latin typeface="Calibri"/>
-              </a:rPr>
-              <a:t>1   </a:t>
-            </a:r>
-            <a:r>
-              <a:rPr sz="2000" b="0" i="0">
-                <a:solidFill>
-                  <a:srgbClr val="222B22"/>
-                </a:solidFill>
-                <a:latin typeface="Calibri"/>
-              </a:rPr>
-              <a:t>Stand again — same circle, same posture as the open</a:t>
-            </a:r>
-          </a:p>
-          <a:p>
-            <a:pPr marL="685800" indent="-274320">
-              <a:spcAft>
-                <a:spcPts val="700"/>
-              </a:spcAft>
-            </a:pPr>
-            <a:r>
-              <a:rPr sz="2000" b="1" i="0">
-                <a:solidFill>
-                  <a:srgbClr val="97BC62"/>
-                </a:solidFill>
-                <a:latin typeface="Calibri"/>
-              </a:rPr>
-              <a:t>2   </a:t>
-            </a:r>
-            <a:r>
-              <a:rPr sz="2000" b="0" i="0">
-                <a:solidFill>
-                  <a:srgbClr val="222B22"/>
-                </a:solidFill>
-                <a:latin typeface="Calibri"/>
-              </a:rPr>
-              <a:t>One-word landing — compare it to your opening word</a:t>
-            </a:r>
-          </a:p>
-          <a:p>
-            <a:pPr marL="685800" indent="-274320">
-              <a:spcAft>
-                <a:spcPts val="700"/>
-              </a:spcAft>
-            </a:pPr>
-            <a:r>
-              <a:rPr sz="2000" b="1" i="0">
-                <a:solidFill>
-                  <a:srgbClr val="97BC62"/>
-                </a:solidFill>
-                <a:latin typeface="Calibri"/>
-              </a:rPr>
-              <a:t>3   </a:t>
-            </a:r>
-            <a:r>
-              <a:rPr sz="2000" b="0" i="0">
-                <a:solidFill>
-                  <a:srgbClr val="222B22"/>
-                </a:solidFill>
-                <a:latin typeface="Calibri"/>
-              </a:rPr>
-              <a:t>The one thing you are taking from tonight</a:t>
-            </a:r>
-          </a:p>
-          <a:p>
-            <a:pPr marL="685800" indent="-274320">
-              <a:spcAft>
-                <a:spcPts val="700"/>
-              </a:spcAft>
-            </a:pPr>
-            <a:r>
-              <a:rPr sz="2000" b="1" i="0">
-                <a:solidFill>
-                  <a:srgbClr val="97BC62"/>
-                </a:solidFill>
-                <a:latin typeface="Calibri"/>
-              </a:rPr>
-              <a:t>4   </a:t>
-            </a:r>
-            <a:r>
-              <a:rPr sz="2000" b="0" i="0">
-                <a:solidFill>
-                  <a:srgbClr val="222B22"/>
-                </a:solidFill>
-                <a:latin typeface="Calibri"/>
-              </a:rPr>
-              <a:t>The one practice — committed aloud, or modified to one you will actually keep</a:t>
-            </a:r>
-          </a:p>
-          <a:p>
-            <a:pPr marL="685800" indent="-274320">
-              <a:spcAft>
-                <a:spcPts val="700"/>
-              </a:spcAft>
-            </a:pPr>
-            <a:r>
-              <a:rPr sz="2000" b="1" i="0">
-                <a:solidFill>
-                  <a:srgbClr val="97BC62"/>
-                </a:solidFill>
-                <a:latin typeface="Calibri"/>
-              </a:rPr>
-              <a:t>5   </a:t>
-            </a:r>
-            <a:r>
-              <a:rPr sz="2000" b="0" i="0">
-                <a:solidFill>
-                  <a:srgbClr val="222B22"/>
-                </a:solidFill>
-                <a:latin typeface="Calibri"/>
-              </a:rPr>
-              <a:t>Blessings — specific, witnessed, short</a:t>
-            </a:r>
-          </a:p>
-          <a:p>
-            <a:pPr marL="685800" indent="-274320">
-              <a:spcAft>
-                <a:spcPts val="700"/>
-              </a:spcAft>
-            </a:pPr>
-            <a:r>
-              <a:rPr sz="2000" b="1" i="0">
-                <a:solidFill>
-                  <a:srgbClr val="97BC62"/>
-                </a:solidFill>
-                <a:latin typeface="Calibri"/>
-              </a:rPr>
-              <a:t>6   </a:t>
-            </a:r>
-            <a:r>
-              <a:rPr sz="2000" b="0" i="0">
-                <a:solidFill>
-                  <a:srgbClr val="222B22"/>
-                </a:solidFill>
-                <a:latin typeface="Calibri"/>
-              </a:rPr>
-              <a:t>Closing prayer — and the Aaronic blessing, spoken over each other, face to face</a:t>
-            </a:r>
-          </a:p>
-        </p:txBody>
-      </p:sp>
-      <p:sp>
-        <p:nvSpPr>
-          <p:cNvPr id="6" name="TextBox 6"/>
-          <p:cNvSpPr txBox="1"/>
-          <p:nvPr/>
-        </p:nvSpPr>
-        <p:spPr>
-          <a:xfrm>
-            <a:off x="6766560" y="1737360"/>
-            <a:ext cx="4663440" cy="2926080"/>
-          </a:xfrm>
-          <a:prstGeom prst="rect">
-            <a:avLst/>
-          </a:prstGeom>
-          <a:solidFill>
-            <a:srgbClr val="F1F6EC"/>
-          </a:solidFill>
-        </p:spPr>
-        <p:txBody>
-          <a:bodyPr wrap="square" lIns="91440" tIns="91440" rIns="91440" bIns="91440" anchor="ctr"/>
-          <a:lstStyle/>
-          <a:p>
-            <a:pPr>
-              <a:spcAft>
-                <a:spcPts val="900"/>
-              </a:spcAft>
-            </a:pPr>
-            <a:r>
-              <a:rPr sz="1200" b="1" i="0">
-                <a:solidFill>
-                  <a:srgbClr val="97BC62"/>
-                </a:solidFill>
-                <a:latin typeface="Calibri"/>
-              </a:rPr>
-              <a:t>THE AARONIC BLESSING — NUMBERS 6:24–26</a:t>
-            </a:r>
-          </a:p>
-          <a:p>
-            <a:pPr>
-              <a:spcAft>
-                <a:spcPts val="600"/>
-              </a:spcAft>
-            </a:pPr>
-            <a:r>
-              <a:rPr sz="2400" b="0" i="1">
-                <a:solidFill>
-                  <a:srgbClr val="222B22"/>
-                </a:solidFill>
-                <a:latin typeface="Cambria"/>
-              </a:rPr>
-              <a:t>“The Lord bless you and keep you;</a:t>
-            </a:r>
-          </a:p>
-          <a:p>
-            <a:pPr>
-              <a:spcAft>
-                <a:spcPts val="600"/>
-              </a:spcAft>
-            </a:pPr>
-            <a:r>
-              <a:rPr sz="2400" b="0" i="1">
-                <a:solidFill>
-                  <a:srgbClr val="222B22"/>
-                </a:solidFill>
-                <a:latin typeface="Cambria"/>
-              </a:rPr>
-              <a:t>the Lord make his face to shine upon you, and be gracious to you;</a:t>
-            </a:r>
-          </a:p>
-          <a:p>
-            <a:pPr>
-              <a:spcAft>
-                <a:spcPts val="600"/>
-              </a:spcAft>
-            </a:pPr>
-            <a:r>
-              <a:rPr sz="2400" b="0" i="1">
-                <a:solidFill>
-                  <a:srgbClr val="222B22"/>
-                </a:solidFill>
-                <a:latin typeface="Cambria"/>
-              </a:rPr>
-              <a:t>the Lord lift up his countenance upon you, and give you peace.”</a:t>
-            </a:r>
-          </a:p>
-        </p:txBody>
-      </p:sp>
-      <p:sp>
-        <p:nvSpPr>
-          <p:cNvPr id="90" name="SlideNum"/>
-          <p:cNvSpPr txBox="1"/>
-          <p:nvPr/>
-        </p:nvSpPr>
-        <p:spPr>
-          <a:xfrm>
-            <a:off x="11384280" y="6446520"/>
-            <a:ext cx="640080" cy="292608"/>
-          </a:xfrm>
-          <a:prstGeom prst="rect">
-            <a:avLst/>
-          </a:prstGeom>
-          <a:noFill/>
-        </p:spPr>
-        <p:txBody>
-          <a:bodyPr wrap="none" lIns="0" tIns="0" rIns="45720" bIns="0" anchor="ctr"/>
-          <a:lstStyle/>
-          <a:p>
-            <a:pPr algn="r"/>
-            <a:r>
-              <a:t>46</a:t>
-            </a:r>
-            <a:endParaRPr sz="1000" b="1">
-              <a:solidFill>
-                <a:srgbClr val="7A8A6E"/>
-              </a:solidFill>
-              <a:latin typeface="Calibri"/>
-            </a:endParaRPr>
-          </a:p>
-        </p:txBody>
-      </p:sp>
     </p:spTree>
   </p:cSld>
   <p:clrMapOvr>

--- a/_implementation-notes/evening-series/FotH Evening Session 3 Slides DRAFT v1.pptx
+++ b/_implementation-notes/evening-series/FotH Evening Session 3 Slides DRAFT v1.pptx
@@ -5144,6 +5144,339 @@
                 </a:solidFill>
                 <a:latin typeface="Cambria"/>
               </a:rPr>
+              <a:t>Stories in pairs</a:t>
+            </a:r>
+          </a:p>
+        </p:txBody>
+      </p:sp>
+      <p:sp>
+        <p:nvSpPr>
+          <p:cNvPr id="4" name="TextBox 4"/>
+          <p:cNvSpPr txBox="1"/>
+          <p:nvPr/>
+        </p:nvSpPr>
+        <p:spPr>
+          <a:xfrm>
+            <a:off x="822960" y="1554480"/>
+            <a:ext cx="6675120" cy="4892040"/>
+          </a:xfrm>
+          <a:prstGeom prst="rect">
+            <a:avLst/>
+          </a:prstGeom>
+          <a:noFill/>
+        </p:spPr>
+        <p:txBody>
+          <a:bodyPr wrap="square" lIns="91440" tIns="91440" rIns="91440" bIns="91440"/>
+          <a:lstStyle/>
+          <a:p>
+            <a:pPr marL="274320" indent="-274320">
+              <a:spcAft>
+                <a:spcPts val="750"/>
+              </a:spcAft>
+            </a:pPr>
+            <a:r>
+              <a:rPr sz="2000" b="1" i="0">
+                <a:solidFill>
+                  <a:srgbClr val="97BC62"/>
+                </a:solidFill>
+                <a:latin typeface="Calibri"/>
+              </a:rPr>
+              <a:t>•  </a:t>
+            </a:r>
+            <a:r>
+              <a:rPr sz="2000" b="0" i="0">
+                <a:solidFill>
+                  <a:srgbClr val="222B22"/>
+                </a:solidFill>
+                <a:latin typeface="Calibri"/>
+              </a:rPr>
+              <a:t>Tonight’s tellers: the parents — plus any Companion-in-Formation. The leadsanion goes first</a:t>
+            </a:r>
+          </a:p>
+          <a:p>
+            <a:pPr marL="342900" indent="-342900">
+              <a:spcAft>
+                <a:spcPts val="750"/>
+              </a:spcAft>
+            </a:pPr>
+            <a:r>
+              <a:rPr sz="2000" b="1" i="0">
+                <a:solidFill>
+                  <a:srgbClr val="97BC62"/>
+                </a:solidFill>
+                <a:latin typeface="Calibri"/>
+              </a:rPr>
+              <a:t>1   </a:t>
+            </a:r>
+            <a:r>
+              <a:rPr sz="2000" b="0" i="0">
+                <a:solidFill>
+                  <a:srgbClr val="222B22"/>
+                </a:solidFill>
+                <a:latin typeface="Calibri"/>
+              </a:rPr>
+              <a:t>Story — 5–7 minutes. The teller speaks; nobody interrupts, even the silences</a:t>
+            </a:r>
+          </a:p>
+          <a:p>
+            <a:pPr marL="342900" indent="-342900">
+              <a:spcAft>
+                <a:spcPts val="750"/>
+              </a:spcAft>
+            </a:pPr>
+            <a:r>
+              <a:rPr sz="2000" b="1" i="0">
+                <a:solidFill>
+                  <a:srgbClr val="97BC62"/>
+                </a:solidFill>
+                <a:latin typeface="Calibri"/>
+              </a:rPr>
+              <a:t>2   </a:t>
+            </a:r>
+            <a:r>
+              <a:rPr sz="2000" b="0" i="0">
+                <a:solidFill>
+                  <a:srgbClr val="222B22"/>
+                </a:solidFill>
+                <a:latin typeface="Calibri"/>
+              </a:rPr>
+              <a:t>Silence — ten seconds</a:t>
+            </a:r>
+          </a:p>
+          <a:p>
+            <a:pPr marL="342900" indent="-342900">
+              <a:spcAft>
+                <a:spcPts val="750"/>
+              </a:spcAft>
+            </a:pPr>
+            <a:r>
+              <a:rPr sz="2000" b="1" i="0">
+                <a:solidFill>
+                  <a:srgbClr val="97BC62"/>
+                </a:solidFill>
+                <a:latin typeface="Calibri"/>
+              </a:rPr>
+              <a:t>3   </a:t>
+            </a:r>
+            <a:r>
+              <a:rPr sz="2000" b="0" i="0">
+                <a:solidFill>
+                  <a:srgbClr val="222B22"/>
+                </a:solidFill>
+                <a:latin typeface="Calibri"/>
+              </a:rPr>
+              <a:t>Blessing round — one or two sentences each, teens included: “What I want to bless about your story is...”</a:t>
+            </a:r>
+          </a:p>
+          <a:p>
+            <a:pPr marL="274320" indent="-274320">
+              <a:spcAft>
+                <a:spcPts val="750"/>
+              </a:spcAft>
+            </a:pPr>
+            <a:r>
+              <a:rPr sz="2000" b="1" i="0">
+                <a:solidFill>
+                  <a:srgbClr val="97BC62"/>
+                </a:solidFill>
+                <a:latin typeface="Calibri"/>
+              </a:rPr>
+              <a:t>•  </a:t>
+            </a:r>
+            <a:r>
+              <a:rPr sz="2000" b="0" i="0">
+                <a:solidFill>
+                  <a:srgbClr val="222B22"/>
+                </a:solidFill>
+                <a:latin typeface="Calibri"/>
+              </a:rPr>
+              <a:t>“Inside this pair, what is said stays in this pair. Not even back to the main room, and not back up in the car this week.”</a:t>
+            </a:r>
+          </a:p>
+          <a:p>
+            <a:pPr marL="274320" indent="-274320">
+              <a:spcAft>
+                <a:spcPts val="750"/>
+              </a:spcAft>
+            </a:pPr>
+            <a:r>
+              <a:rPr sz="2000" b="1" i="0">
+                <a:solidFill>
+                  <a:srgbClr val="97BC62"/>
+                </a:solidFill>
+                <a:latin typeface="Calibri"/>
+              </a:rPr>
+              <a:t>•  </a:t>
+            </a:r>
+            <a:r>
+              <a:rPr sz="2000" b="0" i="0">
+                <a:solidFill>
+                  <a:srgbClr val="222B22"/>
+                </a:solidFill>
+                <a:latin typeface="Calibri"/>
+              </a:rPr>
+              <a:t>“When someone is telling their story... we are looking at them. We are receiving. That’s the practice.”</a:t>
+            </a:r>
+          </a:p>
+        </p:txBody>
+      </p:sp>
+      <p:sp>
+        <p:nvSpPr>
+          <p:cNvPr id="90" name="SlideNum"/>
+          <p:cNvSpPr txBox="1"/>
+          <p:nvPr/>
+        </p:nvSpPr>
+        <p:spPr>
+          <a:xfrm>
+            <a:off x="11384280" y="6446520"/>
+            <a:ext cx="640080" cy="292608"/>
+          </a:xfrm>
+          <a:prstGeom prst="rect">
+            <a:avLst/>
+          </a:prstGeom>
+          <a:noFill/>
+        </p:spPr>
+        <p:txBody>
+          <a:bodyPr wrap="none" lIns="0" tIns="0" rIns="45720" bIns="0" anchor="ctr"/>
+          <a:lstStyle/>
+          <a:p>
+            <a:pPr algn="r"/>
+            <a:r>
+              <a:t>41</a:t>
+            </a:r>
+            <a:endParaRPr sz="1000" b="1">
+              <a:solidFill>
+                <a:srgbClr val="7A8A6E"/>
+              </a:solidFill>
+              <a:latin typeface="Calibri"/>
+            </a:endParaRPr>
+          </a:p>
+        </p:txBody>
+      </p:sp>
+      <p:pic>
+        <p:nvPicPr>
+          <p:cNvPr id="30" name="Picture 30" descr="stepping stones across a stream"/>
+          <p:cNvPicPr>
+            <a:picLocks noChangeAspect="1"/>
+          </p:cNvPicPr>
+          <p:nvPr/>
+        </p:nvPicPr>
+        <p:blipFill>
+          <a:blip r:embed="rId3"/>
+          <a:stretch>
+            <a:fillRect/>
+          </a:stretch>
+        </p:blipFill>
+        <p:spPr>
+          <a:xfrm>
+            <a:off x="7696962" y="1463040"/>
+            <a:ext cx="3669030" cy="4892040"/>
+          </a:xfrm>
+          <a:prstGeom prst="rect">
+            <a:avLst/>
+          </a:prstGeom>
+          <a:ln w="76200">
+            <a:solidFill>
+              <a:srgbClr val="FFFFFF"/>
+            </a:solidFill>
+          </a:ln>
+          <a:effectLst>
+            <a:outerShdw blurRad="63500" dist="25400" dir="5400000" rotWithShape="0">
+              <a:srgbClr val="000000">
+                <a:alpha val="35000"/>
+              </a:srgbClr>
+            </a:outerShdw>
+          </a:effectLst>
+        </p:spPr>
+      </p:pic>
+    </p:spTree>
+  </p:cSld>
+  <p:clrMapOvr>
+    <a:masterClrMapping/>
+  </p:clrMapOvr>
+</p:sld>
+</file>
+
+<file path=ppt/slides/slide11.xml><?xml version="1.0" encoding="utf-8"?>
+<p:sld xmlns:a="http://schemas.openxmlformats.org/drawingml/2006/main" xmlns:r="http://schemas.openxmlformats.org/officeDocument/2006/relationships" xmlns:p="http://schemas.openxmlformats.org/presentationml/2006/main">
+  <p:cSld>
+    <p:spTree>
+      <p:nvGrpSpPr>
+        <p:cNvPr id="1" name=""/>
+        <p:cNvGrpSpPr/>
+        <p:nvPr/>
+      </p:nvGrpSpPr>
+      <p:grpSpPr>
+        <a:xfrm>
+          <a:off x="0" y="0"/>
+          <a:ext cx="0" cy="0"/>
+          <a:chOff x="0" y="0"/>
+          <a:chExt cx="0" cy="0"/>
+        </a:xfrm>
+      </p:grpSpPr>
+      <p:sp>
+        <p:nvSpPr>
+          <p:cNvPr id="2" name="Rectangle 1"/>
+          <p:cNvSpPr/>
+          <p:nvPr/>
+        </p:nvSpPr>
+        <p:spPr>
+          <a:xfrm>
+            <a:off x="0" y="0"/>
+            <a:ext cx="12191695" cy="6858000"/>
+          </a:xfrm>
+          <a:prstGeom prst="rect">
+            <a:avLst/>
+          </a:prstGeom>
+          <a:solidFill>
+            <a:srgbClr val="FFFFFF"/>
+          </a:solidFill>
+          <a:ln>
+            <a:noFill/>
+          </a:ln>
+        </p:spPr>
+        <p:txBody>
+          <a:bodyPr/>
+          <a:lstStyle/>
+          <a:p>
+            <a:endParaRPr/>
+          </a:p>
+        </p:txBody>
+      </p:sp>
+      <p:sp>
+        <p:nvSpPr>
+          <p:cNvPr id="3" name="TextBox 2"/>
+          <p:cNvSpPr txBox="1"/>
+          <p:nvPr/>
+        </p:nvSpPr>
+        <p:spPr>
+          <a:xfrm>
+            <a:off x="822960" y="502920"/>
+            <a:ext cx="10515600" cy="822960"/>
+          </a:xfrm>
+          <a:prstGeom prst="rect">
+            <a:avLst/>
+          </a:prstGeom>
+          <a:noFill/>
+        </p:spPr>
+        <p:txBody>
+          <a:bodyPr wrap="square">
+            <a:spAutoFit/>
+          </a:bodyPr>
+          <a:lstStyle/>
+          <a:p>
+            <a:pPr algn="l">
+              <a:spcAft>
+                <a:spcPts val="600"/>
+              </a:spcAft>
+            </a:pPr>
+            <a:r>
+              <a:rPr sz="2800" b="1" i="0">
+                <a:solidFill>
+                  <a:srgbClr val="2C5F2D"/>
+                </a:solidFill>
+                <a:latin typeface="Cambria"/>
+              </a:rPr>
               <a:t>Merge and Shared Closing</a:t>
             </a:r>
           </a:p>
@@ -5311,7 +5644,7 @@
 </p:sld>
 </file>
 
-<file path=ppt/slides/slide11.xml><?xml version="1.0" encoding="utf-8"?>
+<file path=ppt/slides/slide12.xml><?xml version="1.0" encoding="utf-8"?>
 <p:sld xmlns:a="http://schemas.openxmlformats.org/drawingml/2006/main" xmlns:r="http://schemas.openxmlformats.org/officeDocument/2006/relationships" xmlns:p="http://schemas.openxmlformats.org/presentationml/2006/main">
   <p:cSld>
     <p:spTree>
@@ -5645,6 +5978,390 @@
 </file>
 
 <file path=ppt/slides/slide13.xml><?xml version="1.0" encoding="utf-8"?>
+<p:sld xmlns:a="http://schemas.openxmlformats.org/drawingml/2006/main" xmlns:p="http://schemas.openxmlformats.org/presentationml/2006/main" xmlns:r="http://schemas.openxmlformats.org/officeDocument/2006/relationships">
+  <p:cSld>
+    <p:spTree>
+      <p:nvGrpSpPr>
+        <p:cNvPr id="1" name=""/>
+        <p:cNvGrpSpPr/>
+        <p:nvPr/>
+      </p:nvGrpSpPr>
+      <p:grpSpPr/>
+      <p:sp>
+        <p:nvSpPr>
+          <p:cNvPr id="2" name="Rectangle 1"/>
+          <p:cNvSpPr/>
+          <p:nvPr/>
+        </p:nvSpPr>
+        <p:spPr>
+          <a:xfrm>
+            <a:off x="0" y="0"/>
+            <a:ext cx="12192000" cy="6858000"/>
+          </a:xfrm>
+          <a:prstGeom prst="rect">
+            <a:avLst/>
+          </a:prstGeom>
+          <a:solidFill>
+            <a:srgbClr val="FFFFFF"/>
+          </a:solidFill>
+          <a:ln>
+            <a:noFill/>
+          </a:ln>
+          <a:effectLst/>
+        </p:spPr>
+        <p:style>
+          <a:lnRef idx="1">
+            <a:schemeClr val="accent1"/>
+          </a:lnRef>
+          <a:fillRef idx="3">
+            <a:schemeClr val="accent1"/>
+          </a:fillRef>
+          <a:effectRef idx="2">
+            <a:schemeClr val="accent1"/>
+          </a:effectRef>
+          <a:fontRef idx="minor">
+            <a:schemeClr val="lt1"/>
+          </a:fontRef>
+        </p:style>
+        <p:txBody>
+          <a:bodyPr rtlCol="0" anchor="ctr"/>
+          <a:lstStyle/>
+          <a:p>
+            <a:pPr algn="ctr"/>
+          </a:p>
+        </p:txBody>
+      </p:sp>
+      <p:sp>
+        <p:nvSpPr>
+          <p:cNvPr id="3" name="TextBox 2"/>
+          <p:cNvSpPr txBox="1"/>
+          <p:nvPr/>
+        </p:nvSpPr>
+        <p:spPr>
+          <a:xfrm>
+            <a:off x="822960" y="502920"/>
+            <a:ext cx="10515600" cy="822960"/>
+          </a:xfrm>
+          <a:prstGeom prst="rect">
+            <a:avLst/>
+          </a:prstGeom>
+          <a:noFill/>
+        </p:spPr>
+        <p:txBody>
+          <a:bodyPr wrap="square">
+            <a:spAutoFit/>
+          </a:bodyPr>
+          <a:lstStyle/>
+          <a:p>
+            <a:r>
+              <a:rPr sz="2800" b="1">
+                <a:solidFill>
+                  <a:srgbClr val="2C5F2D"/>
+                </a:solidFill>
+                <a:latin typeface="Cambria"/>
+              </a:rPr>
+              <a:t>The Take-Home Sheet — the Daily Rhythm</a:t>
+            </a:r>
+          </a:p>
+        </p:txBody>
+      </p:sp>
+      <p:pic>
+        <p:nvPicPr>
+          <p:cNvPr id="4" name="Picture 3" descr="s3_part1.png"/>
+          <p:cNvPicPr>
+            <a:picLocks noChangeAspect="1"/>
+          </p:cNvPicPr>
+          <p:nvPr/>
+        </p:nvPicPr>
+        <p:blipFill>
+          <a:blip r:embed="rId2"/>
+          <a:stretch>
+            <a:fillRect/>
+          </a:stretch>
+        </p:blipFill>
+        <p:spPr>
+          <a:xfrm>
+            <a:off x="1798167" y="1463040"/>
+            <a:ext cx="8595360" cy="4039819"/>
+          </a:xfrm>
+          <a:prstGeom prst="rect">
+            <a:avLst/>
+          </a:prstGeom>
+          <a:ln w="12700">
+            <a:solidFill>
+              <a:srgbClr val="C8C8C8"/>
+            </a:solidFill>
+          </a:ln>
+        </p:spPr>
+      </p:pic>
+      <p:sp>
+        <p:nvSpPr>
+          <p:cNvPr id="5" name="TextBox 4"/>
+          <p:cNvSpPr txBox="1"/>
+          <p:nvPr/>
+        </p:nvSpPr>
+        <p:spPr>
+          <a:xfrm>
+            <a:off x="822960" y="6355080"/>
+            <a:ext cx="10515600" cy="411480"/>
+          </a:xfrm>
+          <a:prstGeom prst="rect">
+            <a:avLst/>
+          </a:prstGeom>
+          <a:noFill/>
+        </p:spPr>
+        <p:txBody>
+          <a:bodyPr wrap="square">
+            <a:spAutoFit/>
+          </a:bodyPr>
+          <a:lstStyle/>
+          <a:p>
+            <a:r>
+              <a:rPr sz="1400" i="1">
+                <a:solidFill>
+                  <a:srgbClr val="595959"/>
+                </a:solidFill>
+                <a:latin typeface="Calibri"/>
+              </a:rPr>
+              <a:t>Handed out now — this is the sheet in your hands.</a:t>
+            </a:r>
+          </a:p>
+        </p:txBody>
+      </p:sp>
+      <p:sp>
+        <p:nvSpPr>
+          <p:cNvPr id="90" name="SlideNum"/>
+          <p:cNvSpPr txBox="1"/>
+          <p:nvPr/>
+        </p:nvSpPr>
+        <p:spPr>
+          <a:xfrm>
+            <a:off x="11384280" y="6446520"/>
+            <a:ext cx="640080" cy="292608"/>
+          </a:xfrm>
+          <a:prstGeom prst="rect">
+            <a:avLst/>
+          </a:prstGeom>
+          <a:noFill/>
+        </p:spPr>
+        <p:txBody>
+          <a:bodyPr wrap="none" lIns="0" tIns="0" rIns="45720" bIns="0" anchor="ctr"/>
+          <a:lstStyle/>
+          <a:p>
+            <a:pPr algn="r"/>
+            <a:r>
+              <a:t>44</a:t>
+            </a:r>
+            <a:endParaRPr sz="1000" b="1">
+              <a:solidFill>
+                <a:srgbClr val="7A8A6E"/>
+              </a:solidFill>
+              <a:latin typeface="Calibri"/>
+            </a:endParaRPr>
+          </a:p>
+        </p:txBody>
+      </p:sp>
+    </p:spTree>
+  </p:cSld>
+  <p:clrMapOvr>
+    <a:masterClrMapping/>
+  </p:clrMapOvr>
+</p:sld>
+</file>
+
+<file path=ppt/slides/slide14.xml><?xml version="1.0" encoding="utf-8"?>
+<p:sld xmlns:a="http://schemas.openxmlformats.org/drawingml/2006/main" xmlns:p="http://schemas.openxmlformats.org/presentationml/2006/main" xmlns:r="http://schemas.openxmlformats.org/officeDocument/2006/relationships">
+  <p:cSld>
+    <p:spTree>
+      <p:nvGrpSpPr>
+        <p:cNvPr id="1" name=""/>
+        <p:cNvGrpSpPr/>
+        <p:nvPr/>
+      </p:nvGrpSpPr>
+      <p:grpSpPr/>
+      <p:sp>
+        <p:nvSpPr>
+          <p:cNvPr id="2" name="Rectangle 1"/>
+          <p:cNvSpPr/>
+          <p:nvPr/>
+        </p:nvSpPr>
+        <p:spPr>
+          <a:xfrm>
+            <a:off x="0" y="0"/>
+            <a:ext cx="12192000" cy="6858000"/>
+          </a:xfrm>
+          <a:prstGeom prst="rect">
+            <a:avLst/>
+          </a:prstGeom>
+          <a:solidFill>
+            <a:srgbClr val="FFFFFF"/>
+          </a:solidFill>
+          <a:ln>
+            <a:noFill/>
+          </a:ln>
+          <a:effectLst/>
+        </p:spPr>
+        <p:style>
+          <a:lnRef idx="1">
+            <a:schemeClr val="accent1"/>
+          </a:lnRef>
+          <a:fillRef idx="3">
+            <a:schemeClr val="accent1"/>
+          </a:fillRef>
+          <a:effectRef idx="2">
+            <a:schemeClr val="accent1"/>
+          </a:effectRef>
+          <a:fontRef idx="minor">
+            <a:schemeClr val="lt1"/>
+          </a:fontRef>
+        </p:style>
+        <p:txBody>
+          <a:bodyPr rtlCol="0" anchor="ctr"/>
+          <a:lstStyle/>
+          <a:p>
+            <a:pPr algn="ctr"/>
+          </a:p>
+        </p:txBody>
+      </p:sp>
+      <p:sp>
+        <p:nvSpPr>
+          <p:cNvPr id="3" name="TextBox 2"/>
+          <p:cNvSpPr txBox="1"/>
+          <p:nvPr/>
+        </p:nvSpPr>
+        <p:spPr>
+          <a:xfrm>
+            <a:off x="822960" y="502920"/>
+            <a:ext cx="10515600" cy="822960"/>
+          </a:xfrm>
+          <a:prstGeom prst="rect">
+            <a:avLst/>
+          </a:prstGeom>
+          <a:noFill/>
+        </p:spPr>
+        <p:txBody>
+          <a:bodyPr wrap="square">
+            <a:spAutoFit/>
+          </a:bodyPr>
+          <a:lstStyle/>
+          <a:p>
+            <a:r>
+              <a:rPr sz="2800" b="1">
+                <a:solidFill>
+                  <a:srgbClr val="2C5F2D"/>
+                </a:solidFill>
+                <a:latin typeface="Cambria"/>
+              </a:rPr>
+              <a:t>The Take-Home Sheet — the Four Parts</a:t>
+            </a:r>
+          </a:p>
+        </p:txBody>
+      </p:sp>
+      <p:pic>
+        <p:nvPicPr>
+          <p:cNvPr id="4" name="Picture 3" descr="s3_part2.png"/>
+          <p:cNvPicPr>
+            <a:picLocks noChangeAspect="1"/>
+          </p:cNvPicPr>
+          <p:nvPr/>
+        </p:nvPicPr>
+        <p:blipFill>
+          <a:blip r:embed="rId2"/>
+          <a:stretch>
+            <a:fillRect/>
+          </a:stretch>
+        </p:blipFill>
+        <p:spPr>
+          <a:xfrm>
+            <a:off x="2066004" y="1463040"/>
+            <a:ext cx="8059687" cy="4709160"/>
+          </a:xfrm>
+          <a:prstGeom prst="rect">
+            <a:avLst/>
+          </a:prstGeom>
+          <a:ln w="12700">
+            <a:solidFill>
+              <a:srgbClr val="C8C8C8"/>
+            </a:solidFill>
+          </a:ln>
+        </p:spPr>
+      </p:pic>
+      <p:sp>
+        <p:nvSpPr>
+          <p:cNvPr id="5" name="TextBox 4"/>
+          <p:cNvSpPr txBox="1"/>
+          <p:nvPr/>
+        </p:nvSpPr>
+        <p:spPr>
+          <a:xfrm>
+            <a:off x="822960" y="6355080"/>
+            <a:ext cx="10515600" cy="411480"/>
+          </a:xfrm>
+          <a:prstGeom prst="rect">
+            <a:avLst/>
+          </a:prstGeom>
+          <a:noFill/>
+        </p:spPr>
+        <p:txBody>
+          <a:bodyPr wrap="square">
+            <a:spAutoFit/>
+          </a:bodyPr>
+          <a:lstStyle/>
+          <a:p>
+            <a:r>
+              <a:rPr sz="1400" i="1">
+                <a:solidFill>
+                  <a:srgbClr val="595959"/>
+                </a:solidFill>
+                <a:latin typeface="Calibri"/>
+              </a:rPr>
+              <a:t>One practice at a time — and a partner expecting you at the end of week one.</a:t>
+            </a:r>
+          </a:p>
+        </p:txBody>
+      </p:sp>
+      <p:sp>
+        <p:nvSpPr>
+          <p:cNvPr id="90" name="SlideNum"/>
+          <p:cNvSpPr txBox="1"/>
+          <p:nvPr/>
+        </p:nvSpPr>
+        <p:spPr>
+          <a:xfrm>
+            <a:off x="11384280" y="6446520"/>
+            <a:ext cx="640080" cy="292608"/>
+          </a:xfrm>
+          <a:prstGeom prst="rect">
+            <a:avLst/>
+          </a:prstGeom>
+          <a:noFill/>
+        </p:spPr>
+        <p:txBody>
+          <a:bodyPr wrap="none" lIns="0" tIns="0" rIns="45720" bIns="0" anchor="ctr"/>
+          <a:lstStyle/>
+          <a:p>
+            <a:pPr algn="r"/>
+            <a:r>
+              <a:t>44a</a:t>
+            </a:r>
+            <a:endParaRPr sz="1000" b="1">
+              <a:solidFill>
+                <a:srgbClr val="7A8A6E"/>
+              </a:solidFill>
+              <a:latin typeface="Calibri"/>
+            </a:endParaRPr>
+          </a:p>
+        </p:txBody>
+      </p:sp>
+    </p:spTree>
+  </p:cSld>
+  <p:clrMapOvr>
+    <a:masterClrMapping/>
+  </p:clrMapOvr>
+</p:sld>
+</file>
+
+<file path=ppt/slides/slide15.xml><?xml version="1.0" encoding="utf-8"?>
 <p:sld xmlns:a="http://schemas.openxmlformats.org/drawingml/2006/main" xmlns:r="http://schemas.openxmlformats.org/officeDocument/2006/relationships" xmlns:p="http://schemas.openxmlformats.org/presentationml/2006/main">
   <p:cSld>
     <p:spTree>
@@ -5977,7 +6694,7 @@
 </p:sld>
 </file>
 
-<file path=ppt/slides/slide14.xml><?xml version="1.0" encoding="utf-8"?>
+<file path=ppt/slides/slide16.xml><?xml version="1.0" encoding="utf-8"?>
 <p:sld xmlns:a="http://schemas.openxmlformats.org/drawingml/2006/main" xmlns:r="http://schemas.openxmlformats.org/officeDocument/2006/relationships" xmlns:p="http://schemas.openxmlformats.org/presentationml/2006/main">
   <p:cSld>
     <p:spTree>
@@ -6368,595 +7085,6 @@
             <a:pPr algn="r"/>
             <a:r>
               <a:t>46</a:t>
-            </a:r>
-            <a:endParaRPr sz="1000" b="1">
-              <a:solidFill>
-                <a:srgbClr val="7A8A6E"/>
-              </a:solidFill>
-              <a:latin typeface="Calibri"/>
-            </a:endParaRPr>
-          </a:p>
-        </p:txBody>
-      </p:sp>
-    </p:spTree>
-  </p:cSld>
-  <p:clrMapOvr>
-    <a:masterClrMapping/>
-  </p:clrMapOvr>
-</p:sld>
-</file>
-
-<file path=ppt/slides/slide15.xml><?xml version="1.0" encoding="utf-8"?>
-<p:sld xmlns:a="http://schemas.openxmlformats.org/drawingml/2006/main" xmlns:p="http://schemas.openxmlformats.org/presentationml/2006/main" xmlns:r="http://schemas.openxmlformats.org/officeDocument/2006/relationships">
-  <p:cSld>
-    <p:spTree>
-      <p:nvGrpSpPr>
-        <p:cNvPr id="1" name=""/>
-        <p:cNvGrpSpPr/>
-        <p:nvPr/>
-      </p:nvGrpSpPr>
-      <p:grpSpPr/>
-      <p:sp>
-        <p:nvSpPr>
-          <p:cNvPr id="2" name="Rectangle 1"/>
-          <p:cNvSpPr/>
-          <p:nvPr/>
-        </p:nvSpPr>
-        <p:spPr>
-          <a:xfrm>
-            <a:off x="0" y="0"/>
-            <a:ext cx="12192000" cy="6858000"/>
-          </a:xfrm>
-          <a:prstGeom prst="rect">
-            <a:avLst/>
-          </a:prstGeom>
-          <a:solidFill>
-            <a:srgbClr val="FFFFFF"/>
-          </a:solidFill>
-          <a:ln>
-            <a:noFill/>
-          </a:ln>
-          <a:effectLst/>
-        </p:spPr>
-        <p:style>
-          <a:lnRef idx="1">
-            <a:schemeClr val="accent1"/>
-          </a:lnRef>
-          <a:fillRef idx="3">
-            <a:schemeClr val="accent1"/>
-          </a:fillRef>
-          <a:effectRef idx="2">
-            <a:schemeClr val="accent1"/>
-          </a:effectRef>
-          <a:fontRef idx="minor">
-            <a:schemeClr val="lt1"/>
-          </a:fontRef>
-        </p:style>
-        <p:txBody>
-          <a:bodyPr rtlCol="0" anchor="ctr"/>
-          <a:lstStyle/>
-          <a:p>
-            <a:pPr algn="ctr"/>
-          </a:p>
-        </p:txBody>
-      </p:sp>
-      <p:sp>
-        <p:nvSpPr>
-          <p:cNvPr id="3" name="TextBox 2"/>
-          <p:cNvSpPr txBox="1"/>
-          <p:nvPr/>
-        </p:nvSpPr>
-        <p:spPr>
-          <a:xfrm>
-            <a:off x="822960" y="502920"/>
-            <a:ext cx="10515600" cy="822960"/>
-          </a:xfrm>
-          <a:prstGeom prst="rect">
-            <a:avLst/>
-          </a:prstGeom>
-          <a:noFill/>
-        </p:spPr>
-        <p:txBody>
-          <a:bodyPr wrap="square">
-            <a:spAutoFit/>
-          </a:bodyPr>
-          <a:lstStyle/>
-          <a:p>
-            <a:r>
-              <a:rPr sz="2800" b="1">
-                <a:solidFill>
-                  <a:srgbClr val="2C5F2D"/>
-                </a:solidFill>
-                <a:latin typeface="Cambria"/>
-              </a:rPr>
-              <a:t>Where We Are — the Four Connects</a:t>
-            </a:r>
-          </a:p>
-        </p:txBody>
-      </p:sp>
-      <p:pic>
-        <p:nvPicPr>
-          <p:cNvPr id="4" name="Picture 3" descr="four-connects.png"/>
-          <p:cNvPicPr>
-            <a:picLocks noChangeAspect="1"/>
-          </p:cNvPicPr>
-          <p:nvPr/>
-        </p:nvPicPr>
-        <p:blipFill>
-          <a:blip r:embed="rId2"/>
-          <a:stretch>
-            <a:fillRect/>
-          </a:stretch>
-        </p:blipFill>
-        <p:spPr>
-          <a:xfrm>
-            <a:off x="932688" y="1645920"/>
-            <a:ext cx="10332720" cy="3708663"/>
-          </a:xfrm>
-          <a:prstGeom prst="rect">
-            <a:avLst/>
-          </a:prstGeom>
-        </p:spPr>
-      </p:pic>
-      <p:sp>
-        <p:nvSpPr>
-          <p:cNvPr id="5" name="TextBox 4"/>
-          <p:cNvSpPr txBox="1"/>
-          <p:nvPr/>
-        </p:nvSpPr>
-        <p:spPr>
-          <a:xfrm>
-            <a:off x="822960" y="5623560"/>
-            <a:ext cx="10515600" cy="914400"/>
-          </a:xfrm>
-          <a:prstGeom prst="rect">
-            <a:avLst/>
-          </a:prstGeom>
-          <a:noFill/>
-        </p:spPr>
-        <p:txBody>
-          <a:bodyPr wrap="square">
-            <a:spAutoFit/>
-          </a:bodyPr>
-          <a:lstStyle/>
-          <a:p>
-            <a:r>
-              <a:rPr sz="1800" b="0">
-                <a:solidFill>
-                  <a:srgbClr val="222B22"/>
-                </a:solidFill>
-                <a:latin typeface="Calibri"/>
-              </a:rPr>
-              <a:t>Session 3 crosses from the first box toward the second — </a:t>
-            </a:r>
-            <a:r>
-              <a:rPr sz="1800" b="1">
-                <a:solidFill>
-                  <a:srgbClr val="2C5F2D"/>
-                </a:solidFill>
-                <a:latin typeface="Calibri"/>
-              </a:rPr>
-              <a:t>Self opening toward Others</a:t>
-            </a:r>
-            <a:r>
-              <a:rPr sz="1800" b="0">
-                <a:solidFill>
-                  <a:srgbClr val="222B22"/>
-                </a:solidFill>
-                <a:latin typeface="Calibri"/>
-              </a:rPr>
-              <a:t>. Each connection makes the next one real (Matt. 22:37–40).</a:t>
-            </a:r>
-          </a:p>
-        </p:txBody>
-      </p:sp>
-      <p:sp>
-        <p:nvSpPr>
-          <p:cNvPr id="90" name="SlideNum"/>
-          <p:cNvSpPr txBox="1"/>
-          <p:nvPr/>
-        </p:nvSpPr>
-        <p:spPr>
-          <a:xfrm>
-            <a:off x="11384280" y="6446520"/>
-            <a:ext cx="640080" cy="292608"/>
-          </a:xfrm>
-          <a:prstGeom prst="rect">
-            <a:avLst/>
-          </a:prstGeom>
-          <a:noFill/>
-        </p:spPr>
-        <p:txBody>
-          <a:bodyPr wrap="none" lIns="0" tIns="0" rIns="45720" bIns="0" anchor="ctr"/>
-          <a:lstStyle/>
-          <a:p>
-            <a:pPr algn="r"/>
-            <a:r>
-              <a:t>34a</a:t>
-            </a:r>
-            <a:endParaRPr sz="1000" b="1">
-              <a:solidFill>
-                <a:srgbClr val="7A8A6E"/>
-              </a:solidFill>
-              <a:latin typeface="Calibri"/>
-            </a:endParaRPr>
-          </a:p>
-        </p:txBody>
-      </p:sp>
-    </p:spTree>
-  </p:cSld>
-  <p:clrMapOvr>
-    <a:masterClrMapping/>
-  </p:clrMapOvr>
-</p:sld>
-</file>
-
-<file path=ppt/slides/slide16.xml><?xml version="1.0" encoding="utf-8"?>
-<p:sld xmlns:a="http://schemas.openxmlformats.org/drawingml/2006/main" xmlns:p="http://schemas.openxmlformats.org/presentationml/2006/main" xmlns:r="http://schemas.openxmlformats.org/officeDocument/2006/relationships">
-  <p:cSld>
-    <p:spTree>
-      <p:nvGrpSpPr>
-        <p:cNvPr id="1" name=""/>
-        <p:cNvGrpSpPr/>
-        <p:nvPr/>
-      </p:nvGrpSpPr>
-      <p:grpSpPr/>
-      <p:sp>
-        <p:nvSpPr>
-          <p:cNvPr id="2" name="Rectangle 1"/>
-          <p:cNvSpPr/>
-          <p:nvPr/>
-        </p:nvSpPr>
-        <p:spPr>
-          <a:xfrm>
-            <a:off x="0" y="0"/>
-            <a:ext cx="12192000" cy="6858000"/>
-          </a:xfrm>
-          <a:prstGeom prst="rect">
-            <a:avLst/>
-          </a:prstGeom>
-          <a:solidFill>
-            <a:srgbClr val="FFFFFF"/>
-          </a:solidFill>
-          <a:ln>
-            <a:noFill/>
-          </a:ln>
-          <a:effectLst/>
-        </p:spPr>
-        <p:style>
-          <a:lnRef idx="1">
-            <a:schemeClr val="accent1"/>
-          </a:lnRef>
-          <a:fillRef idx="3">
-            <a:schemeClr val="accent1"/>
-          </a:fillRef>
-          <a:effectRef idx="2">
-            <a:schemeClr val="accent1"/>
-          </a:effectRef>
-          <a:fontRef idx="minor">
-            <a:schemeClr val="lt1"/>
-          </a:fontRef>
-        </p:style>
-        <p:txBody>
-          <a:bodyPr rtlCol="0" anchor="ctr"/>
-          <a:lstStyle/>
-          <a:p>
-            <a:pPr algn="ctr"/>
-          </a:p>
-        </p:txBody>
-      </p:sp>
-      <p:sp>
-        <p:nvSpPr>
-          <p:cNvPr id="3" name="TextBox 2"/>
-          <p:cNvSpPr txBox="1"/>
-          <p:nvPr/>
-        </p:nvSpPr>
-        <p:spPr>
-          <a:xfrm>
-            <a:off x="822960" y="502920"/>
-            <a:ext cx="10515600" cy="822960"/>
-          </a:xfrm>
-          <a:prstGeom prst="rect">
-            <a:avLst/>
-          </a:prstGeom>
-          <a:noFill/>
-        </p:spPr>
-        <p:txBody>
-          <a:bodyPr wrap="square">
-            <a:spAutoFit/>
-          </a:bodyPr>
-          <a:lstStyle/>
-          <a:p>
-            <a:r>
-              <a:rPr sz="2800" b="1">
-                <a:solidFill>
-                  <a:srgbClr val="2C5F2D"/>
-                </a:solidFill>
-                <a:latin typeface="Cambria"/>
-              </a:rPr>
-              <a:t>The Take-Home Sheet — the Daily Rhythm</a:t>
-            </a:r>
-          </a:p>
-        </p:txBody>
-      </p:sp>
-      <p:pic>
-        <p:nvPicPr>
-          <p:cNvPr id="4" name="Picture 3" descr="s3_part1.png"/>
-          <p:cNvPicPr>
-            <a:picLocks noChangeAspect="1"/>
-          </p:cNvPicPr>
-          <p:nvPr/>
-        </p:nvPicPr>
-        <p:blipFill>
-          <a:blip r:embed="rId2"/>
-          <a:stretch>
-            <a:fillRect/>
-          </a:stretch>
-        </p:blipFill>
-        <p:spPr>
-          <a:xfrm>
-            <a:off x="1798167" y="1463040"/>
-            <a:ext cx="8595360" cy="4039819"/>
-          </a:xfrm>
-          <a:prstGeom prst="rect">
-            <a:avLst/>
-          </a:prstGeom>
-          <a:ln w="12700">
-            <a:solidFill>
-              <a:srgbClr val="C8C8C8"/>
-            </a:solidFill>
-          </a:ln>
-        </p:spPr>
-      </p:pic>
-      <p:sp>
-        <p:nvSpPr>
-          <p:cNvPr id="5" name="TextBox 4"/>
-          <p:cNvSpPr txBox="1"/>
-          <p:nvPr/>
-        </p:nvSpPr>
-        <p:spPr>
-          <a:xfrm>
-            <a:off x="822960" y="6355080"/>
-            <a:ext cx="10515600" cy="411480"/>
-          </a:xfrm>
-          <a:prstGeom prst="rect">
-            <a:avLst/>
-          </a:prstGeom>
-          <a:noFill/>
-        </p:spPr>
-        <p:txBody>
-          <a:bodyPr wrap="square">
-            <a:spAutoFit/>
-          </a:bodyPr>
-          <a:lstStyle/>
-          <a:p>
-            <a:r>
-              <a:rPr sz="1400" i="1">
-                <a:solidFill>
-                  <a:srgbClr val="595959"/>
-                </a:solidFill>
-                <a:latin typeface="Calibri"/>
-              </a:rPr>
-              <a:t>Handed out now — this is the sheet in your hands.</a:t>
-            </a:r>
-          </a:p>
-        </p:txBody>
-      </p:sp>
-      <p:sp>
-        <p:nvSpPr>
-          <p:cNvPr id="90" name="SlideNum"/>
-          <p:cNvSpPr txBox="1"/>
-          <p:nvPr/>
-        </p:nvSpPr>
-        <p:spPr>
-          <a:xfrm>
-            <a:off x="11384280" y="6446520"/>
-            <a:ext cx="640080" cy="292608"/>
-          </a:xfrm>
-          <a:prstGeom prst="rect">
-            <a:avLst/>
-          </a:prstGeom>
-          <a:noFill/>
-        </p:spPr>
-        <p:txBody>
-          <a:bodyPr wrap="none" lIns="0" tIns="0" rIns="45720" bIns="0" anchor="ctr"/>
-          <a:lstStyle/>
-          <a:p>
-            <a:pPr algn="r"/>
-            <a:r>
-              <a:t>44</a:t>
-            </a:r>
-            <a:endParaRPr sz="1000" b="1">
-              <a:solidFill>
-                <a:srgbClr val="7A8A6E"/>
-              </a:solidFill>
-              <a:latin typeface="Calibri"/>
-            </a:endParaRPr>
-          </a:p>
-        </p:txBody>
-      </p:sp>
-    </p:spTree>
-  </p:cSld>
-  <p:clrMapOvr>
-    <a:masterClrMapping/>
-  </p:clrMapOvr>
-</p:sld>
-</file>
-
-<file path=ppt/slides/slide17.xml><?xml version="1.0" encoding="utf-8"?>
-<p:sld xmlns:a="http://schemas.openxmlformats.org/drawingml/2006/main" xmlns:p="http://schemas.openxmlformats.org/presentationml/2006/main" xmlns:r="http://schemas.openxmlformats.org/officeDocument/2006/relationships">
-  <p:cSld>
-    <p:spTree>
-      <p:nvGrpSpPr>
-        <p:cNvPr id="1" name=""/>
-        <p:cNvGrpSpPr/>
-        <p:nvPr/>
-      </p:nvGrpSpPr>
-      <p:grpSpPr/>
-      <p:sp>
-        <p:nvSpPr>
-          <p:cNvPr id="2" name="Rectangle 1"/>
-          <p:cNvSpPr/>
-          <p:nvPr/>
-        </p:nvSpPr>
-        <p:spPr>
-          <a:xfrm>
-            <a:off x="0" y="0"/>
-            <a:ext cx="12192000" cy="6858000"/>
-          </a:xfrm>
-          <a:prstGeom prst="rect">
-            <a:avLst/>
-          </a:prstGeom>
-          <a:solidFill>
-            <a:srgbClr val="FFFFFF"/>
-          </a:solidFill>
-          <a:ln>
-            <a:noFill/>
-          </a:ln>
-          <a:effectLst/>
-        </p:spPr>
-        <p:style>
-          <a:lnRef idx="1">
-            <a:schemeClr val="accent1"/>
-          </a:lnRef>
-          <a:fillRef idx="3">
-            <a:schemeClr val="accent1"/>
-          </a:fillRef>
-          <a:effectRef idx="2">
-            <a:schemeClr val="accent1"/>
-          </a:effectRef>
-          <a:fontRef idx="minor">
-            <a:schemeClr val="lt1"/>
-          </a:fontRef>
-        </p:style>
-        <p:txBody>
-          <a:bodyPr rtlCol="0" anchor="ctr"/>
-          <a:lstStyle/>
-          <a:p>
-            <a:pPr algn="ctr"/>
-          </a:p>
-        </p:txBody>
-      </p:sp>
-      <p:sp>
-        <p:nvSpPr>
-          <p:cNvPr id="3" name="TextBox 2"/>
-          <p:cNvSpPr txBox="1"/>
-          <p:nvPr/>
-        </p:nvSpPr>
-        <p:spPr>
-          <a:xfrm>
-            <a:off x="822960" y="502920"/>
-            <a:ext cx="10515600" cy="822960"/>
-          </a:xfrm>
-          <a:prstGeom prst="rect">
-            <a:avLst/>
-          </a:prstGeom>
-          <a:noFill/>
-        </p:spPr>
-        <p:txBody>
-          <a:bodyPr wrap="square">
-            <a:spAutoFit/>
-          </a:bodyPr>
-          <a:lstStyle/>
-          <a:p>
-            <a:r>
-              <a:rPr sz="2800" b="1">
-                <a:solidFill>
-                  <a:srgbClr val="2C5F2D"/>
-                </a:solidFill>
-                <a:latin typeface="Cambria"/>
-              </a:rPr>
-              <a:t>The Take-Home Sheet — the Four Parts</a:t>
-            </a:r>
-          </a:p>
-        </p:txBody>
-      </p:sp>
-      <p:pic>
-        <p:nvPicPr>
-          <p:cNvPr id="4" name="Picture 3" descr="s3_part2.png"/>
-          <p:cNvPicPr>
-            <a:picLocks noChangeAspect="1"/>
-          </p:cNvPicPr>
-          <p:nvPr/>
-        </p:nvPicPr>
-        <p:blipFill>
-          <a:blip r:embed="rId2"/>
-          <a:stretch>
-            <a:fillRect/>
-          </a:stretch>
-        </p:blipFill>
-        <p:spPr>
-          <a:xfrm>
-            <a:off x="2066004" y="1463040"/>
-            <a:ext cx="8059687" cy="4709160"/>
-          </a:xfrm>
-          <a:prstGeom prst="rect">
-            <a:avLst/>
-          </a:prstGeom>
-          <a:ln w="12700">
-            <a:solidFill>
-              <a:srgbClr val="C8C8C8"/>
-            </a:solidFill>
-          </a:ln>
-        </p:spPr>
-      </p:pic>
-      <p:sp>
-        <p:nvSpPr>
-          <p:cNvPr id="5" name="TextBox 4"/>
-          <p:cNvSpPr txBox="1"/>
-          <p:nvPr/>
-        </p:nvSpPr>
-        <p:spPr>
-          <a:xfrm>
-            <a:off x="822960" y="6355080"/>
-            <a:ext cx="10515600" cy="411480"/>
-          </a:xfrm>
-          <a:prstGeom prst="rect">
-            <a:avLst/>
-          </a:prstGeom>
-          <a:noFill/>
-        </p:spPr>
-        <p:txBody>
-          <a:bodyPr wrap="square">
-            <a:spAutoFit/>
-          </a:bodyPr>
-          <a:lstStyle/>
-          <a:p>
-            <a:r>
-              <a:rPr sz="1400" i="1">
-                <a:solidFill>
-                  <a:srgbClr val="595959"/>
-                </a:solidFill>
-                <a:latin typeface="Calibri"/>
-              </a:rPr>
-              <a:t>One practice at a time — and a partner expecting you at the end of week one.</a:t>
-            </a:r>
-          </a:p>
-        </p:txBody>
-      </p:sp>
-      <p:sp>
-        <p:nvSpPr>
-          <p:cNvPr id="90" name="SlideNum"/>
-          <p:cNvSpPr txBox="1"/>
-          <p:nvPr/>
-        </p:nvSpPr>
-        <p:spPr>
-          <a:xfrm>
-            <a:off x="11384280" y="6446520"/>
-            <a:ext cx="640080" cy="292608"/>
-          </a:xfrm>
-          <a:prstGeom prst="rect">
-            <a:avLst/>
-          </a:prstGeom>
-          <a:noFill/>
-        </p:spPr>
-        <p:txBody>
-          <a:bodyPr wrap="none" lIns="0" tIns="0" rIns="45720" bIns="0" anchor="ctr"/>
-          <a:lstStyle/>
-          <a:p>
-            <a:pPr algn="r"/>
-            <a:r>
-              <a:t>44a</a:t>
             </a:r>
             <a:endParaRPr sz="1000" b="1">
               <a:solidFill>
@@ -7225,6 +7353,211 @@
 </file>
 
 <file path=ppt/slides/slide3.xml><?xml version="1.0" encoding="utf-8"?>
+<p:sld xmlns:a="http://schemas.openxmlformats.org/drawingml/2006/main" xmlns:p="http://schemas.openxmlformats.org/presentationml/2006/main" xmlns:r="http://schemas.openxmlformats.org/officeDocument/2006/relationships">
+  <p:cSld>
+    <p:spTree>
+      <p:nvGrpSpPr>
+        <p:cNvPr id="1" name=""/>
+        <p:cNvGrpSpPr/>
+        <p:nvPr/>
+      </p:nvGrpSpPr>
+      <p:grpSpPr/>
+      <p:sp>
+        <p:nvSpPr>
+          <p:cNvPr id="2" name="Rectangle 1"/>
+          <p:cNvSpPr/>
+          <p:nvPr/>
+        </p:nvSpPr>
+        <p:spPr>
+          <a:xfrm>
+            <a:off x="0" y="0"/>
+            <a:ext cx="12192000" cy="6858000"/>
+          </a:xfrm>
+          <a:prstGeom prst="rect">
+            <a:avLst/>
+          </a:prstGeom>
+          <a:solidFill>
+            <a:srgbClr val="FFFFFF"/>
+          </a:solidFill>
+          <a:ln>
+            <a:noFill/>
+          </a:ln>
+          <a:effectLst/>
+        </p:spPr>
+        <p:style>
+          <a:lnRef idx="1">
+            <a:schemeClr val="accent1"/>
+          </a:lnRef>
+          <a:fillRef idx="3">
+            <a:schemeClr val="accent1"/>
+          </a:fillRef>
+          <a:effectRef idx="2">
+            <a:schemeClr val="accent1"/>
+          </a:effectRef>
+          <a:fontRef idx="minor">
+            <a:schemeClr val="lt1"/>
+          </a:fontRef>
+        </p:style>
+        <p:txBody>
+          <a:bodyPr rtlCol="0" anchor="ctr"/>
+          <a:lstStyle/>
+          <a:p>
+            <a:pPr algn="ctr"/>
+          </a:p>
+        </p:txBody>
+      </p:sp>
+      <p:sp>
+        <p:nvSpPr>
+          <p:cNvPr id="3" name="TextBox 2"/>
+          <p:cNvSpPr txBox="1"/>
+          <p:nvPr/>
+        </p:nvSpPr>
+        <p:spPr>
+          <a:xfrm>
+            <a:off x="822960" y="502920"/>
+            <a:ext cx="10515600" cy="822960"/>
+          </a:xfrm>
+          <a:prstGeom prst="rect">
+            <a:avLst/>
+          </a:prstGeom>
+          <a:noFill/>
+        </p:spPr>
+        <p:txBody>
+          <a:bodyPr wrap="square">
+            <a:spAutoFit/>
+          </a:bodyPr>
+          <a:lstStyle/>
+          <a:p>
+            <a:r>
+              <a:rPr sz="2800" b="1">
+                <a:solidFill>
+                  <a:srgbClr val="2C5F2D"/>
+                </a:solidFill>
+                <a:latin typeface="Cambria"/>
+              </a:rPr>
+              <a:t>Where We Are — the Four Connects</a:t>
+            </a:r>
+          </a:p>
+        </p:txBody>
+      </p:sp>
+      <p:sp>
+        <p:nvSpPr>
+          <p:cNvPr id="5" name="TextBox 4"/>
+          <p:cNvSpPr txBox="1"/>
+          <p:nvPr/>
+        </p:nvSpPr>
+        <p:spPr>
+          <a:xfrm>
+            <a:off x="822960" y="5623560"/>
+            <a:ext cx="10515600" cy="914400"/>
+          </a:xfrm>
+          <a:prstGeom prst="rect">
+            <a:avLst/>
+          </a:prstGeom>
+          <a:noFill/>
+        </p:spPr>
+        <p:txBody>
+          <a:bodyPr wrap="square">
+            <a:spAutoFit/>
+          </a:bodyPr>
+          <a:lstStyle/>
+          <a:p>
+            <a:r>
+              <a:rPr sz="1800" b="0">
+                <a:solidFill>
+                  <a:srgbClr val="222B22"/>
+                </a:solidFill>
+                <a:latin typeface="Calibri"/>
+              </a:rPr>
+              <a:t>Session 3 crosses from the first box toward the second — </a:t>
+            </a:r>
+            <a:r>
+              <a:rPr sz="1800" b="1">
+                <a:solidFill>
+                  <a:srgbClr val="2C5F2D"/>
+                </a:solidFill>
+                <a:latin typeface="Calibri"/>
+              </a:rPr>
+              <a:t>Self opening toward Others</a:t>
+            </a:r>
+            <a:r>
+              <a:rPr sz="1800" b="0">
+                <a:solidFill>
+                  <a:srgbClr val="222B22"/>
+                </a:solidFill>
+                <a:latin typeface="Calibri"/>
+              </a:rPr>
+              <a:t>. Each connection makes the next one real (Matt. 22:37–40).</a:t>
+            </a:r>
+          </a:p>
+        </p:txBody>
+      </p:sp>
+      <p:sp>
+        <p:nvSpPr>
+          <p:cNvPr id="90" name="SlideNum"/>
+          <p:cNvSpPr txBox="1"/>
+          <p:nvPr/>
+        </p:nvSpPr>
+        <p:spPr>
+          <a:xfrm>
+            <a:off x="11384280" y="6446520"/>
+            <a:ext cx="640080" cy="292608"/>
+          </a:xfrm>
+          <a:prstGeom prst="rect">
+            <a:avLst/>
+          </a:prstGeom>
+          <a:noFill/>
+        </p:spPr>
+        <p:txBody>
+          <a:bodyPr wrap="none" lIns="0" tIns="0" rIns="45720" bIns="0" anchor="ctr"/>
+          <a:lstStyle/>
+          <a:p>
+            <a:pPr algn="r"/>
+            <a:r>
+              <a:t>34a</a:t>
+            </a:r>
+            <a:endParaRPr sz="1000" b="1">
+              <a:solidFill>
+                <a:srgbClr val="7A8A6E"/>
+              </a:solidFill>
+              <a:latin typeface="Calibri"/>
+            </a:endParaRPr>
+          </a:p>
+        </p:txBody>
+      </p:sp>
+      <p:pic>
+        <p:nvPicPr>
+          <p:cNvPr id="91" name="Picture 90" descr="four-connects.png"/>
+          <p:cNvPicPr>
+            <a:picLocks noChangeAspect="1"/>
+          </p:cNvPicPr>
+          <p:nvPr/>
+        </p:nvPicPr>
+        <p:blipFill>
+          <a:blip r:embed="rId4"/>
+          <a:stretch>
+            <a:fillRect/>
+          </a:stretch>
+        </p:blipFill>
+        <p:spPr>
+          <a:xfrm>
+            <a:off x="932688" y="1645920"/>
+            <a:ext cx="10332720" cy="3708663"/>
+          </a:xfrm>
+          <a:prstGeom prst="rect">
+            <a:avLst/>
+          </a:prstGeom>
+        </p:spPr>
+      </p:pic>
+    </p:spTree>
+  </p:cSld>
+  <p:clrMapOvr>
+    <a:masterClrMapping/>
+  </p:clrMapOvr>
+</p:sld>
+</file>
+
+<file path=ppt/slides/slide4.xml><?xml version="1.0" encoding="utf-8"?>
 <p:sld xmlns:a="http://schemas.openxmlformats.org/drawingml/2006/main" xmlns:r="http://schemas.openxmlformats.org/officeDocument/2006/relationships" xmlns:p="http://schemas.openxmlformats.org/presentationml/2006/main">
   <p:cSld>
     <p:spTree>
@@ -7675,7 +8008,7 @@
 </p:sld>
 </file>
 
-<file path=ppt/slides/slide4.xml><?xml version="1.0" encoding="utf-8"?>
+<file path=ppt/slides/slide5.xml><?xml version="1.0" encoding="utf-8"?>
 <p:sld xmlns:a="http://schemas.openxmlformats.org/drawingml/2006/main" xmlns:r="http://schemas.openxmlformats.org/officeDocument/2006/relationships" xmlns:p="http://schemas.openxmlformats.org/presentationml/2006/main">
   <p:cSld>
     <p:spTree>
@@ -8022,7 +8355,7 @@
 </p:sld>
 </file>
 
-<file path=ppt/slides/slide5.xml><?xml version="1.0" encoding="utf-8"?>
+<file path=ppt/slides/slide6.xml><?xml version="1.0" encoding="utf-8"?>
 <p:sld xmlns:a="http://schemas.openxmlformats.org/drawingml/2006/main" xmlns:r="http://schemas.openxmlformats.org/officeDocument/2006/relationships" xmlns:p="http://schemas.openxmlformats.org/presentationml/2006/main">
   <p:cSld>
     <p:spTree>
@@ -8305,308 +8638,6 @@
 </p:sld>
 </file>
 
-<file path=ppt/slides/slide6.xml><?xml version="1.0" encoding="utf-8"?>
-<p:sld xmlns:a="http://schemas.openxmlformats.org/drawingml/2006/main" xmlns:r="http://schemas.openxmlformats.org/officeDocument/2006/relationships" xmlns:p="http://schemas.openxmlformats.org/presentationml/2006/main">
-  <p:cSld>
-    <p:spTree>
-      <p:nvGrpSpPr>
-        <p:cNvPr id="1" name=""/>
-        <p:cNvGrpSpPr/>
-        <p:nvPr/>
-      </p:nvGrpSpPr>
-      <p:grpSpPr>
-        <a:xfrm>
-          <a:off x="0" y="0"/>
-          <a:ext cx="0" cy="0"/>
-          <a:chOff x="0" y="0"/>
-          <a:chExt cx="0" cy="0"/>
-        </a:xfrm>
-      </p:grpSpPr>
-      <p:sp>
-        <p:nvSpPr>
-          <p:cNvPr id="2" name="Rectangle 1"/>
-          <p:cNvSpPr/>
-          <p:nvPr/>
-        </p:nvSpPr>
-        <p:spPr>
-          <a:xfrm>
-            <a:off x="0" y="0"/>
-            <a:ext cx="12191695" cy="6858000"/>
-          </a:xfrm>
-          <a:prstGeom prst="rect">
-            <a:avLst/>
-          </a:prstGeom>
-          <a:solidFill>
-            <a:srgbClr val="FFFFFF"/>
-          </a:solidFill>
-          <a:ln>
-            <a:noFill/>
-          </a:ln>
-        </p:spPr>
-        <p:txBody>
-          <a:bodyPr/>
-          <a:lstStyle/>
-          <a:p>
-            <a:endParaRPr/>
-          </a:p>
-        </p:txBody>
-      </p:sp>
-      <p:sp>
-        <p:nvSpPr>
-          <p:cNvPr id="3" name="TextBox 2"/>
-          <p:cNvSpPr txBox="1"/>
-          <p:nvPr/>
-        </p:nvSpPr>
-        <p:spPr>
-          <a:xfrm>
-            <a:off x="822960" y="502920"/>
-            <a:ext cx="10515600" cy="822960"/>
-          </a:xfrm>
-          <a:prstGeom prst="rect">
-            <a:avLst/>
-          </a:prstGeom>
-          <a:noFill/>
-        </p:spPr>
-        <p:txBody>
-          <a:bodyPr wrap="square">
-            <a:spAutoFit/>
-          </a:bodyPr>
-          <a:lstStyle/>
-          <a:p>
-            <a:pPr algn="l">
-              <a:spcAft>
-                <a:spcPts val="600"/>
-              </a:spcAft>
-            </a:pPr>
-            <a:r>
-              <a:rPr sz="2800" b="1" i="0">
-                <a:solidFill>
-                  <a:srgbClr val="2C5F2D"/>
-                </a:solidFill>
-                <a:latin typeface="Cambria"/>
-              </a:rPr>
-              <a:t>Psalm 139 — Being Known</a:t>
-            </a:r>
-          </a:p>
-        </p:txBody>
-      </p:sp>
-      <p:sp>
-        <p:nvSpPr>
-          <p:cNvPr id="4" name="TextBox 4"/>
-          <p:cNvSpPr txBox="1"/>
-          <p:nvPr/>
-        </p:nvSpPr>
-        <p:spPr>
-          <a:xfrm>
-            <a:off x="822960" y="1600200"/>
-            <a:ext cx="5669280" cy="4572000"/>
-          </a:xfrm>
-          <a:prstGeom prst="rect">
-            <a:avLst/>
-          </a:prstGeom>
-          <a:noFill/>
-        </p:spPr>
-        <p:txBody>
-          <a:bodyPr wrap="square" lIns="91440" tIns="91440" rIns="91440" bIns="91440"/>
-          <a:lstStyle/>
-          <a:p>
-            <a:pPr marL="274320" indent="-274320">
-              <a:spcAft>
-                <a:spcPts val="800"/>
-              </a:spcAft>
-            </a:pPr>
-            <a:r>
-              <a:rPr sz="2000" b="1" i="0">
-                <a:solidFill>
-                  <a:srgbClr val="97BC62"/>
-                </a:solidFill>
-                <a:latin typeface="Calibri"/>
-              </a:rPr>
-              <a:t>•  </a:t>
-            </a:r>
-            <a:r>
-              <a:rPr sz="2000" b="0" i="0">
-                <a:solidFill>
-                  <a:srgbClr val="222B22"/>
-                </a:solidFill>
-                <a:latin typeface="Calibri"/>
-              </a:rPr>
-              <a:t>Psalm 139 is the psalm of being completely known by God — and the psalmist’s response is not panic. It is wonder</a:t>
-            </a:r>
-          </a:p>
-          <a:p>
-            <a:pPr marL="274320" indent="-274320">
-              <a:spcAft>
-                <a:spcPts val="800"/>
-              </a:spcAft>
-            </a:pPr>
-            <a:r>
-              <a:rPr sz="2000" b="1" i="0">
-                <a:solidFill>
-                  <a:srgbClr val="97BC62"/>
-                </a:solidFill>
-                <a:latin typeface="Calibri"/>
-              </a:rPr>
-              <a:t>•  </a:t>
-            </a:r>
-            <a:r>
-              <a:rPr sz="2000" b="0" i="0">
-                <a:solidFill>
-                  <a:srgbClr val="222B22"/>
-                </a:solidFill>
-                <a:latin typeface="Calibri"/>
-              </a:rPr>
-              <a:t>Most of us have parts we hope nobody has noticed. The psalmist invites God to look further</a:t>
-            </a:r>
-          </a:p>
-          <a:p>
-            <a:pPr marL="274320" indent="-274320">
-              <a:spcAft>
-                <a:spcPts val="800"/>
-              </a:spcAft>
-            </a:pPr>
-            <a:r>
-              <a:rPr sz="2000" b="1" i="0">
-                <a:solidFill>
-                  <a:srgbClr val="97BC62"/>
-                </a:solidFill>
-                <a:latin typeface="Calibri"/>
-              </a:rPr>
-              <a:t>•  </a:t>
-            </a:r>
-            <a:r>
-              <a:rPr sz="2000" b="0" i="0">
-                <a:solidFill>
-                  <a:srgbClr val="222B22"/>
-                </a:solidFill>
-                <a:latin typeface="Calibri"/>
-              </a:rPr>
-              <a:t>The opposite of being hidden is not being exposed — it is being seen and being safe at the same time. That is what the circle is</a:t>
-            </a:r>
-          </a:p>
-          <a:p>
-            <a:pPr marL="274320" indent="-274320">
-              <a:spcAft>
-                <a:spcPts val="800"/>
-              </a:spcAft>
-            </a:pPr>
-            <a:r>
-              <a:rPr sz="2000" b="1" i="0">
-                <a:solidFill>
-                  <a:srgbClr val="97BC62"/>
-                </a:solidFill>
-                <a:latin typeface="Calibri"/>
-              </a:rPr>
-              <a:t>•  </a:t>
-            </a:r>
-            <a:r>
-              <a:rPr sz="2000" b="0" i="0">
-                <a:solidFill>
-                  <a:srgbClr val="222B22"/>
-                </a:solidFill>
-                <a:latin typeface="Calibri"/>
-              </a:rPr>
-              <a:t>Tonight is a small practice of Psalm 139 — parents answer one question, with what they are willing to say</a:t>
-            </a:r>
-          </a:p>
-        </p:txBody>
-      </p:sp>
-      <p:sp>
-        <p:nvSpPr>
-          <p:cNvPr id="6" name="TextBox 6"/>
-          <p:cNvSpPr txBox="1"/>
-          <p:nvPr/>
-        </p:nvSpPr>
-        <p:spPr>
-          <a:xfrm>
-            <a:off x="6766560" y="1737360"/>
-            <a:ext cx="4663440" cy="2542032"/>
-          </a:xfrm>
-          <a:prstGeom prst="rect">
-            <a:avLst/>
-          </a:prstGeom>
-          <a:solidFill>
-            <a:srgbClr val="F1F6EC"/>
-          </a:solidFill>
-        </p:spPr>
-        <p:txBody>
-          <a:bodyPr wrap="square" lIns="91440" tIns="91440" rIns="91440" bIns="91440" anchor="ctr"/>
-          <a:lstStyle/>
-          <a:p>
-            <a:pPr>
-              <a:spcAft>
-                <a:spcPts val="900"/>
-              </a:spcAft>
-            </a:pPr>
-            <a:r>
-              <a:rPr sz="1200" b="1" i="0">
-                <a:solidFill>
-                  <a:srgbClr val="97BC62"/>
-                </a:solidFill>
-                <a:latin typeface="Calibri"/>
-              </a:rPr>
-              <a:t>PSALM 139:23–24</a:t>
-            </a:r>
-          </a:p>
-          <a:p>
-            <a:pPr>
-              <a:spcAft>
-                <a:spcPts val="600"/>
-              </a:spcAft>
-            </a:pPr>
-            <a:r>
-              <a:rPr sz="2400" b="0" i="1">
-                <a:solidFill>
-                  <a:srgbClr val="222B22"/>
-                </a:solidFill>
-                <a:latin typeface="Cambria"/>
-              </a:rPr>
-              <a:t>“Search me, O God, and know my heart! Try me and know my thoughts! And see if there be any grievous way in me, and lead me in the way everlasting!”</a:t>
-            </a:r>
-          </a:p>
-        </p:txBody>
-      </p:sp>
-      <p:sp>
-        <p:nvSpPr>
-          <p:cNvPr id="90" name="SlideNum"/>
-          <p:cNvSpPr txBox="1"/>
-          <p:nvPr/>
-        </p:nvSpPr>
-        <p:spPr>
-          <a:xfrm>
-            <a:off x="11384280" y="6446520"/>
-            <a:ext cx="640080" cy="292608"/>
-          </a:xfrm>
-          <a:prstGeom prst="rect">
-            <a:avLst/>
-          </a:prstGeom>
-          <a:noFill/>
-        </p:spPr>
-        <p:txBody>
-          <a:bodyPr wrap="none" lIns="0" tIns="0" rIns="45720" bIns="0" anchor="ctr"/>
-          <a:lstStyle/>
-          <a:p>
-            <a:pPr algn="r"/>
-            <a:r>
-              <a:t>38</a:t>
-            </a:r>
-            <a:endParaRPr sz="1000" b="1">
-              <a:solidFill>
-                <a:srgbClr val="7A8A6E"/>
-              </a:solidFill>
-              <a:latin typeface="Calibri"/>
-            </a:endParaRPr>
-          </a:p>
-        </p:txBody>
-      </p:sp>
-    </p:spTree>
-  </p:cSld>
-  <p:clrMapOvr>
-    <a:masterClrMapping/>
-  </p:clrMapOvr>
-</p:sld>
-</file>
-
 <file path=ppt/slides/slide7.xml><?xml version="1.0" encoding="utf-8"?>
 <p:sld xmlns:a="http://schemas.openxmlformats.org/drawingml/2006/main" xmlns:r="http://schemas.openxmlformats.org/officeDocument/2006/relationships" xmlns:p="http://schemas.openxmlformats.org/presentationml/2006/main">
   <p:cSld>
@@ -8687,7 +8718,7 @@
                 </a:solidFill>
                 <a:latin typeface="Cambria"/>
               </a:rPr>
-              <a:t>Companion Demo Story</a:t>
+              <a:t>Psalm 139 — Being Known</a:t>
             </a:r>
           </a:p>
         </p:txBody>
@@ -8700,8 +8731,8 @@
         </p:nvSpPr>
         <p:spPr>
           <a:xfrm>
-            <a:off x="822960" y="1554480"/>
-            <a:ext cx="10515600" cy="4892040"/>
+            <a:off x="822960" y="1600200"/>
+            <a:ext cx="5669280" cy="4572000"/>
           </a:xfrm>
           <a:prstGeom prst="rect">
             <a:avLst/>
@@ -8714,11 +8745,11 @@
           <a:p>
             <a:pPr marL="274320" indent="-274320">
               <a:spcAft>
-                <a:spcPts val="900"/>
+                <a:spcPts val="800"/>
               </a:spcAft>
             </a:pPr>
             <a:r>
-              <a:rPr sz="2400" b="1" i="0" dirty="0">
+              <a:rPr sz="2000" b="1" i="0">
                 <a:solidFill>
                   <a:srgbClr val="97BC62"/>
                 </a:solidFill>
@@ -8727,131 +8758,143 @@
               <a:t>•  </a:t>
             </a:r>
             <a:r>
-              <a:rPr sz="2400" b="0" i="0" dirty="0">
+              <a:rPr sz="2000" b="0" i="0">
                 <a:solidFill>
                   <a:srgbClr val="222B22"/>
                 </a:solidFill>
                 <a:latin typeface="Calibri"/>
               </a:rPr>
-              <a:t>The Lead Companion tells their own story — five minutes, modeling the form</a:t>
+              <a:t>Psalm 139 is the psalm of being completely known by God — and the psalmist’s response is not panic. It is wonder</a:t>
             </a:r>
           </a:p>
           <a:p>
             <a:pPr marL="274320" indent="-274320">
+              <a:spcAft>
+                <a:spcPts val="800"/>
+              </a:spcAft>
+            </a:pPr>
+            <a:r>
+              <a:rPr sz="2000" b="1" i="0">
+                <a:solidFill>
+                  <a:srgbClr val="97BC62"/>
+                </a:solidFill>
+                <a:latin typeface="Calibri"/>
+              </a:rPr>
+              <a:t>•  </a:t>
+            </a:r>
+            <a:r>
+              <a:rPr sz="2000" b="0" i="0">
+                <a:solidFill>
+                  <a:srgbClr val="222B22"/>
+                </a:solidFill>
+                <a:latin typeface="Calibri"/>
+              </a:rPr>
+              <a:t>Most of us have parts we hope nobody has noticed. The psalmist invites God to look further</a:t>
+            </a:r>
+          </a:p>
+          <a:p>
+            <a:pPr marL="274320" indent="-274320">
+              <a:spcAft>
+                <a:spcPts val="800"/>
+              </a:spcAft>
+            </a:pPr>
+            <a:r>
+              <a:rPr sz="2000" b="1" i="0">
+                <a:solidFill>
+                  <a:srgbClr val="97BC62"/>
+                </a:solidFill>
+                <a:latin typeface="Calibri"/>
+              </a:rPr>
+              <a:t>•  </a:t>
+            </a:r>
+            <a:r>
+              <a:rPr sz="2000" b="0" i="0">
+                <a:solidFill>
+                  <a:srgbClr val="222B22"/>
+                </a:solidFill>
+                <a:latin typeface="Calibri"/>
+              </a:rPr>
+              <a:t>The opposite of being hidden is not being exposed — it is being seen and being safe at the same time. That is what the circle is</a:t>
+            </a:r>
+          </a:p>
+          <a:p>
+            <a:pPr marL="274320" indent="-274320">
+              <a:spcAft>
+                <a:spcPts val="800"/>
+              </a:spcAft>
+            </a:pPr>
+            <a:r>
+              <a:rPr sz="2000" b="1" i="0">
+                <a:solidFill>
+                  <a:srgbClr val="97BC62"/>
+                </a:solidFill>
+                <a:latin typeface="Calibri"/>
+              </a:rPr>
+              <a:t>•  </a:t>
+            </a:r>
+            <a:r>
+              <a:rPr sz="2000" b="0" i="0">
+                <a:solidFill>
+                  <a:srgbClr val="222B22"/>
+                </a:solidFill>
+                <a:latin typeface="Calibri"/>
+              </a:rPr>
+              <a:t>Tonight is a small practice of Psalm 139 — parents answer one question, with what they are willing to say</a:t>
+            </a:r>
+          </a:p>
+        </p:txBody>
+      </p:sp>
+      <p:sp>
+        <p:nvSpPr>
+          <p:cNvPr id="6" name="TextBox 6"/>
+          <p:cNvSpPr txBox="1"/>
+          <p:nvPr/>
+        </p:nvSpPr>
+        <p:spPr>
+          <a:xfrm>
+            <a:off x="6766560" y="1737360"/>
+            <a:ext cx="4663440" cy="2542032"/>
+          </a:xfrm>
+          <a:prstGeom prst="rect">
+            <a:avLst/>
+          </a:prstGeom>
+          <a:solidFill>
+            <a:srgbClr val="F1F6EC"/>
+          </a:solidFill>
+        </p:spPr>
+        <p:txBody>
+          <a:bodyPr wrap="square" lIns="91440" tIns="91440" rIns="91440" bIns="91440" anchor="ctr"/>
+          <a:lstStyle/>
+          <a:p>
+            <a:pPr>
               <a:spcAft>
                 <a:spcPts val="900"/>
               </a:spcAft>
             </a:pPr>
             <a:r>
-              <a:rPr sz="2400" b="1" i="0" dirty="0">
+              <a:rPr sz="1200" b="1" i="0">
                 <a:solidFill>
                   <a:srgbClr val="97BC62"/>
                 </a:solidFill>
                 <a:latin typeface="Calibri"/>
               </a:rPr>
-              <a:t>•  </a:t>
-            </a:r>
-            <a:r>
-              <a:rPr sz="2400" b="0" i="0" dirty="0">
-                <a:solidFill>
-                  <a:srgbClr val="222B22"/>
-                </a:solidFill>
-                <a:latin typeface="Calibri"/>
-              </a:rPr>
-              <a:t>The one question: “tell the story of how you got here — today, as you are. What has shaped you into who you are today?”</a:t>
-            </a:r>
-          </a:p>
-          <a:p>
-            <a:pPr marL="274320" indent="-274320">
+              <a:t>PSALM 139:23–24</a:t>
+            </a:r>
+          </a:p>
+          <a:p>
+            <a:pPr>
               <a:spcAft>
-                <a:spcPts val="900"/>
+                <a:spcPts val="600"/>
               </a:spcAft>
             </a:pPr>
             <a:r>
-              <a:rPr sz="2400" b="1" i="0" dirty="0">
-                <a:solidFill>
-                  <a:srgbClr val="97BC62"/>
-                </a:solidFill>
-                <a:latin typeface="Calibri"/>
-              </a:rPr>
-              <a:t>•  </a:t>
-            </a:r>
-            <a:r>
-              <a:rPr sz="2400" b="0" i="0" dirty="0">
+              <a:rPr sz="2400" b="0" i="1">
                 <a:solidFill>
                   <a:srgbClr val="222B22"/>
                 </a:solidFill>
-                <a:latin typeface="Calibri"/>
-              </a:rPr>
-              <a:t>Be specific — “I grew up in a house where </a:t>
-            </a:r>
-            <a:r>
-              <a:rPr lang="en-US" sz="2400" b="0" i="0" dirty="0">
-                <a:solidFill>
-                  <a:srgbClr val="222B22"/>
-                </a:solidFill>
-                <a:latin typeface="Calibri"/>
-              </a:rPr>
-              <a:t>we didn’t do anger, it wasn’t accepted</a:t>
-            </a:r>
-            <a:r>
-              <a:rPr sz="2400" b="0" i="0" dirty="0">
-                <a:solidFill>
-                  <a:srgbClr val="222B22"/>
-                </a:solidFill>
-                <a:latin typeface="Calibri"/>
-              </a:rPr>
-              <a:t>”</a:t>
-            </a:r>
-          </a:p>
-          <a:p>
-            <a:pPr marL="274320" indent="-274320">
-              <a:spcAft>
-                <a:spcPts val="900"/>
-              </a:spcAft>
-            </a:pPr>
-            <a:r>
-              <a:rPr sz="2400" b="1" i="0" dirty="0">
-                <a:solidFill>
-                  <a:srgbClr val="97BC62"/>
-                </a:solidFill>
-                <a:latin typeface="Calibri"/>
-              </a:rPr>
-              <a:t>•  </a:t>
-            </a:r>
-            <a:r>
-              <a:rPr sz="2400" b="0" i="0" dirty="0">
-                <a:solidFill>
-                  <a:srgbClr val="222B22"/>
-                </a:solidFill>
-                <a:latin typeface="Calibri"/>
-              </a:rPr>
-              <a:t>Not the hero, not the victim — what happened, and where you see God in it now, looking back</a:t>
-            </a:r>
-          </a:p>
-          <a:p>
-            <a:pPr marL="274320" indent="-274320">
-              <a:spcAft>
-                <a:spcPts val="900"/>
-              </a:spcAft>
-            </a:pPr>
-            <a:r>
-              <a:rPr sz="2400" b="1" i="0" dirty="0">
-                <a:solidFill>
-                  <a:srgbClr val="97BC62"/>
-                </a:solidFill>
-                <a:latin typeface="Calibri"/>
-              </a:rPr>
-              <a:t>•  </a:t>
-            </a:r>
-            <a:r>
-              <a:rPr sz="2400" b="0" i="0" dirty="0">
-                <a:solidFill>
-                  <a:srgbClr val="222B22"/>
-                </a:solidFill>
-                <a:latin typeface="Calibri"/>
-              </a:rPr>
-              <a:t>“That is the form. Parents, you’ll do this in your pair tonight. Teens, this is yours next week. Yours doesn’t have to look like mine.”</a:t>
+                <a:latin typeface="Cambria"/>
+              </a:rPr>
+              <a:t>“Search me, O God, and know my heart! Try me and know my thoughts! And see if there be any grievous way in me, and lead me in the way everlasting!”</a:t>
             </a:r>
           </a:p>
         </p:txBody>
@@ -8878,7 +8921,7 @@
           <a:p>
             <a:pPr algn="r"/>
             <a:r>
-              <a:t>39</a:t>
+              <a:t>38</a:t>
             </a:r>
             <a:endParaRPr sz="1000" b="1">
               <a:solidFill>
@@ -8977,7 +9020,7 @@
                 </a:solidFill>
                 <a:latin typeface="Cambria"/>
               </a:rPr>
-              <a:t>Bridge to the pairs</a:t>
+              <a:t>Companion Demo Story</a:t>
             </a:r>
           </a:p>
         </p:txBody>
@@ -9002,88 +9045,13 @@
           <a:bodyPr wrap="square" lIns="91440" tIns="91440" rIns="91440" bIns="91440"/>
           <a:lstStyle/>
           <a:p>
-            <a:pPr marL="342900" indent="-342900">
-              <a:spcAft>
-                <a:spcPts val="900"/>
-              </a:spcAft>
-            </a:pPr>
-            <a:r>
-              <a:rPr sz="2200" b="1" i="0" dirty="0">
-                <a:solidFill>
-                  <a:srgbClr val="97BC62"/>
-                </a:solidFill>
-                <a:latin typeface="Calibri"/>
-              </a:rPr>
-              <a:t>1   </a:t>
-            </a:r>
-            <a:r>
-              <a:rPr sz="2800" b="0" i="0" dirty="0">
-                <a:solidFill>
-                  <a:srgbClr val="222B22"/>
-                </a:solidFill>
-                <a:latin typeface="Calibri"/>
-              </a:rPr>
-              <a:t>One question — how you got here, and what has shaped you. The depth is yours to choose</a:t>
-            </a:r>
-          </a:p>
-          <a:p>
-            <a:pPr marL="342900" indent="-342900">
-              <a:spcAft>
-                <a:spcPts val="900"/>
-              </a:spcAft>
-            </a:pPr>
-            <a:r>
-              <a:rPr sz="2800" b="1" i="0" dirty="0">
-                <a:solidFill>
-                  <a:srgbClr val="97BC62"/>
-                </a:solidFill>
-                <a:latin typeface="Calibri"/>
-              </a:rPr>
-              <a:t>2   </a:t>
-            </a:r>
-            <a:r>
-              <a:rPr sz="2800" b="0" i="0" dirty="0">
-                <a:solidFill>
-                  <a:srgbClr val="222B22"/>
-                </a:solidFill>
-                <a:latin typeface="Calibri"/>
-              </a:rPr>
-              <a:t>Listening — do not fix. Do not advise. Do not say “that happened to me too.” Receive, then bless</a:t>
-            </a:r>
-          </a:p>
-          <a:p>
-            <a:pPr marL="342900" indent="-342900">
-              <a:spcAft>
-                <a:spcPts val="900"/>
-              </a:spcAft>
-            </a:pPr>
-            <a:r>
-              <a:rPr sz="2800" b="1" i="0" dirty="0">
-                <a:solidFill>
-                  <a:srgbClr val="97BC62"/>
-                </a:solidFill>
-                <a:latin typeface="Calibri"/>
-              </a:rPr>
-              <a:t>3   </a:t>
-            </a:r>
-            <a:r>
-              <a:rPr sz="2800" b="0" i="0" dirty="0">
-                <a:solidFill>
-                  <a:srgbClr val="222B22"/>
-                </a:solidFill>
-                <a:latin typeface="Calibri"/>
-              </a:rPr>
-              <a:t>Nothing leaves your circle. “Not a phrase, not a name, not a story.”</a:t>
-            </a:r>
-          </a:p>
-          <a:p>
             <a:pPr marL="274320" indent="-274320">
               <a:spcAft>
                 <a:spcPts val="900"/>
               </a:spcAft>
             </a:pPr>
             <a:r>
-              <a:rPr sz="2800" b="1" i="0" dirty="0">
+              <a:rPr sz="2400" b="1" i="0" dirty="0">
                 <a:solidFill>
                   <a:srgbClr val="97BC62"/>
                 </a:solidFill>
@@ -9092,13 +9060,13 @@
               <a:t>•  </a:t>
             </a:r>
             <a:r>
-              <a:rPr sz="2800" b="0" i="0" dirty="0">
+              <a:rPr sz="2400" b="0" i="0" dirty="0">
                 <a:solidFill>
                   <a:srgbClr val="222B22"/>
                 </a:solidFill>
                 <a:latin typeface="Calibri"/>
               </a:rPr>
-              <a:t>Teens — your own storytelling card goes home tonight; next Wednesday is your night</a:t>
+              <a:t>The Lead Companion tells their own story — five minutes, modeling the form</a:t>
             </a:r>
           </a:p>
           <a:p>
@@ -9108,7 +9076,7 @@
               </a:spcAft>
             </a:pPr>
             <a:r>
-              <a:rPr sz="2800" b="1" i="0" dirty="0">
+              <a:rPr sz="2400" b="1" i="0" dirty="0">
                 <a:solidFill>
                   <a:srgbClr val="97BC62"/>
                 </a:solidFill>
@@ -9117,13 +9085,106 @@
               <a:t>•  </a:t>
             </a:r>
             <a:r>
-              <a:rPr sz="2800" b="0" i="0" dirty="0">
+              <a:rPr sz="2400" b="0" i="0" dirty="0">
                 <a:solidFill>
                   <a:srgbClr val="222B22"/>
                 </a:solidFill>
                 <a:latin typeface="Calibri"/>
               </a:rPr>
-              <a:t>Two or three families together, your own family stays with you — thirty-five minutes</a:t>
+              <a:t>The one question: “tell the story of how you got here — today, as you are. What has shaped you into who you are today?”</a:t>
+            </a:r>
+          </a:p>
+          <a:p>
+            <a:pPr marL="274320" indent="-274320">
+              <a:spcAft>
+                <a:spcPts val="900"/>
+              </a:spcAft>
+            </a:pPr>
+            <a:r>
+              <a:rPr sz="2400" b="1" i="0" dirty="0">
+                <a:solidFill>
+                  <a:srgbClr val="97BC62"/>
+                </a:solidFill>
+                <a:latin typeface="Calibri"/>
+              </a:rPr>
+              <a:t>•  </a:t>
+            </a:r>
+            <a:r>
+              <a:rPr sz="2400" b="0" i="0" dirty="0">
+                <a:solidFill>
+                  <a:srgbClr val="222B22"/>
+                </a:solidFill>
+                <a:latin typeface="Calibri"/>
+              </a:rPr>
+              <a:t>Be specific — “I grew up in a house where </a:t>
+            </a:r>
+            <a:r>
+              <a:rPr lang="en-US" sz="2400" b="0" i="0" dirty="0">
+                <a:solidFill>
+                  <a:srgbClr val="222B22"/>
+                </a:solidFill>
+                <a:latin typeface="Calibri"/>
+              </a:rPr>
+              <a:t>we didn’t do anger, it wasn’t accepted</a:t>
+            </a:r>
+            <a:r>
+              <a:rPr sz="2400" b="0" i="0" dirty="0">
+                <a:solidFill>
+                  <a:srgbClr val="222B22"/>
+                </a:solidFill>
+                <a:latin typeface="Calibri"/>
+              </a:rPr>
+              <a:t>”</a:t>
+            </a:r>
+          </a:p>
+          <a:p>
+            <a:pPr marL="274320" indent="-274320">
+              <a:spcAft>
+                <a:spcPts val="900"/>
+              </a:spcAft>
+            </a:pPr>
+            <a:r>
+              <a:rPr sz="2400" b="1" i="0" dirty="0">
+                <a:solidFill>
+                  <a:srgbClr val="97BC62"/>
+                </a:solidFill>
+                <a:latin typeface="Calibri"/>
+              </a:rPr>
+              <a:t>•  </a:t>
+            </a:r>
+            <a:r>
+              <a:rPr sz="2400" b="0" i="0" dirty="0">
+                <a:solidFill>
+                  <a:srgbClr val="222B22"/>
+                </a:solidFill>
+                <a:latin typeface="Calibri"/>
+              </a:rPr>
+              <a:t>Not the hero, not the victim — what happened, and where you see God in it now, looking back</a:t>
+            </a:r>
+          </a:p>
+          <a:p>
+            <a:pPr marL="274320" indent="-274320">
+              <a:spcAft>
+                <a:spcPts val="900"/>
+              </a:spcAft>
+            </a:pPr>
+            <a:r>
+              <a:rPr sz="2400" b="1" i="0" dirty="0">
+                <a:solidFill>
+                  <a:srgbClr val="97BC62"/>
+                </a:solidFill>
+                <a:latin typeface="Calibri"/>
+              </a:rPr>
+              <a:t>•  </a:t>
+            </a:r>
+            <a:r>
+              <a:rPr sz="2400" b="0" i="0" dirty="0">
+                <a:solidFill>
+                  <a:srgbClr val="222B22"/>
+                </a:solidFill>
+                <a:latin typeface="Calibri"/>
+              </a:rPr>
+              <a:t>“That is the form. Parents, you’ll do this in your pair tonight. Teens, this is yours next week. Yours doesn’t have to look like mine.”</a:t>
             </a:r>
           </a:p>
         </p:txBody>
@@ -9150,7 +9211,7 @@
           <a:p>
             <a:pPr algn="r"/>
             <a:r>
-              <a:t>40</a:t>
+              <a:t>39</a:t>
             </a:r>
             <a:endParaRPr sz="1000" b="1">
               <a:solidFill>
@@ -9249,7 +9310,7 @@
                 </a:solidFill>
                 <a:latin typeface="Cambria"/>
               </a:rPr>
-              <a:t>Stories in pairs</a:t>
+              <a:t>Bridge to the pairs</a:t>
             </a:r>
           </a:p>
         </p:txBody>
@@ -9263,7 +9324,7 @@
         <p:spPr>
           <a:xfrm>
             <a:off x="822960" y="1554480"/>
-            <a:ext cx="6675120" cy="4892040"/>
+            <a:ext cx="10515600" cy="4892040"/>
           </a:xfrm>
           <a:prstGeom prst="rect">
             <a:avLst/>
@@ -9274,13 +9335,88 @@
           <a:bodyPr wrap="square" lIns="91440" tIns="91440" rIns="91440" bIns="91440"/>
           <a:lstStyle/>
           <a:p>
+            <a:pPr marL="342900" indent="-342900">
+              <a:spcAft>
+                <a:spcPts val="900"/>
+              </a:spcAft>
+            </a:pPr>
+            <a:r>
+              <a:rPr sz="2200" b="1" i="0" dirty="0">
+                <a:solidFill>
+                  <a:srgbClr val="97BC62"/>
+                </a:solidFill>
+                <a:latin typeface="Calibri"/>
+              </a:rPr>
+              <a:t>1   </a:t>
+            </a:r>
+            <a:r>
+              <a:rPr sz="2800" b="0" i="0" dirty="0">
+                <a:solidFill>
+                  <a:srgbClr val="222B22"/>
+                </a:solidFill>
+                <a:latin typeface="Calibri"/>
+              </a:rPr>
+              <a:t>One question — how you got here, and what has shaped you. The depth is yours to choose</a:t>
+            </a:r>
+          </a:p>
+          <a:p>
+            <a:pPr marL="342900" indent="-342900">
+              <a:spcAft>
+                <a:spcPts val="900"/>
+              </a:spcAft>
+            </a:pPr>
+            <a:r>
+              <a:rPr sz="2800" b="1" i="0" dirty="0">
+                <a:solidFill>
+                  <a:srgbClr val="97BC62"/>
+                </a:solidFill>
+                <a:latin typeface="Calibri"/>
+              </a:rPr>
+              <a:t>2   </a:t>
+            </a:r>
+            <a:r>
+              <a:rPr sz="2800" b="0" i="0" dirty="0">
+                <a:solidFill>
+                  <a:srgbClr val="222B22"/>
+                </a:solidFill>
+                <a:latin typeface="Calibri"/>
+              </a:rPr>
+              <a:t>Listening — do not fix. Do not advise. Do not say “that happened to me too.” Receive, then bless</a:t>
+            </a:r>
+          </a:p>
+          <a:p>
+            <a:pPr marL="342900" indent="-342900">
+              <a:spcAft>
+                <a:spcPts val="900"/>
+              </a:spcAft>
+            </a:pPr>
+            <a:r>
+              <a:rPr sz="2800" b="1" i="0" dirty="0">
+                <a:solidFill>
+                  <a:srgbClr val="97BC62"/>
+                </a:solidFill>
+                <a:latin typeface="Calibri"/>
+              </a:rPr>
+              <a:t>3   </a:t>
+            </a:r>
+            <a:r>
+              <a:rPr sz="2800" b="0" i="0" dirty="0">
+                <a:solidFill>
+                  <a:srgbClr val="222B22"/>
+                </a:solidFill>
+                <a:latin typeface="Calibri"/>
+              </a:rPr>
+              <a:t>Nothing leaves your circle. “Not a phrase, not a name, not a story.”</a:t>
+            </a:r>
+          </a:p>
+          <a:p>
             <a:pPr marL="274320" indent="-274320">
               <a:spcAft>
-                <a:spcPts val="750"/>
+                <a:spcPts val="900"/>
               </a:spcAft>
             </a:pPr>
             <a:r>
-              <a:rPr sz="2000" b="1" i="0">
+              <a:rPr sz="2800" b="1" i="0" dirty="0">
                 <a:solidFill>
                   <a:srgbClr val="97BC62"/>
                 </a:solidFill>
@@ -9289,138 +9425,38 @@
               <a:t>•  </a:t>
             </a:r>
             <a:r>
-              <a:rPr sz="2000" b="0" i="0">
+              <a:rPr sz="2800" b="0" i="0" dirty="0">
                 <a:solidFill>
                   <a:srgbClr val="222B22"/>
                 </a:solidFill>
                 <a:latin typeface="Calibri"/>
               </a:rPr>
-              <a:t>Tonight’s tellers: the parents — plus any Companion-in-Formation. The leadsanion goes first</a:t>
-            </a:r>
-          </a:p>
-          <a:p>
-            <a:pPr marL="342900" indent="-342900">
+              <a:t>Teens — your own storytelling card goes home tonight; next Wednesday is your night</a:t>
+            </a:r>
+          </a:p>
+          <a:p>
+            <a:pPr marL="274320" indent="-274320">
               <a:spcAft>
-                <a:spcPts val="750"/>
+                <a:spcPts val="900"/>
               </a:spcAft>
             </a:pPr>
             <a:r>
-              <a:rPr sz="2000" b="1" i="0">
+              <a:rPr sz="2800" b="1" i="0" dirty="0">
                 <a:solidFill>
                   <a:srgbClr val="97BC62"/>
                 </a:solidFill>
                 <a:latin typeface="Calibri"/>
               </a:rPr>
-              <a:t>1   </a:t>
-            </a:r>
-            <a:r>
-              <a:rPr sz="2000" b="0" i="0">
+              <a:t>•  </a:t>
+            </a:r>
+            <a:r>
+              <a:rPr sz="2800" b="0" i="0" dirty="0">
                 <a:solidFill>
                   <a:srgbClr val="222B22"/>
                 </a:solidFill>
                 <a:latin typeface="Calibri"/>
               </a:rPr>
-              <a:t>Story — 5–7 minutes. The teller speaks; nobody interrupts, even the silences</a:t>
-            </a:r>
-          </a:p>
-          <a:p>
-            <a:pPr marL="342900" indent="-342900">
-              <a:spcAft>
-                <a:spcPts val="750"/>
-              </a:spcAft>
-            </a:pPr>
-            <a:r>
-              <a:rPr sz="2000" b="1" i="0">
-                <a:solidFill>
-                  <a:srgbClr val="97BC62"/>
-                </a:solidFill>
-                <a:latin typeface="Calibri"/>
-              </a:rPr>
-              <a:t>2   </a:t>
-            </a:r>
-            <a:r>
-              <a:rPr sz="2000" b="0" i="0">
-                <a:solidFill>
-                  <a:srgbClr val="222B22"/>
-                </a:solidFill>
-                <a:latin typeface="Calibri"/>
-              </a:rPr>
-              <a:t>Silence — ten seconds</a:t>
-            </a:r>
-          </a:p>
-          <a:p>
-            <a:pPr marL="342900" indent="-342900">
-              <a:spcAft>
-                <a:spcPts val="750"/>
-              </a:spcAft>
-            </a:pPr>
-            <a:r>
-              <a:rPr sz="2000" b="1" i="0">
-                <a:solidFill>
-                  <a:srgbClr val="97BC62"/>
-                </a:solidFill>
-                <a:latin typeface="Calibri"/>
-              </a:rPr>
-              <a:t>3   </a:t>
-            </a:r>
-            <a:r>
-              <a:rPr sz="2000" b="0" i="0">
-                <a:solidFill>
-                  <a:srgbClr val="222B22"/>
-                </a:solidFill>
-                <a:latin typeface="Calibri"/>
-              </a:rPr>
-              <a:t>Blessing round — one or two sentences each, teens included: “What I want to bless about your story is...”</a:t>
-            </a:r>
-          </a:p>
-          <a:p>
-            <a:pPr marL="274320" indent="-274320">
-              <a:spcAft>
-                <a:spcPts val="750"/>
-              </a:spcAft>
-            </a:pPr>
-            <a:r>
-              <a:rPr sz="2000" b="1" i="0">
-                <a:solidFill>
-                  <a:srgbClr val="97BC62"/>
-                </a:solidFill>
-                <a:latin typeface="Calibri"/>
-              </a:rPr>
-              <a:t>•  </a:t>
-            </a:r>
-            <a:r>
-              <a:rPr sz="2000" b="0" i="0">
-                <a:solidFill>
-                  <a:srgbClr val="222B22"/>
-                </a:solidFill>
-                <a:latin typeface="Calibri"/>
-              </a:rPr>
-              <a:t>“Inside this pair, what is said stays in this pair. Not even back to the main room, and not back up in the car this week.”</a:t>
-            </a:r>
-          </a:p>
-          <a:p>
-            <a:pPr marL="274320" indent="-274320">
-              <a:spcAft>
-                <a:spcPts val="750"/>
-              </a:spcAft>
-            </a:pPr>
-            <a:r>
-              <a:rPr sz="2000" b="1" i="0">
-                <a:solidFill>
-                  <a:srgbClr val="97BC62"/>
-                </a:solidFill>
-                <a:latin typeface="Calibri"/>
-              </a:rPr>
-              <a:t>•  </a:t>
-            </a:r>
-            <a:r>
-              <a:rPr sz="2000" b="0" i="0">
-                <a:solidFill>
-                  <a:srgbClr val="222B22"/>
-                </a:solidFill>
-                <a:latin typeface="Calibri"/>
-              </a:rPr>
-              <a:t>“When someone is telling their story... we are looking at them. We are receiving. That’s the practice.”</a:t>
+              <a:t>Two or three families together, your own family stays with you — thirty-five minutes</a:t>
             </a:r>
           </a:p>
         </p:txBody>
@@ -9447,7 +9483,7 @@
           <a:p>
             <a:pPr algn="r"/>
             <a:r>
-              <a:t>41</a:t>
+              <a:t>40</a:t>
             </a:r>
             <a:endParaRPr sz="1000" b="1">
               <a:solidFill>
@@ -9458,42 +9494,6 @@
           </a:p>
         </p:txBody>
       </p:sp>
-      <p:pic>
-        <p:nvPicPr>
-          <p:cNvPr id="30" name="Picture 30" descr="stepping stones across a stream"/>
-          <p:cNvPicPr>
-            <a:picLocks noChangeAspect="1"/>
-          </p:cNvPicPr>
-          <p:nvPr/>
-        </p:nvPicPr>
-        <p:blipFill>
-          <a:blip r:embed="rId3"/>
-          <a:stretch>
-            <a:fillRect/>
-          </a:stretch>
-        </p:blipFill>
-        <p:spPr>
-          <a:xfrm>
-            <a:off x="7696962" y="1463040"/>
-            <a:ext cx="3669030" cy="4892040"/>
-          </a:xfrm>
-          <a:prstGeom prst="rect">
-            <a:avLst/>
-          </a:prstGeom>
-          <a:ln w="76200">
-            <a:solidFill>
-              <a:srgbClr val="FFFFFF"/>
-            </a:solidFill>
-          </a:ln>
-          <a:effectLst>
-            <a:outerShdw blurRad="63500" dist="25400" dir="5400000" rotWithShape="0">
-              <a:srgbClr val="000000">
-                <a:alpha val="35000"/>
-              </a:srgbClr>
-            </a:outerShdw>
-          </a:effectLst>
-        </p:spPr>
-      </p:pic>
     </p:spTree>
   </p:cSld>
   <p:clrMapOvr>

--- a/_implementation-notes/evening-series/FotH Evening Session 3 Slides DRAFT v1.pptx
+++ b/_implementation-notes/evening-series/FotH Evening Session 3 Slides DRAFT v1.pptx
@@ -7534,7 +7534,7 @@
           <p:nvPr/>
         </p:nvPicPr>
         <p:blipFill>
-          <a:blip r:embed="rId4"/>
+          <a:blip r:embed="rId5"/>
           <a:stretch>
             <a:fillRect/>
           </a:stretch>

--- a/_implementation-notes/evening-series/FotH Evening Session 3 Slides DRAFT v1.pptx
+++ b/_implementation-notes/evening-series/FotH Evening Session 3 Slides DRAFT v1.pptx
@@ -5342,7 +5342,7 @@
           <a:p>
             <a:pPr algn="r"/>
             <a:r>
-              <a:t>41</a:t>
+              <a:t>45</a:t>
             </a:r>
             <a:endParaRPr sz="1000" b="1">
               <a:solidFill>
@@ -5625,7 +5625,7 @@
           <a:p>
             <a:pPr algn="r"/>
             <a:r>
-              <a:t>42</a:t>
+              <a:t>46</a:t>
             </a:r>
             <a:endParaRPr sz="1000" b="1">
               <a:solidFill>
@@ -5922,7 +5922,7 @@
           <a:p>
             <a:pPr algn="r"/>
             <a:r>
-              <a:t>43</a:t>
+              <a:t>47</a:t>
             </a:r>
             <a:endParaRPr sz="1000" b="1">
               <a:solidFill>
@@ -6150,7 +6150,7 @@
           <a:p>
             <a:pPr algn="r"/>
             <a:r>
-              <a:t>44</a:t>
+              <a:t>48</a:t>
             </a:r>
             <a:endParaRPr sz="1000" b="1">
               <a:solidFill>
@@ -6342,7 +6342,7 @@
           <a:p>
             <a:pPr algn="r"/>
             <a:r>
-              <a:t>44a</a:t>
+              <a:t>49</a:t>
             </a:r>
             <a:endParaRPr sz="1000" b="1">
               <a:solidFill>
@@ -6639,7 +6639,7 @@
           <a:p>
             <a:pPr algn="r"/>
             <a:r>
-              <a:t>45</a:t>
+              <a:t>50</a:t>
             </a:r>
             <a:endParaRPr sz="1000" b="1">
               <a:solidFill>
@@ -7084,7 +7084,7 @@
           <a:p>
             <a:pPr algn="r"/>
             <a:r>
-              <a:t>46</a:t>
+              <a:t>51</a:t>
             </a:r>
             <a:endParaRPr sz="1000" b="1">
               <a:solidFill>
@@ -7333,7 +7333,7 @@
           <a:p>
             <a:pPr algn="r"/>
             <a:r>
-              <a:t>34</a:t>
+              <a:t>37</a:t>
             </a:r>
             <a:endParaRPr sz="1000" b="1">
               <a:solidFill>
@@ -7514,7 +7514,7 @@
           <a:p>
             <a:pPr algn="r"/>
             <a:r>
-              <a:t>34a</a:t>
+              <a:t>38</a:t>
             </a:r>
             <a:endParaRPr sz="1000" b="1">
               <a:solidFill>
@@ -7953,7 +7953,7 @@
           <a:p>
             <a:pPr algn="r"/>
             <a:r>
-              <a:t>35</a:t>
+              <a:t>39</a:t>
             </a:r>
             <a:endParaRPr sz="1000" b="1">
               <a:solidFill>
@@ -8336,7 +8336,7 @@
           <a:p>
             <a:pPr algn="r"/>
             <a:r>
-              <a:t>36</a:t>
+              <a:t>40</a:t>
             </a:r>
             <a:endParaRPr sz="1000" b="1">
               <a:solidFill>
@@ -8583,7 +8583,7 @@
           <a:p>
             <a:pPr algn="r"/>
             <a:r>
-              <a:t>37</a:t>
+              <a:t>41</a:t>
             </a:r>
             <a:endParaRPr sz="1000" b="1">
               <a:solidFill>
@@ -8921,7 +8921,7 @@
           <a:p>
             <a:pPr algn="r"/>
             <a:r>
-              <a:t>38</a:t>
+              <a:t>42</a:t>
             </a:r>
             <a:endParaRPr sz="1000" b="1">
               <a:solidFill>
@@ -9211,7 +9211,7 @@
           <a:p>
             <a:pPr algn="r"/>
             <a:r>
-              <a:t>39</a:t>
+              <a:t>43</a:t>
             </a:r>
             <a:endParaRPr sz="1000" b="1">
               <a:solidFill>
@@ -9483,7 +9483,7 @@
           <a:p>
             <a:pPr algn="r"/>
             <a:r>
-              <a:t>40</a:t>
+              <a:t>44</a:t>
             </a:r>
             <a:endParaRPr sz="1000" b="1">
               <a:solidFill>

--- a/_implementation-notes/evening-series/FotH Evening Session 3 Slides DRAFT v1.pptx
+++ b/_implementation-notes/evening-series/FotH Evening Session 3 Slides DRAFT v1.pptx
@@ -7534,7 +7534,7 @@
           <p:nvPr/>
         </p:nvPicPr>
         <p:blipFill>
-          <a:blip r:embed="rId5"/>
+          <a:blip r:embed="rId6"/>
           <a:stretch>
             <a:fillRect/>
           </a:stretch>

--- a/_implementation-notes/evening-series/FotH Evening Session 3 Slides DRAFT v1.pptx
+++ b/_implementation-notes/evening-series/FotH Evening Session 3 Slides DRAFT v1.pptx
@@ -5190,7 +5190,7 @@
                 </a:solidFill>
                 <a:latin typeface="Calibri"/>
               </a:rPr>
-              <a:t>Tonight’s tellers: the parents — plus any Companion-in-Formation. The leadsanion goes first</a:t>
+              <a:t>Tonight’s tellers: the parents — plus any Companion-in-Formation. The Lead Companion goes first</a:t>
             </a:r>
           </a:p>
           <a:p>

--- a/_implementation-notes/evening-series/FotH Evening Session 3 Slides DRAFT v1.pptx
+++ b/_implementation-notes/evening-series/FotH Evening Session 3 Slides DRAFT v1.pptx
@@ -1461,7 +1461,7 @@
           <a:p>
             <a:r>
               <a:rPr lang="en-US" sz="1200"/>
-              <a:t>3. Send: families stay together; back in the main room at 5:14.</a:t>
+              <a:t>3. Send: families stay together; back in the main room at 8:20.</a:t>
             </a:r>
           </a:p>
           <a:p>
@@ -1609,7 +1609,7 @@
           <a:p>
             <a:r>
               <a:rPr lang="en-US" sz="1200"/>
-              <a:t>1. Reconvene; the room's texture will be different than at 4:38 — honor it, do not break it with energy.</a:t>
+              <a:t>1. Reconvene; the room's texture will be different than at 7:40 — honor it, do not break it with energy.</a:t>
             </a:r>
           </a:p>
           <a:p>

--- a/_implementation-notes/evening-series/FotH Evening Session 3 Slides DRAFT v1.pptx
+++ b/_implementation-notes/evening-series/FotH Evening Session 3 Slides DRAFT v1.pptx
@@ -1467,7 +1467,7 @@
           <a:p>
             <a:r>
               <a:rPr lang="en-US" sz="1200"/>
-              <a:t>CUES: Teen storytelling cards (H3.2) go home today for Week 4. Ten or fewer — stay one circle; the arranged parent tells after the Companion.</a:t>
+              <a:t>CUES: Teen storytelling cards (H3.2) go home today for Week 4. Ten or fewer — stay one circle; the arranged telling order holds.</a:t>
             </a:r>
           </a:p>
         </p:txBody>
@@ -1526,7 +1526,7 @@
           <a:p>
             <a:r>
               <a:rPr lang="en-US" sz="1200"/>
-              <a:t>1. In each pair: the Companion tells first, then the arranged parent, then the remaining parents. 5–7 minutes per story, 10 seconds of silence, 1–2 minute blessing round.</a:t>
+              <a:t>1. In each pair: the telling order is arranged beforehand — Companion-first stays available as a depth-setting lever when a pair needs it. 5–7 minutes per story, 10 seconds of silence, 1–2 minute blessing round.</a:t>
             </a:r>
           </a:p>
           <a:p>
@@ -5190,7 +5190,7 @@
                 </a:solidFill>
                 <a:latin typeface="Calibri"/>
               </a:rPr>
-              <a:t>Tonight’s tellers: the parents — plus any Companion-in-Formation. The Lead Companion goes first</a:t>
+              <a:t>Tonight’s tellers: the parents — plus any Companion-in-Formation. The telling order is arranged beforehand</a:t>
             </a:r>
           </a:p>
           <a:p>

--- a/_implementation-notes/evening-series/FotH Evening Session 3 Slides DRAFT v1.pptx
+++ b/_implementation-notes/evening-series/FotH Evening Session 3 Slides DRAFT v1.pptx
@@ -1821,38 +1821,37 @@
           <a:lstStyle/>
           <a:p>
             <a:r>
-              <a:rPr lang="en-US" sz="1200"/>
               <a:t>S3 · 8:28–8:30 · LEAD: CONTAINER HOLDER</a:t>
             </a:r>
           </a:p>
           <a:p>
             <a:r>
-              <a:rPr lang="en-US" sz="1200"/>
               <a:t>BEATS:</a:t>
             </a:r>
           </a:p>
           <a:p>
             <a:r>
-              <a:rPr lang="en-US" sz="1200"/>
               <a:t>1. Restate the container hard: your own story goes home with you; nobody else's does — not to a sibling, a friend, or a spouse not in this room.</a:t>
             </a:r>
           </a:p>
           <a:p>
             <a:r>
-              <a:rPr lang="en-US" sz="1200"/>
               <a:t>2. Name the help: reach out if today sits heavy — email, text, knock; the Crisis Quick-Reference Card is real and someone is there.</a:t>
             </a:r>
           </a:p>
           <a:p>
             <a:r>
-              <a:rPr lang="en-US" sz="1200"/>
               <a:t>3. Aaronic blessing. 'Go gently this week.'</a:t>
             </a:r>
           </a:p>
           <a:p>
             <a:r>
-              <a:rPr lang="en-US" sz="1200"/>
               <a:t>CUES: Do not pack up — stay accessible ten minutes; the work after the closing is sometimes the work.</a:t>
+            </a:r>
+          </a:p>
+          <a:p>
+            <a:r>
+              <a:t>BLESSINGS: eyes on the person, not the screen — nothing to read; say what is on your heart for them, specific and short.</a:t>
             </a:r>
           </a:p>
         </p:txBody>
@@ -6945,7 +6944,7 @@
                 </a:solidFill>
                 <a:latin typeface="Calibri"/>
               </a:rPr>
-              <a:t>Blessings — specific, witnessed, short</a:t>
+              <a:t>Blessings — eyes on the person, not the screen: say what is on your heart for them. Specific, witnessed, short</a:t>
             </a:r>
           </a:p>
           <a:p>
